--- a/static/decks/2222.SR.pptx
+++ b/static/decks/2222.SR.pptx
@@ -148,157 +148,157 @@
               <c:strCache>
                 <c:ptCount val="51"/>
                 <c:pt idx="0">
-                  <c:v>05-12</c:v>
+                  <c:v>05-13</c:v>
                 </c:pt>
                 <c:pt idx="1">
-                  <c:v>05-19</c:v>
+                  <c:v>05-20</c:v>
                 </c:pt>
                 <c:pt idx="2">
-                  <c:v>05-26</c:v>
+                  <c:v>05-27</c:v>
                 </c:pt>
                 <c:pt idx="3">
-                  <c:v>06-02</c:v>
+                  <c:v>06-03</c:v>
                 </c:pt>
                 <c:pt idx="4">
-                  <c:v>06-15</c:v>
+                  <c:v>06-16</c:v>
                 </c:pt>
                 <c:pt idx="5">
-                  <c:v>06-22</c:v>
+                  <c:v>06-23</c:v>
                 </c:pt>
                 <c:pt idx="6">
-                  <c:v>06-29</c:v>
+                  <c:v>06-30</c:v>
                 </c:pt>
                 <c:pt idx="7">
-                  <c:v>07-06</c:v>
+                  <c:v>07-07</c:v>
                 </c:pt>
                 <c:pt idx="8">
-                  <c:v>07-13</c:v>
+                  <c:v>07-14</c:v>
                 </c:pt>
                 <c:pt idx="9">
-                  <c:v>07-20</c:v>
+                  <c:v>07-21</c:v>
                 </c:pt>
                 <c:pt idx="10">
-                  <c:v>07-27</c:v>
+                  <c:v>07-28</c:v>
                 </c:pt>
                 <c:pt idx="11">
-                  <c:v>08-03</c:v>
+                  <c:v>08-04</c:v>
                 </c:pt>
                 <c:pt idx="12">
-                  <c:v>08-10</c:v>
+                  <c:v>08-11</c:v>
                 </c:pt>
                 <c:pt idx="13">
-                  <c:v>08-17</c:v>
+                  <c:v>08-18</c:v>
                 </c:pt>
                 <c:pt idx="14">
-                  <c:v>08-24</c:v>
+                  <c:v>08-25</c:v>
                 </c:pt>
                 <c:pt idx="15">
-                  <c:v>08-31</c:v>
+                  <c:v>09-01</c:v>
                 </c:pt>
                 <c:pt idx="16">
-                  <c:v>09-07</c:v>
+                  <c:v>09-08</c:v>
                 </c:pt>
                 <c:pt idx="17">
-                  <c:v>09-14</c:v>
+                  <c:v>09-15</c:v>
                 </c:pt>
                 <c:pt idx="18">
-                  <c:v>09-21</c:v>
+                  <c:v>09-22</c:v>
                 </c:pt>
                 <c:pt idx="19">
-                  <c:v>09-29</c:v>
+                  <c:v>09-30</c:v>
                 </c:pt>
                 <c:pt idx="20">
-                  <c:v>10-06</c:v>
+                  <c:v>10-07</c:v>
                 </c:pt>
                 <c:pt idx="21">
-                  <c:v>10-13</c:v>
+                  <c:v>10-14</c:v>
                 </c:pt>
                 <c:pt idx="22">
-                  <c:v>10-20</c:v>
+                  <c:v>10-21</c:v>
                 </c:pt>
                 <c:pt idx="23">
-                  <c:v>10-27</c:v>
+                  <c:v>10-28</c:v>
                 </c:pt>
                 <c:pt idx="24">
-                  <c:v>11-03</c:v>
+                  <c:v>11-04</c:v>
                 </c:pt>
                 <c:pt idx="25">
-                  <c:v>11-10</c:v>
+                  <c:v>11-11</c:v>
                 </c:pt>
                 <c:pt idx="26">
-                  <c:v>11-17</c:v>
+                  <c:v>11-18</c:v>
                 </c:pt>
                 <c:pt idx="27">
-                  <c:v>11-24</c:v>
+                  <c:v>11-25</c:v>
                 </c:pt>
                 <c:pt idx="28">
-                  <c:v>12-01</c:v>
+                  <c:v>12-02</c:v>
                 </c:pt>
                 <c:pt idx="29">
-                  <c:v>12-08</c:v>
+                  <c:v>12-09</c:v>
                 </c:pt>
                 <c:pt idx="30">
-                  <c:v>12-15</c:v>
+                  <c:v>12-16</c:v>
                 </c:pt>
                 <c:pt idx="31">
-                  <c:v>12-22</c:v>
+                  <c:v>12-23</c:v>
                 </c:pt>
                 <c:pt idx="32">
-                  <c:v>12-29</c:v>
+                  <c:v>12-30</c:v>
                 </c:pt>
                 <c:pt idx="33">
-                  <c:v>01-05</c:v>
+                  <c:v>01-06</c:v>
                 </c:pt>
                 <c:pt idx="34">
-                  <c:v>01-12</c:v>
+                  <c:v>01-13</c:v>
                 </c:pt>
                 <c:pt idx="35">
-                  <c:v>01-19</c:v>
+                  <c:v>01-20</c:v>
                 </c:pt>
                 <c:pt idx="36">
-                  <c:v>01-26</c:v>
+                  <c:v>01-27</c:v>
                 </c:pt>
                 <c:pt idx="37">
-                  <c:v>02-02</c:v>
+                  <c:v>02-03</c:v>
                 </c:pt>
                 <c:pt idx="38">
-                  <c:v>02-09</c:v>
+                  <c:v>02-10</c:v>
                 </c:pt>
                 <c:pt idx="39">
-                  <c:v>02-16</c:v>
+                  <c:v>02-17</c:v>
                 </c:pt>
                 <c:pt idx="40">
-                  <c:v>02-24</c:v>
+                  <c:v>02-25</c:v>
                 </c:pt>
                 <c:pt idx="41">
-                  <c:v>03-03</c:v>
+                  <c:v>03-04</c:v>
                 </c:pt>
                 <c:pt idx="42">
-                  <c:v>03-10</c:v>
+                  <c:v>03-11</c:v>
                 </c:pt>
                 <c:pt idx="43">
-                  <c:v>03-24</c:v>
+                  <c:v>03-25</c:v>
                 </c:pt>
                 <c:pt idx="44">
-                  <c:v>03-31</c:v>
+                  <c:v>04-01</c:v>
                 </c:pt>
                 <c:pt idx="45">
-                  <c:v>04-07</c:v>
+                  <c:v>04-08</c:v>
                 </c:pt>
                 <c:pt idx="46">
-                  <c:v>04-14</c:v>
+                  <c:v>04-15</c:v>
                 </c:pt>
                 <c:pt idx="47">
-                  <c:v>04-21</c:v>
+                  <c:v>04-22</c:v>
                 </c:pt>
                 <c:pt idx="48">
-                  <c:v>04-28</c:v>
+                  <c:v>04-29</c:v>
                 </c:pt>
                 <c:pt idx="49">
-                  <c:v>05-05</c:v>
+                  <c:v>05-06</c:v>
                 </c:pt>
                 <c:pt idx="50">
-                  <c:v>05-12</c:v>
+                  <c:v>05-13</c:v>
                 </c:pt>
               </c:strCache>
             </c:strRef>
@@ -313,76 +313,76 @@
                   <c:v>25.549999237060547</c:v>
                 </c:pt>
                 <c:pt idx="1">
-                  <c:v>26.25</c:v>
+                  <c:v>26.200000762939453</c:v>
                 </c:pt>
                 <c:pt idx="2">
-                  <c:v>25.200000762939453</c:v>
+                  <c:v>25.049999237060547</c:v>
                 </c:pt>
                 <c:pt idx="3">
-                  <c:v>25.0</c:v>
+                  <c:v>24.81999969482422</c:v>
                 </c:pt>
                 <c:pt idx="4">
-                  <c:v>25.399999618530273</c:v>
+                  <c:v>25.299999237060547</c:v>
                 </c:pt>
                 <c:pt idx="5">
-                  <c:v>24.81999969482422</c:v>
+                  <c:v>24.739999771118164</c:v>
                 </c:pt>
                 <c:pt idx="6">
-                  <c:v>24.299999237060547</c:v>
+                  <c:v>24.31999969482422</c:v>
                 </c:pt>
                 <c:pt idx="7">
-                  <c:v>24.8700008392334</c:v>
+                  <c:v>25.079999923706055</c:v>
                 </c:pt>
                 <c:pt idx="8">
-                  <c:v>24.959999084472656</c:v>
+                  <c:v>24.860000610351562</c:v>
                 </c:pt>
                 <c:pt idx="9">
-                  <c:v>24.110000610351562</c:v>
+                  <c:v>24.100000381469727</c:v>
                 </c:pt>
                 <c:pt idx="10">
-                  <c:v>24.110000610351562</c:v>
+                  <c:v>24.15999984741211</c:v>
                 </c:pt>
                 <c:pt idx="11">
-                  <c:v>24.0</c:v>
+                  <c:v>23.90999984741211</c:v>
                 </c:pt>
                 <c:pt idx="12">
-                  <c:v>24.139999389648438</c:v>
+                  <c:v>24.049999237060547</c:v>
                 </c:pt>
                 <c:pt idx="13">
-                  <c:v>24.15999984741211</c:v>
+                  <c:v>24.1299991607666</c:v>
                 </c:pt>
                 <c:pt idx="14">
-                  <c:v>23.8700008392334</c:v>
+                  <c:v>23.790000915527344</c:v>
                 </c:pt>
                 <c:pt idx="15">
-                  <c:v>23.799999237060547</c:v>
+                  <c:v>23.600000381469727</c:v>
                 </c:pt>
                 <c:pt idx="16">
-                  <c:v>23.469999313354492</c:v>
+                  <c:v>23.25</c:v>
                 </c:pt>
                 <c:pt idx="17">
-                  <c:v>23.15999984741211</c:v>
+                  <c:v>23.219999313354492</c:v>
                 </c:pt>
                 <c:pt idx="18">
-                  <c:v>24.93000030517578</c:v>
+                  <c:v>24.950000762939453</c:v>
                 </c:pt>
                 <c:pt idx="19">
-                  <c:v>24.989999771118164</c:v>
+                  <c:v>24.6200008392334</c:v>
                 </c:pt>
                 <c:pt idx="20">
-                  <c:v>24.850000381469727</c:v>
+                  <c:v>24.809999465942383</c:v>
                 </c:pt>
                 <c:pt idx="21">
-                  <c:v>24.729999542236328</c:v>
+                  <c:v>24.75</c:v>
                 </c:pt>
                 <c:pt idx="22">
-                  <c:v>25.059999465942383</c:v>
+                  <c:v>25.040000915527344</c:v>
                 </c:pt>
                 <c:pt idx="23">
-                  <c:v>25.799999237060547</c:v>
+                  <c:v>25.8799991607666</c:v>
                 </c:pt>
                 <c:pt idx="24">
-                  <c:v>25.579999923706055</c:v>
+                  <c:v>25.760000228881836</c:v>
                 </c:pt>
                 <c:pt idx="25">
                   <c:v>25.940000534057617</c:v>
@@ -391,31 +391,31 @@
                   <c:v>25.84000015258789</c:v>
                 </c:pt>
                 <c:pt idx="27">
-                  <c:v>25.239999771118164</c:v>
+                  <c:v>24.56999969482422</c:v>
                 </c:pt>
                 <c:pt idx="28">
-                  <c:v>24.329999923706055</c:v>
+                  <c:v>24.399999618530273</c:v>
                 </c:pt>
                 <c:pt idx="29">
-                  <c:v>24.31999969482422</c:v>
+                  <c:v>24.34000015258789</c:v>
                 </c:pt>
                 <c:pt idx="30">
-                  <c:v>24.0</c:v>
+                  <c:v>23.75</c:v>
                 </c:pt>
                 <c:pt idx="31">
-                  <c:v>23.75</c:v>
+                  <c:v>23.760000228881836</c:v>
                 </c:pt>
                 <c:pt idx="32">
-                  <c:v>23.700000762939453</c:v>
+                  <c:v>23.6200008392334</c:v>
                 </c:pt>
                 <c:pt idx="33">
-                  <c:v>23.40999984741211</c:v>
+                  <c:v>23.440000534057617</c:v>
                 </c:pt>
                 <c:pt idx="34">
-                  <c:v>24.260000228881836</c:v>
+                  <c:v>24.920000076293945</c:v>
                 </c:pt>
                 <c:pt idx="35">
-                  <c:v>24.889999389648438</c:v>
+                  <c:v>25.0</c:v>
                 </c:pt>
                 <c:pt idx="36">
                   <c:v>25.260000228881836</c:v>
@@ -424,43 +424,43 @@
                   <c:v>25.600000381469727</c:v>
                 </c:pt>
                 <c:pt idx="38">
-                  <c:v>25.68000030517578</c:v>
+                  <c:v>25.860000610351562</c:v>
                 </c:pt>
                 <c:pt idx="39">
-                  <c:v>25.600000381469727</c:v>
+                  <c:v>25.440000534057617</c:v>
                 </c:pt>
                 <c:pt idx="40">
-                  <c:v>25.84000015258789</c:v>
+                  <c:v>25.739999771118164</c:v>
                 </c:pt>
                 <c:pt idx="41">
-                  <c:v>26.719999313354492</c:v>
+                  <c:v>26.100000381469727</c:v>
                 </c:pt>
                 <c:pt idx="42">
-                  <c:v>26.899999618530273</c:v>
+                  <c:v>27.15999984741211</c:v>
                 </c:pt>
                 <c:pt idx="43">
-                  <c:v>26.65999984741211</c:v>
+                  <c:v>26.860000610351562</c:v>
                 </c:pt>
                 <c:pt idx="44">
-                  <c:v>27.399999618530273</c:v>
+                  <c:v>27.559999465942383</c:v>
                 </c:pt>
                 <c:pt idx="45">
-                  <c:v>27.520000457763672</c:v>
+                  <c:v>26.979999542236328</c:v>
                 </c:pt>
                 <c:pt idx="46">
-                  <c:v>27.360000610351562</c:v>
+                  <c:v>27.540000915527344</c:v>
                 </c:pt>
                 <c:pt idx="47">
-                  <c:v>27.15999984741211</c:v>
+                  <c:v>27.260000228881836</c:v>
                 </c:pt>
                 <c:pt idx="48">
-                  <c:v>27.459999084472656</c:v>
+                  <c:v>27.579999923706055</c:v>
                 </c:pt>
                 <c:pt idx="49">
-                  <c:v>27.780000686645508</c:v>
+                  <c:v>27.0</c:v>
                 </c:pt>
                 <c:pt idx="50">
-                  <c:v>27.81999969482422</c:v>
+                  <c:v>27.8799991607666</c:v>
                 </c:pt>
               </c:numCache>
             </c:numRef>
@@ -4259,7 +4259,7 @@
                 </a:solidFill>
                 <a:latin typeface="Calibri"/>
               </a:rPr>
-              <a:t>SAR 30.00</a:t>
+              <a:t>SAR 29.60</a:t>
             </a:r>
           </a:p>
         </p:txBody>
@@ -4419,7 +4419,7 @@
                 </a:solidFill>
                 <a:latin typeface="Calibri"/>
               </a:rPr>
-              <a:t>+7.8%</a:t>
+              <a:t>+6.4%</a:t>
             </a:r>
           </a:p>
         </p:txBody>
@@ -4638,7 +4638,7 @@
                 </a:solidFill>
                 <a:latin typeface="Calibri"/>
               </a:rPr>
-              <a:t>SAR 6.69T</a:t>
+              <a:t>SAR 6.73T</a:t>
             </a:r>
           </a:p>
         </p:txBody>
@@ -4778,7 +4778,7 @@
                 </a:solidFill>
                 <a:latin typeface="Calibri"/>
               </a:rPr>
-              <a:t>13.6x</a:t>
+              <a:t>15.1x</a:t>
             </a:r>
           </a:p>
         </p:txBody>
@@ -4848,7 +4848,7 @@
                 </a:solidFill>
                 <a:latin typeface="Calibri"/>
               </a:rPr>
-              <a:t>5.66%</a:t>
+              <a:t>5.63%</a:t>
             </a:r>
           </a:p>
         </p:txBody>
@@ -5067,7 +5067,7 @@
                 </a:solidFill>
                 <a:latin typeface="Calibri"/>
               </a:rPr>
-              <a:t>+0.7%</a:t>
+              <a:t>+0.2%</a:t>
             </a:r>
           </a:p>
         </p:txBody>
@@ -5137,7 +5137,7 @@
                 </a:solidFill>
                 <a:latin typeface="Calibri"/>
               </a:rPr>
-              <a:t>+0.1%</a:t>
+              <a:t>+3.3%</a:t>
             </a:r>
           </a:p>
         </p:txBody>
@@ -5207,7 +5207,7 @@
                 </a:solidFill>
                 <a:latin typeface="Calibri"/>
               </a:rPr>
-              <a:t>+0.8%</a:t>
+              <a:t>+1.9%</a:t>
             </a:r>
           </a:p>
         </p:txBody>
@@ -5277,7 +5277,7 @@
                 </a:solidFill>
                 <a:latin typeface="Calibri"/>
               </a:rPr>
-              <a:t>+8.4%</a:t>
+              <a:t>+8.9%</a:t>
             </a:r>
           </a:p>
         </p:txBody>
@@ -5347,7 +5347,7 @@
                 </a:solidFill>
                 <a:latin typeface="Calibri"/>
               </a:rPr>
-              <a:t>+8.2%</a:t>
+              <a:t>+7.5%</a:t>
             </a:r>
           </a:p>
         </p:txBody>
@@ -5417,7 +5417,7 @@
                 </a:solidFill>
                 <a:latin typeface="Calibri"/>
               </a:rPr>
-              <a:t>+16.5%</a:t>
+              <a:t>+16.8%</a:t>
             </a:r>
           </a:p>
         </p:txBody>
@@ -5566,7 +5566,7 @@
                 </a:solidFill>
                 <a:latin typeface="Calibri"/>
               </a:rPr>
-              <a:t>SAR 27.82</a:t>
+              <a:t>SAR 27.88</a:t>
             </a:r>
           </a:p>
         </p:txBody>
@@ -5623,7 +5623,7 @@
         <p:spPr>
           <a:xfrm>
             <a:off x="1280160" y="6400799"/>
-            <a:ext cx="4297679" cy="54864"/>
+            <a:ext cx="4243394" cy="54864"/>
           </a:xfrm>
           <a:prstGeom prst="rect">
             <a:avLst/>
@@ -5665,7 +5665,7 @@
         </p:nvSpPr>
         <p:spPr>
           <a:xfrm>
-            <a:off x="5495544" y="6345936"/>
+            <a:off x="5441258" y="6345936"/>
             <a:ext cx="164592" cy="164592"/>
           </a:xfrm>
           <a:prstGeom prst="diamond">
@@ -5708,7 +5708,7 @@
         </p:nvSpPr>
         <p:spPr>
           <a:xfrm>
-            <a:off x="4937759" y="6565392"/>
+            <a:off x="4883474" y="6565392"/>
             <a:ext cx="1280160" cy="182880"/>
           </a:xfrm>
           <a:prstGeom prst="rect">
@@ -6999,7 +6999,7 @@
                 </a:solidFill>
                 <a:latin typeface="Calibri"/>
               </a:rPr>
-              <a:t>Jabal maintains a constructive view into the upcoming print. Saudi Arabian Oil Company sits in the Energy sector (Oil &amp; Gas Integrated). The shares trade at a P/E around 15.0x trailing earnings. The macro and commodity backdrop is anchored by brent at 68  (-20.9% YoY); wti at 64  (-21.9% YoY). Macro context: local-economy GDP growth recently at 2.0%. The thesis hinges on three factors: demand trajectory through H2, feedstock/input-cost discipline, and management's tone on guidance during the call. We expect the print itself to be within consensus bounds; the read on forward commentary is the swing factor.</a:t>
+              <a:t>Jabal maintains a constructive view into the upcoming print. Saudi Arabian Oil Company sits in the Energy sector (Oil &amp; Gas Integrated). Street consensus is outperform (18 analysts covering); consensus target 29.60. The shares trade at a P/E around 15.1x trailing earnings. The macro and commodity backdrop is anchored by brent at 68  (-20.9% YoY); wti at 64  (-21.9% YoY). The thesis hinges on three factors: demand trajectory through H2, feedstock/input-cost discipline, and management's tone on guidance during the call. We expect the print itself to be within consensus bounds; the read on forward commentary is the swing factor.</a:t>
             </a:r>
           </a:p>
         </p:txBody>
@@ -7367,7 +7367,7 @@
                 </a:solidFill>
                 <a:latin typeface="Calibri"/>
               </a:rPr>
-              <a:t>EPS — Next Q</a:t>
+              <a:t>EPS — 06/2026</a:t>
             </a:r>
           </a:p>
         </p:txBody>
@@ -7437,7 +7437,7 @@
                 </a:solidFill>
                 <a:latin typeface="Calibri"/>
               </a:rPr>
-              <a:t>—</a:t>
+              <a:t>0.463</a:t>
             </a:r>
           </a:p>
         </p:txBody>
@@ -7585,7 +7585,7 @@
                 </a:solidFill>
                 <a:latin typeface="Calibri"/>
               </a:rPr>
-              <a:t>Revenue — Next Q</a:t>
+              <a:t>Revenue — 06/2026</a:t>
             </a:r>
           </a:p>
         </p:txBody>
@@ -7655,7 +7655,7 @@
                 </a:solidFill>
                 <a:latin typeface="Calibri"/>
               </a:rPr>
-              <a:t>—</a:t>
+              <a:t>445.3B</a:t>
             </a:r>
           </a:p>
         </p:txBody>
@@ -7760,7 +7760,7 @@
                 </a:solidFill>
                 <a:latin typeface="Calibri"/>
               </a:rPr>
-              <a:t>EPS (FY est.)</a:t>
+              <a:t>EPS — FY2026</a:t>
             </a:r>
           </a:p>
         </p:txBody>
@@ -7830,7 +7830,7 @@
                 </a:solidFill>
                 <a:latin typeface="Calibri"/>
               </a:rPr>
-              <a:t>—</a:t>
+              <a:t>0.520</a:t>
             </a:r>
           </a:p>
         </p:txBody>
@@ -7978,7 +7978,7 @@
                 </a:solidFill>
                 <a:latin typeface="Calibri"/>
               </a:rPr>
-              <a:t>Revenue (FY est.)</a:t>
+              <a:t>Revenue — FY2026</a:t>
             </a:r>
           </a:p>
         </p:txBody>
@@ -8048,7 +8048,7 @@
                 </a:solidFill>
                 <a:latin typeface="Calibri"/>
               </a:rPr>
-              <a:t>—</a:t>
+              <a:t>493.3B</a:t>
             </a:r>
           </a:p>
         </p:txBody>
@@ -8153,7 +8153,7 @@
                 </a:solidFill>
                 <a:latin typeface="Calibri"/>
               </a:rPr>
-              <a:t>Dividend yield (TTM)</a:t>
+              <a:t>EPS — FY2027</a:t>
             </a:r>
           </a:p>
         </p:txBody>
@@ -8223,7 +8223,7 @@
                 </a:solidFill>
                 <a:latin typeface="Calibri"/>
               </a:rPr>
-              <a:t>5.66%</a:t>
+              <a:t>0.580</a:t>
             </a:r>
           </a:p>
         </p:txBody>
@@ -8300,7 +8300,400 @@
       </p:sp>
       <p:sp>
         <p:nvSpPr>
-          <p:cNvPr id="49" name="TextBox 48"/>
+          <p:cNvPr id="49" name="Rectangle 48"/>
+          <p:cNvSpPr/>
+          <p:nvPr/>
+        </p:nvSpPr>
+        <p:spPr>
+          <a:xfrm>
+            <a:off x="411480" y="5724144"/>
+            <a:ext cx="6035040" cy="274320"/>
+          </a:xfrm>
+          <a:prstGeom prst="rect">
+            <a:avLst/>
+          </a:prstGeom>
+          <a:solidFill>
+            <a:srgbClr val="EFE8DC"/>
+          </a:solidFill>
+          <a:ln>
+            <a:noFill/>
+          </a:ln>
+        </p:spPr>
+        <p:style>
+          <a:lnRef idx="1">
+            <a:schemeClr val="accent1"/>
+          </a:lnRef>
+          <a:fillRef idx="3">
+            <a:schemeClr val="accent1"/>
+          </a:fillRef>
+          <a:effectRef idx="2">
+            <a:schemeClr val="accent1"/>
+          </a:effectRef>
+          <a:fontRef idx="minor">
+            <a:schemeClr val="lt1"/>
+          </a:fontRef>
+        </p:style>
+        <p:txBody>
+          <a:bodyPr rtlCol="0" anchor="ctr"/>
+          <a:lstStyle/>
+          <a:p>
+            <a:pPr algn="ctr"/>
+          </a:p>
+        </p:txBody>
+      </p:sp>
+      <p:sp>
+        <p:nvSpPr>
+          <p:cNvPr id="50" name="TextBox 49"/>
+          <p:cNvSpPr txBox="1"/>
+          <p:nvPr/>
+        </p:nvSpPr>
+        <p:spPr>
+          <a:xfrm>
+            <a:off x="411480" y="5742432"/>
+            <a:ext cx="2148840" cy="274320"/>
+          </a:xfrm>
+          <a:prstGeom prst="rect">
+            <a:avLst/>
+          </a:prstGeom>
+          <a:noFill/>
+        </p:spPr>
+        <p:txBody>
+          <a:bodyPr wrap="square" lIns="0" rIns="0" tIns="0" bIns="0" anchor="t">
+            <a:spAutoFit/>
+          </a:bodyPr>
+          <a:lstStyle/>
+          <a:p>
+            <a:pPr algn="l"/>
+            <a:r>
+              <a:rPr sz="1000" b="0">
+                <a:solidFill>
+                  <a:srgbClr val="1A1A1A"/>
+                </a:solidFill>
+                <a:latin typeface="Calibri"/>
+              </a:rPr>
+              <a:t>Revenue — FY2027</a:t>
+            </a:r>
+          </a:p>
+        </p:txBody>
+      </p:sp>
+      <p:sp>
+        <p:nvSpPr>
+          <p:cNvPr id="51" name="TextBox 50"/>
+          <p:cNvSpPr txBox="1"/>
+          <p:nvPr/>
+        </p:nvSpPr>
+        <p:spPr>
+          <a:xfrm>
+            <a:off x="2606040" y="5742432"/>
+            <a:ext cx="960120" cy="274320"/>
+          </a:xfrm>
+          <a:prstGeom prst="rect">
+            <a:avLst/>
+          </a:prstGeom>
+          <a:noFill/>
+        </p:spPr>
+        <p:txBody>
+          <a:bodyPr wrap="square" lIns="0" rIns="0" tIns="0" bIns="0" anchor="t">
+            <a:spAutoFit/>
+          </a:bodyPr>
+          <a:lstStyle/>
+          <a:p>
+            <a:pPr algn="r"/>
+            <a:r>
+              <a:rPr sz="1000" b="0">
+                <a:solidFill>
+                  <a:srgbClr val="1A1A1A"/>
+                </a:solidFill>
+                <a:latin typeface="Calibri"/>
+              </a:rPr>
+              <a:t>—</a:t>
+            </a:r>
+          </a:p>
+        </p:txBody>
+      </p:sp>
+      <p:sp>
+        <p:nvSpPr>
+          <p:cNvPr id="52" name="TextBox 51"/>
+          <p:cNvSpPr txBox="1"/>
+          <p:nvPr/>
+        </p:nvSpPr>
+        <p:spPr>
+          <a:xfrm>
+            <a:off x="3611880" y="5742432"/>
+            <a:ext cx="960120" cy="274320"/>
+          </a:xfrm>
+          <a:prstGeom prst="rect">
+            <a:avLst/>
+          </a:prstGeom>
+          <a:noFill/>
+        </p:spPr>
+        <p:txBody>
+          <a:bodyPr wrap="square" lIns="0" rIns="0" tIns="0" bIns="0" anchor="t">
+            <a:spAutoFit/>
+          </a:bodyPr>
+          <a:lstStyle/>
+          <a:p>
+            <a:pPr algn="r"/>
+            <a:r>
+              <a:rPr sz="1000" b="0">
+                <a:solidFill>
+                  <a:srgbClr val="1A1A1A"/>
+                </a:solidFill>
+                <a:latin typeface="Calibri"/>
+              </a:rPr>
+              <a:t>544.1B</a:t>
+            </a:r>
+          </a:p>
+        </p:txBody>
+      </p:sp>
+      <p:sp>
+        <p:nvSpPr>
+          <p:cNvPr id="53" name="TextBox 52"/>
+          <p:cNvSpPr txBox="1"/>
+          <p:nvPr/>
+        </p:nvSpPr>
+        <p:spPr>
+          <a:xfrm>
+            <a:off x="4617720" y="5742432"/>
+            <a:ext cx="960120" cy="274320"/>
+          </a:xfrm>
+          <a:prstGeom prst="rect">
+            <a:avLst/>
+          </a:prstGeom>
+          <a:noFill/>
+        </p:spPr>
+        <p:txBody>
+          <a:bodyPr wrap="square" lIns="0" rIns="0" tIns="0" bIns="0" anchor="t">
+            <a:spAutoFit/>
+          </a:bodyPr>
+          <a:lstStyle/>
+          <a:p>
+            <a:pPr algn="r"/>
+            <a:r>
+              <a:rPr sz="1000" b="0">
+                <a:solidFill>
+                  <a:srgbClr val="1A1A1A"/>
+                </a:solidFill>
+                <a:latin typeface="Calibri"/>
+              </a:rPr>
+              <a:t>—</a:t>
+            </a:r>
+          </a:p>
+        </p:txBody>
+      </p:sp>
+      <p:sp>
+        <p:nvSpPr>
+          <p:cNvPr id="54" name="TextBox 53"/>
+          <p:cNvSpPr txBox="1"/>
+          <p:nvPr/>
+        </p:nvSpPr>
+        <p:spPr>
+          <a:xfrm>
+            <a:off x="5623560" y="5742432"/>
+            <a:ext cx="777240" cy="274320"/>
+          </a:xfrm>
+          <a:prstGeom prst="rect">
+            <a:avLst/>
+          </a:prstGeom>
+          <a:noFill/>
+        </p:spPr>
+        <p:txBody>
+          <a:bodyPr wrap="square" lIns="0" rIns="0" tIns="0" bIns="0" anchor="t">
+            <a:spAutoFit/>
+          </a:bodyPr>
+          <a:lstStyle/>
+          <a:p>
+            <a:pPr algn="r"/>
+            <a:r>
+              <a:rPr sz="1000" b="0">
+                <a:solidFill>
+                  <a:srgbClr val="1A1A1A"/>
+                </a:solidFill>
+                <a:latin typeface="Calibri"/>
+              </a:rPr>
+              <a:t>—</a:t>
+            </a:r>
+          </a:p>
+        </p:txBody>
+      </p:sp>
+      <p:sp>
+        <p:nvSpPr>
+          <p:cNvPr id="55" name="TextBox 54"/>
+          <p:cNvSpPr txBox="1"/>
+          <p:nvPr/>
+        </p:nvSpPr>
+        <p:spPr>
+          <a:xfrm>
+            <a:off x="411480" y="6016752"/>
+            <a:ext cx="2148840" cy="274320"/>
+          </a:xfrm>
+          <a:prstGeom prst="rect">
+            <a:avLst/>
+          </a:prstGeom>
+          <a:noFill/>
+        </p:spPr>
+        <p:txBody>
+          <a:bodyPr wrap="square" lIns="0" rIns="0" tIns="0" bIns="0" anchor="t">
+            <a:spAutoFit/>
+          </a:bodyPr>
+          <a:lstStyle/>
+          <a:p>
+            <a:pPr algn="l"/>
+            <a:r>
+              <a:rPr sz="1000" b="0">
+                <a:solidFill>
+                  <a:srgbClr val="1A1A1A"/>
+                </a:solidFill>
+                <a:latin typeface="Calibri"/>
+              </a:rPr>
+              <a:t>Dividend yield (TTM)</a:t>
+            </a:r>
+          </a:p>
+        </p:txBody>
+      </p:sp>
+      <p:sp>
+        <p:nvSpPr>
+          <p:cNvPr id="56" name="TextBox 55"/>
+          <p:cNvSpPr txBox="1"/>
+          <p:nvPr/>
+        </p:nvSpPr>
+        <p:spPr>
+          <a:xfrm>
+            <a:off x="2606040" y="6016752"/>
+            <a:ext cx="960120" cy="274320"/>
+          </a:xfrm>
+          <a:prstGeom prst="rect">
+            <a:avLst/>
+          </a:prstGeom>
+          <a:noFill/>
+        </p:spPr>
+        <p:txBody>
+          <a:bodyPr wrap="square" lIns="0" rIns="0" tIns="0" bIns="0" anchor="t">
+            <a:spAutoFit/>
+          </a:bodyPr>
+          <a:lstStyle/>
+          <a:p>
+            <a:pPr algn="r"/>
+            <a:r>
+              <a:rPr sz="1000" b="0">
+                <a:solidFill>
+                  <a:srgbClr val="1A1A1A"/>
+                </a:solidFill>
+                <a:latin typeface="Calibri"/>
+              </a:rPr>
+              <a:t>—</a:t>
+            </a:r>
+          </a:p>
+        </p:txBody>
+      </p:sp>
+      <p:sp>
+        <p:nvSpPr>
+          <p:cNvPr id="57" name="TextBox 56"/>
+          <p:cNvSpPr txBox="1"/>
+          <p:nvPr/>
+        </p:nvSpPr>
+        <p:spPr>
+          <a:xfrm>
+            <a:off x="3611880" y="6016752"/>
+            <a:ext cx="960120" cy="274320"/>
+          </a:xfrm>
+          <a:prstGeom prst="rect">
+            <a:avLst/>
+          </a:prstGeom>
+          <a:noFill/>
+        </p:spPr>
+        <p:txBody>
+          <a:bodyPr wrap="square" lIns="0" rIns="0" tIns="0" bIns="0" anchor="t">
+            <a:spAutoFit/>
+          </a:bodyPr>
+          <a:lstStyle/>
+          <a:p>
+            <a:pPr algn="r"/>
+            <a:r>
+              <a:rPr sz="1000" b="0">
+                <a:solidFill>
+                  <a:srgbClr val="1A1A1A"/>
+                </a:solidFill>
+                <a:latin typeface="Calibri"/>
+              </a:rPr>
+              <a:t>5.63%</a:t>
+            </a:r>
+          </a:p>
+        </p:txBody>
+      </p:sp>
+      <p:sp>
+        <p:nvSpPr>
+          <p:cNvPr id="58" name="TextBox 57"/>
+          <p:cNvSpPr txBox="1"/>
+          <p:nvPr/>
+        </p:nvSpPr>
+        <p:spPr>
+          <a:xfrm>
+            <a:off x="4617720" y="6016752"/>
+            <a:ext cx="960120" cy="274320"/>
+          </a:xfrm>
+          <a:prstGeom prst="rect">
+            <a:avLst/>
+          </a:prstGeom>
+          <a:noFill/>
+        </p:spPr>
+        <p:txBody>
+          <a:bodyPr wrap="square" lIns="0" rIns="0" tIns="0" bIns="0" anchor="t">
+            <a:spAutoFit/>
+          </a:bodyPr>
+          <a:lstStyle/>
+          <a:p>
+            <a:pPr algn="r"/>
+            <a:r>
+              <a:rPr sz="1000" b="0">
+                <a:solidFill>
+                  <a:srgbClr val="1A1A1A"/>
+                </a:solidFill>
+                <a:latin typeface="Calibri"/>
+              </a:rPr>
+              <a:t>—</a:t>
+            </a:r>
+          </a:p>
+        </p:txBody>
+      </p:sp>
+      <p:sp>
+        <p:nvSpPr>
+          <p:cNvPr id="59" name="TextBox 58"/>
+          <p:cNvSpPr txBox="1"/>
+          <p:nvPr/>
+        </p:nvSpPr>
+        <p:spPr>
+          <a:xfrm>
+            <a:off x="5623560" y="6016752"/>
+            <a:ext cx="777240" cy="274320"/>
+          </a:xfrm>
+          <a:prstGeom prst="rect">
+            <a:avLst/>
+          </a:prstGeom>
+          <a:noFill/>
+        </p:spPr>
+        <p:txBody>
+          <a:bodyPr wrap="square" lIns="0" rIns="0" tIns="0" bIns="0" anchor="t">
+            <a:spAutoFit/>
+          </a:bodyPr>
+          <a:lstStyle/>
+          <a:p>
+            <a:pPr algn="r"/>
+            <a:r>
+              <a:rPr sz="1000" b="0">
+                <a:solidFill>
+                  <a:srgbClr val="1A1A1A"/>
+                </a:solidFill>
+                <a:latin typeface="Calibri"/>
+              </a:rPr>
+              <a:t>—</a:t>
+            </a:r>
+          </a:p>
+        </p:txBody>
+      </p:sp>
+      <p:sp>
+        <p:nvSpPr>
+          <p:cNvPr id="60" name="TextBox 59"/>
           <p:cNvSpPr txBox="1"/>
           <p:nvPr/>
         </p:nvSpPr>
@@ -8328,14 +8721,14 @@
                 </a:solidFill>
                 <a:latin typeface="Calibri"/>
               </a:rPr>
-              <a:t>Consensus: Marketscreener</a:t>
-            </a:r>
-          </a:p>
-        </p:txBody>
-      </p:sp>
-      <p:sp>
-        <p:nvSpPr>
-          <p:cNvPr id="50" name="Rectangle 49"/>
+              <a:t>Next print: Aug 04, 2026 (period 06/2026)  ·  Consensus: Investing  ·  18 analysts covering</a:t>
+            </a:r>
+          </a:p>
+        </p:txBody>
+      </p:sp>
+      <p:sp>
+        <p:nvSpPr>
+          <p:cNvPr id="61" name="Rectangle 60"/>
           <p:cNvSpPr/>
           <p:nvPr/>
         </p:nvSpPr>
@@ -8381,7 +8774,7 @@
       </p:sp>
       <p:sp>
         <p:nvSpPr>
-          <p:cNvPr id="51" name="Rectangle 50"/>
+          <p:cNvPr id="62" name="Rectangle 61"/>
           <p:cNvSpPr/>
           <p:nvPr/>
         </p:nvSpPr>
@@ -8425,7 +8818,7 @@
       </p:sp>
       <p:sp>
         <p:nvSpPr>
-          <p:cNvPr id="52" name="TextBox 51"/>
+          <p:cNvPr id="63" name="TextBox 62"/>
           <p:cNvSpPr txBox="1"/>
           <p:nvPr/>
         </p:nvSpPr>
@@ -8460,7 +8853,7 @@
       </p:sp>
       <p:sp>
         <p:nvSpPr>
-          <p:cNvPr id="53" name="Oval 52"/>
+          <p:cNvPr id="64" name="Oval 63"/>
           <p:cNvSpPr/>
           <p:nvPr/>
         </p:nvSpPr>
@@ -8503,7 +8896,7 @@
       </p:sp>
       <p:sp>
         <p:nvSpPr>
-          <p:cNvPr id="54" name="TextBox 53"/>
+          <p:cNvPr id="65" name="TextBox 64"/>
           <p:cNvSpPr txBox="1"/>
           <p:nvPr/>
         </p:nvSpPr>
@@ -8538,7 +8931,7 @@
       </p:sp>
       <p:sp>
         <p:nvSpPr>
-          <p:cNvPr id="55" name="Oval 54"/>
+          <p:cNvPr id="66" name="Oval 65"/>
           <p:cNvSpPr/>
           <p:nvPr/>
         </p:nvSpPr>
@@ -8581,7 +8974,7 @@
       </p:sp>
       <p:sp>
         <p:nvSpPr>
-          <p:cNvPr id="56" name="TextBox 55"/>
+          <p:cNvPr id="67" name="TextBox 66"/>
           <p:cNvSpPr txBox="1"/>
           <p:nvPr/>
         </p:nvSpPr>
@@ -8616,7 +9009,7 @@
       </p:sp>
       <p:sp>
         <p:nvSpPr>
-          <p:cNvPr id="57" name="Oval 56"/>
+          <p:cNvPr id="68" name="Oval 67"/>
           <p:cNvSpPr/>
           <p:nvPr/>
         </p:nvSpPr>
@@ -8659,7 +9052,7 @@
       </p:sp>
       <p:sp>
         <p:nvSpPr>
-          <p:cNvPr id="58" name="TextBox 57"/>
+          <p:cNvPr id="69" name="TextBox 68"/>
           <p:cNvSpPr txBox="1"/>
           <p:nvPr/>
         </p:nvSpPr>
@@ -8694,7 +9087,7 @@
       </p:sp>
       <p:sp>
         <p:nvSpPr>
-          <p:cNvPr id="59" name="Rectangle 58"/>
+          <p:cNvPr id="70" name="Rectangle 69"/>
           <p:cNvSpPr/>
           <p:nvPr/>
         </p:nvSpPr>
@@ -8740,7 +9133,7 @@
       </p:sp>
       <p:sp>
         <p:nvSpPr>
-          <p:cNvPr id="60" name="Rectangle 59"/>
+          <p:cNvPr id="71" name="Rectangle 70"/>
           <p:cNvSpPr/>
           <p:nvPr/>
         </p:nvSpPr>
@@ -8784,7 +9177,7 @@
       </p:sp>
       <p:sp>
         <p:nvSpPr>
-          <p:cNvPr id="61" name="TextBox 60"/>
+          <p:cNvPr id="72" name="TextBox 71"/>
           <p:cNvSpPr txBox="1"/>
           <p:nvPr/>
         </p:nvSpPr>
@@ -8819,7 +9212,7 @@
       </p:sp>
       <p:sp>
         <p:nvSpPr>
-          <p:cNvPr id="62" name="Oval 61"/>
+          <p:cNvPr id="73" name="Oval 72"/>
           <p:cNvSpPr/>
           <p:nvPr/>
         </p:nvSpPr>
@@ -8862,7 +9255,7 @@
       </p:sp>
       <p:sp>
         <p:nvSpPr>
-          <p:cNvPr id="63" name="TextBox 62"/>
+          <p:cNvPr id="74" name="TextBox 73"/>
           <p:cNvSpPr txBox="1"/>
           <p:nvPr/>
         </p:nvSpPr>
@@ -8897,7 +9290,7 @@
       </p:sp>
       <p:sp>
         <p:nvSpPr>
-          <p:cNvPr id="64" name="Oval 63"/>
+          <p:cNvPr id="75" name="Oval 74"/>
           <p:cNvSpPr/>
           <p:nvPr/>
         </p:nvSpPr>
@@ -8940,7 +9333,7 @@
       </p:sp>
       <p:sp>
         <p:nvSpPr>
-          <p:cNvPr id="65" name="TextBox 64"/>
+          <p:cNvPr id="76" name="TextBox 75"/>
           <p:cNvSpPr txBox="1"/>
           <p:nvPr/>
         </p:nvSpPr>
@@ -8975,7 +9368,7 @@
       </p:sp>
       <p:sp>
         <p:nvSpPr>
-          <p:cNvPr id="66" name="Oval 65"/>
+          <p:cNvPr id="77" name="Oval 76"/>
           <p:cNvSpPr/>
           <p:nvPr/>
         </p:nvSpPr>
@@ -9018,7 +9411,7 @@
       </p:sp>
       <p:sp>
         <p:nvSpPr>
-          <p:cNvPr id="67" name="TextBox 66"/>
+          <p:cNvPr id="78" name="TextBox 77"/>
           <p:cNvSpPr txBox="1"/>
           <p:nvPr/>
         </p:nvSpPr>
@@ -9053,7 +9446,7 @@
       </p:sp>
       <p:sp>
         <p:nvSpPr>
-          <p:cNvPr id="68" name="Rectangle 67"/>
+          <p:cNvPr id="79" name="Rectangle 78"/>
           <p:cNvSpPr/>
           <p:nvPr/>
         </p:nvSpPr>
@@ -9097,7 +9490,7 @@
       </p:sp>
       <p:sp>
         <p:nvSpPr>
-          <p:cNvPr id="69" name="TextBox 68"/>
+          <p:cNvPr id="80" name="TextBox 79"/>
           <p:cNvSpPr txBox="1"/>
           <p:nvPr/>
         </p:nvSpPr>
@@ -9132,7 +9525,7 @@
       </p:sp>
       <p:sp>
         <p:nvSpPr>
-          <p:cNvPr id="70" name="TextBox 69"/>
+          <p:cNvPr id="81" name="TextBox 80"/>
           <p:cNvSpPr txBox="1"/>
           <p:nvPr/>
         </p:nvSpPr>
@@ -9167,7 +9560,7 @@
       </p:sp>
       <p:sp>
         <p:nvSpPr>
-          <p:cNvPr id="71" name="TextBox 70"/>
+          <p:cNvPr id="82" name="TextBox 81"/>
           <p:cNvSpPr txBox="1"/>
           <p:nvPr/>
         </p:nvSpPr>
@@ -9202,7 +9595,7 @@
       </p:sp>
       <p:sp>
         <p:nvSpPr>
-          <p:cNvPr id="72" name="TextBox 71"/>
+          <p:cNvPr id="83" name="TextBox 82"/>
           <p:cNvSpPr txBox="1"/>
           <p:nvPr/>
         </p:nvSpPr>
@@ -9237,7 +9630,7 @@
       </p:sp>
       <p:sp>
         <p:nvSpPr>
-          <p:cNvPr id="73" name="TextBox 72"/>
+          <p:cNvPr id="84" name="TextBox 83"/>
           <p:cNvSpPr txBox="1"/>
           <p:nvPr/>
         </p:nvSpPr>
@@ -9272,7 +9665,7 @@
       </p:sp>
       <p:sp>
         <p:nvSpPr>
-          <p:cNvPr id="74" name="TextBox 73"/>
+          <p:cNvPr id="85" name="TextBox 84"/>
           <p:cNvSpPr txBox="1"/>
           <p:nvPr/>
         </p:nvSpPr>
@@ -9307,7 +9700,7 @@
       </p:sp>
       <p:sp>
         <p:nvSpPr>
-          <p:cNvPr id="75" name="TextBox 74"/>
+          <p:cNvPr id="86" name="TextBox 85"/>
           <p:cNvSpPr txBox="1"/>
           <p:nvPr/>
         </p:nvSpPr>
@@ -9342,7 +9735,7 @@
       </p:sp>
       <p:sp>
         <p:nvSpPr>
-          <p:cNvPr id="76" name="Rectangle 75"/>
+          <p:cNvPr id="87" name="Rectangle 86"/>
           <p:cNvSpPr/>
           <p:nvPr/>
         </p:nvSpPr>
@@ -9386,7 +9779,7 @@
       </p:sp>
       <p:sp>
         <p:nvSpPr>
-          <p:cNvPr id="77" name="TextBox 76"/>
+          <p:cNvPr id="88" name="TextBox 87"/>
           <p:cNvSpPr txBox="1"/>
           <p:nvPr/>
         </p:nvSpPr>
@@ -9421,7 +9814,7 @@
       </p:sp>
       <p:sp>
         <p:nvSpPr>
-          <p:cNvPr id="78" name="TextBox 77"/>
+          <p:cNvPr id="89" name="TextBox 88"/>
           <p:cNvSpPr txBox="1"/>
           <p:nvPr/>
         </p:nvSpPr>
@@ -9456,7 +9849,7 @@
       </p:sp>
       <p:sp>
         <p:nvSpPr>
-          <p:cNvPr id="79" name="TextBox 78"/>
+          <p:cNvPr id="90" name="TextBox 89"/>
           <p:cNvSpPr txBox="1"/>
           <p:nvPr/>
         </p:nvSpPr>
@@ -9491,7 +9884,7 @@
       </p:sp>
       <p:sp>
         <p:nvSpPr>
-          <p:cNvPr id="80" name="TextBox 79"/>
+          <p:cNvPr id="91" name="TextBox 90"/>
           <p:cNvSpPr txBox="1"/>
           <p:nvPr/>
         </p:nvSpPr>
@@ -11064,7 +11457,7 @@
         <p:spPr>
           <a:xfrm>
             <a:off x="4023360" y="4041647"/>
-            <a:ext cx="1139724" cy="73152"/>
+            <a:ext cx="1160222" cy="73152"/>
           </a:xfrm>
           <a:prstGeom prst="rect">
             <a:avLst/>
@@ -11106,7 +11499,7 @@
         </p:nvSpPr>
         <p:spPr>
           <a:xfrm>
-            <a:off x="5117364" y="4023359"/>
+            <a:off x="5137862" y="4023359"/>
             <a:ext cx="91440" cy="109728"/>
           </a:xfrm>
           <a:prstGeom prst="ellipse">
@@ -11149,7 +11542,7 @@
         </p:nvSpPr>
         <p:spPr>
           <a:xfrm>
-            <a:off x="5208804" y="4005071"/>
+            <a:off x="5229302" y="4005071"/>
             <a:ext cx="411480" cy="182880"/>
           </a:xfrm>
           <a:prstGeom prst="rect">
@@ -11171,7 +11564,7 @@
                 </a:solidFill>
                 <a:latin typeface="Calibri"/>
               </a:rPr>
-              <a:t>15.0x</a:t>
+              <a:t>15.1x</a:t>
             </a:r>
           </a:p>
         </p:txBody>
@@ -11324,7 +11717,7 @@
         </p:nvSpPr>
         <p:spPr>
           <a:xfrm>
-            <a:off x="5089932" y="4242816"/>
+            <a:off x="5110430" y="4242816"/>
             <a:ext cx="146304" cy="146304"/>
           </a:xfrm>
           <a:prstGeom prst="diamond">
@@ -11367,7 +11760,7 @@
         </p:nvSpPr>
         <p:spPr>
           <a:xfrm>
-            <a:off x="5254524" y="4224528"/>
+            <a:off x="5275022" y="4224528"/>
             <a:ext cx="1280160" cy="164592"/>
           </a:xfrm>
           <a:prstGeom prst="rect">
@@ -11389,7 +11782,7 @@
                 </a:solidFill>
                 <a:latin typeface="Calibri"/>
               </a:rPr>
-              <a:t>Current  (15.0x)</a:t>
+              <a:t>Current  (15.1x)</a:t>
             </a:r>
           </a:p>
         </p:txBody>
@@ -11729,7 +12122,217 @@
       </p:sp>
       <p:sp>
         <p:nvSpPr>
-          <p:cNvPr id="60" name="Rectangle 59"/>
+          <p:cNvPr id="60" name="TextBox 59"/>
+          <p:cNvSpPr txBox="1"/>
+          <p:nvPr/>
+        </p:nvSpPr>
+        <p:spPr>
+          <a:xfrm>
+            <a:off x="411480" y="5093208"/>
+            <a:ext cx="1874520" cy="256032"/>
+          </a:xfrm>
+          <a:prstGeom prst="rect">
+            <a:avLst/>
+          </a:prstGeom>
+          <a:noFill/>
+        </p:spPr>
+        <p:txBody>
+          <a:bodyPr wrap="square" lIns="0" rIns="0" tIns="0" bIns="0" anchor="t">
+            <a:spAutoFit/>
+          </a:bodyPr>
+          <a:lstStyle/>
+          <a:p>
+            <a:pPr algn="l"/>
+            <a:r>
+              <a:rPr sz="1000" b="0">
+                <a:solidFill>
+                  <a:srgbClr val="1A1A1A"/>
+                </a:solidFill>
+                <a:latin typeface="Calibri"/>
+              </a:rPr>
+              <a:t>iShares MSCI Saudi Arabia ETF</a:t>
+            </a:r>
+          </a:p>
+        </p:txBody>
+      </p:sp>
+      <p:sp>
+        <p:nvSpPr>
+          <p:cNvPr id="61" name="TextBox 60"/>
+          <p:cNvSpPr txBox="1"/>
+          <p:nvPr/>
+        </p:nvSpPr>
+        <p:spPr>
+          <a:xfrm>
+            <a:off x="2331720" y="5093208"/>
+            <a:ext cx="960120" cy="256032"/>
+          </a:xfrm>
+          <a:prstGeom prst="rect">
+            <a:avLst/>
+          </a:prstGeom>
+          <a:noFill/>
+        </p:spPr>
+        <p:txBody>
+          <a:bodyPr wrap="square" lIns="0" rIns="0" tIns="0" bIns="0" anchor="t">
+            <a:spAutoFit/>
+          </a:bodyPr>
+          <a:lstStyle/>
+          <a:p>
+            <a:pPr algn="l"/>
+            <a:r>
+              <a:rPr sz="1000" b="0">
+                <a:solidFill>
+                  <a:srgbClr val="1A1A1A"/>
+                </a:solidFill>
+                <a:latin typeface="Calibri"/>
+              </a:rPr>
+              <a:t>KSA</a:t>
+            </a:r>
+          </a:p>
+        </p:txBody>
+      </p:sp>
+      <p:sp>
+        <p:nvSpPr>
+          <p:cNvPr id="62" name="TextBox 61"/>
+          <p:cNvSpPr txBox="1"/>
+          <p:nvPr/>
+        </p:nvSpPr>
+        <p:spPr>
+          <a:xfrm>
+            <a:off x="3337560" y="5093208"/>
+            <a:ext cx="960120" cy="256032"/>
+          </a:xfrm>
+          <a:prstGeom prst="rect">
+            <a:avLst/>
+          </a:prstGeom>
+          <a:noFill/>
+        </p:spPr>
+        <p:txBody>
+          <a:bodyPr wrap="square" lIns="0" rIns="0" tIns="0" bIns="0" anchor="t">
+            <a:spAutoFit/>
+          </a:bodyPr>
+          <a:lstStyle/>
+          <a:p>
+            <a:pPr algn="r"/>
+            <a:r>
+              <a:rPr sz="1000" b="0">
+                <a:solidFill>
+                  <a:srgbClr val="1A1A1A"/>
+                </a:solidFill>
+                <a:latin typeface="Calibri"/>
+              </a:rPr>
+              <a:t>—</a:t>
+            </a:r>
+          </a:p>
+        </p:txBody>
+      </p:sp>
+      <p:sp>
+        <p:nvSpPr>
+          <p:cNvPr id="63" name="TextBox 62"/>
+          <p:cNvSpPr txBox="1"/>
+          <p:nvPr/>
+        </p:nvSpPr>
+        <p:spPr>
+          <a:xfrm>
+            <a:off x="4343400" y="5093208"/>
+            <a:ext cx="594359" cy="256032"/>
+          </a:xfrm>
+          <a:prstGeom prst="rect">
+            <a:avLst/>
+          </a:prstGeom>
+          <a:noFill/>
+        </p:spPr>
+        <p:txBody>
+          <a:bodyPr wrap="square" lIns="0" rIns="0" tIns="0" bIns="0" anchor="t">
+            <a:spAutoFit/>
+          </a:bodyPr>
+          <a:lstStyle/>
+          <a:p>
+            <a:pPr algn="r"/>
+            <a:r>
+              <a:rPr sz="1000" b="0">
+                <a:solidFill>
+                  <a:srgbClr val="1A1A1A"/>
+                </a:solidFill>
+                <a:latin typeface="Calibri"/>
+              </a:rPr>
+              <a:t>—</a:t>
+            </a:r>
+          </a:p>
+        </p:txBody>
+      </p:sp>
+      <p:sp>
+        <p:nvSpPr>
+          <p:cNvPr id="64" name="TextBox 63"/>
+          <p:cNvSpPr txBox="1"/>
+          <p:nvPr/>
+        </p:nvSpPr>
+        <p:spPr>
+          <a:xfrm>
+            <a:off x="4983480" y="5093208"/>
+            <a:ext cx="685800" cy="256032"/>
+          </a:xfrm>
+          <a:prstGeom prst="rect">
+            <a:avLst/>
+          </a:prstGeom>
+          <a:noFill/>
+        </p:spPr>
+        <p:txBody>
+          <a:bodyPr wrap="square" lIns="0" rIns="0" tIns="0" bIns="0" anchor="t">
+            <a:spAutoFit/>
+          </a:bodyPr>
+          <a:lstStyle/>
+          <a:p>
+            <a:pPr algn="r"/>
+            <a:r>
+              <a:rPr sz="1000" b="0">
+                <a:solidFill>
+                  <a:srgbClr val="1A1A1A"/>
+                </a:solidFill>
+                <a:latin typeface="Calibri"/>
+              </a:rPr>
+              <a:t>—</a:t>
+            </a:r>
+          </a:p>
+        </p:txBody>
+      </p:sp>
+      <p:sp>
+        <p:nvSpPr>
+          <p:cNvPr id="65" name="TextBox 64"/>
+          <p:cNvSpPr txBox="1"/>
+          <p:nvPr/>
+        </p:nvSpPr>
+        <p:spPr>
+          <a:xfrm>
+            <a:off x="5715000" y="5093208"/>
+            <a:ext cx="685800" cy="256032"/>
+          </a:xfrm>
+          <a:prstGeom prst="rect">
+            <a:avLst/>
+          </a:prstGeom>
+          <a:noFill/>
+        </p:spPr>
+        <p:txBody>
+          <a:bodyPr wrap="square" lIns="0" rIns="0" tIns="0" bIns="0" anchor="t">
+            <a:spAutoFit/>
+          </a:bodyPr>
+          <a:lstStyle/>
+          <a:p>
+            <a:pPr algn="r"/>
+            <a:r>
+              <a:rPr sz="1000" b="0">
+                <a:solidFill>
+                  <a:srgbClr val="1A1A1A"/>
+                </a:solidFill>
+                <a:latin typeface="Calibri"/>
+              </a:rPr>
+              <a:t>—</a:t>
+            </a:r>
+          </a:p>
+        </p:txBody>
+      </p:sp>
+      <p:sp>
+        <p:nvSpPr>
+          <p:cNvPr id="66" name="Rectangle 65"/>
           <p:cNvSpPr/>
           <p:nvPr/>
         </p:nvSpPr>
@@ -11773,7 +12376,7 @@
       </p:sp>
       <p:sp>
         <p:nvSpPr>
-          <p:cNvPr id="61" name="TextBox 60"/>
+          <p:cNvPr id="67" name="TextBox 66"/>
           <p:cNvSpPr txBox="1"/>
           <p:nvPr/>
         </p:nvSpPr>
@@ -11808,7 +12411,7 @@
       </p:sp>
       <p:sp>
         <p:nvSpPr>
-          <p:cNvPr id="62" name="Rectangle 61"/>
+          <p:cNvPr id="68" name="Rectangle 67"/>
           <p:cNvSpPr/>
           <p:nvPr/>
         </p:nvSpPr>
@@ -11854,7 +12457,7 @@
       </p:sp>
       <p:sp>
         <p:nvSpPr>
-          <p:cNvPr id="63" name="Rectangle 62"/>
+          <p:cNvPr id="69" name="Rectangle 68"/>
           <p:cNvSpPr/>
           <p:nvPr/>
         </p:nvSpPr>
@@ -11898,7 +12501,7 @@
       </p:sp>
       <p:sp>
         <p:nvSpPr>
-          <p:cNvPr id="64" name="TextBox 63"/>
+          <p:cNvPr id="70" name="TextBox 69"/>
           <p:cNvSpPr txBox="1"/>
           <p:nvPr/>
         </p:nvSpPr>
@@ -11933,14 +12536,14 @@
       </p:sp>
       <p:sp>
         <p:nvSpPr>
-          <p:cNvPr id="65" name="Rectangle 64"/>
+          <p:cNvPr id="71" name="Rectangle 70"/>
           <p:cNvSpPr/>
           <p:nvPr/>
         </p:nvSpPr>
         <p:spPr>
           <a:xfrm>
             <a:off x="521208" y="8220456"/>
-            <a:ext cx="1113535" cy="146304"/>
+            <a:ext cx="835151" cy="146304"/>
           </a:xfrm>
           <a:prstGeom prst="rect">
             <a:avLst/>
@@ -11976,14 +12579,14 @@
       </p:sp>
       <p:sp>
         <p:nvSpPr>
-          <p:cNvPr id="66" name="Rectangle 65"/>
+          <p:cNvPr id="72" name="Rectangle 71"/>
           <p:cNvSpPr/>
           <p:nvPr/>
         </p:nvSpPr>
         <p:spPr>
           <a:xfrm>
-            <a:off x="1634744" y="8220456"/>
-            <a:ext cx="371178" cy="146304"/>
+            <a:off x="1356360" y="8220456"/>
+            <a:ext cx="835151" cy="146304"/>
           </a:xfrm>
           <a:prstGeom prst="rect">
             <a:avLst/>
@@ -12019,50 +12622,7 @@
       </p:sp>
       <p:sp>
         <p:nvSpPr>
-          <p:cNvPr id="67" name="Rectangle 66"/>
-          <p:cNvSpPr/>
-          <p:nvPr/>
-        </p:nvSpPr>
-        <p:spPr>
-          <a:xfrm>
-            <a:off x="2005922" y="8220456"/>
-            <a:ext cx="185589" cy="146304"/>
-          </a:xfrm>
-          <a:prstGeom prst="rect">
-            <a:avLst/>
-          </a:prstGeom>
-          <a:solidFill>
-            <a:srgbClr val="B83227"/>
-          </a:solidFill>
-          <a:ln>
-            <a:noFill/>
-          </a:ln>
-        </p:spPr>
-        <p:style>
-          <a:lnRef idx="1">
-            <a:schemeClr val="accent1"/>
-          </a:lnRef>
-          <a:fillRef idx="3">
-            <a:schemeClr val="accent1"/>
-          </a:fillRef>
-          <a:effectRef idx="2">
-            <a:schemeClr val="accent1"/>
-          </a:effectRef>
-          <a:fontRef idx="minor">
-            <a:schemeClr val="lt1"/>
-          </a:fontRef>
-        </p:style>
-        <p:txBody>
-          <a:bodyPr rtlCol="0" anchor="ctr"/>
-          <a:lstStyle/>
-          <a:p>
-            <a:pPr algn="ctr"/>
-          </a:p>
-        </p:txBody>
-      </p:sp>
-      <p:sp>
-        <p:nvSpPr>
-          <p:cNvPr id="68" name="TextBox 67"/>
+          <p:cNvPr id="73" name="TextBox 72"/>
           <p:cNvSpPr txBox="1"/>
           <p:nvPr/>
         </p:nvSpPr>
@@ -12090,14 +12650,14 @@
                 </a:solidFill>
                 <a:latin typeface="Calibri"/>
               </a:rPr>
-              <a:t>Buy 66%   Hold 22%   Sell 11%</a:t>
-            </a:r>
-          </a:p>
-        </p:txBody>
-      </p:sp>
-      <p:sp>
-        <p:nvSpPr>
-          <p:cNvPr id="69" name="TextBox 68"/>
+              <a:t>Buy 50%   Hold 50%   Sell 0%</a:t>
+            </a:r>
+          </a:p>
+        </p:txBody>
+      </p:sp>
+      <p:sp>
+        <p:nvSpPr>
+          <p:cNvPr id="74" name="TextBox 73"/>
           <p:cNvSpPr txBox="1"/>
           <p:nvPr/>
         </p:nvSpPr>
@@ -12132,7 +12692,7 @@
       </p:sp>
       <p:sp>
         <p:nvSpPr>
-          <p:cNvPr id="70" name="Rectangle 69"/>
+          <p:cNvPr id="75" name="Rectangle 74"/>
           <p:cNvSpPr/>
           <p:nvPr/>
         </p:nvSpPr>
@@ -12178,7 +12738,7 @@
       </p:sp>
       <p:sp>
         <p:nvSpPr>
-          <p:cNvPr id="71" name="Rectangle 70"/>
+          <p:cNvPr id="76" name="Rectangle 75"/>
           <p:cNvSpPr/>
           <p:nvPr/>
         </p:nvSpPr>
@@ -12222,7 +12782,7 @@
       </p:sp>
       <p:sp>
         <p:nvSpPr>
-          <p:cNvPr id="72" name="TextBox 71"/>
+          <p:cNvPr id="77" name="TextBox 76"/>
           <p:cNvSpPr txBox="1"/>
           <p:nvPr/>
         </p:nvSpPr>
@@ -12257,7 +12817,7 @@
       </p:sp>
       <p:sp>
         <p:nvSpPr>
-          <p:cNvPr id="73" name="TextBox 72"/>
+          <p:cNvPr id="78" name="TextBox 77"/>
           <p:cNvSpPr txBox="1"/>
           <p:nvPr/>
         </p:nvSpPr>
@@ -12285,14 +12845,14 @@
                 </a:solidFill>
                 <a:latin typeface="Calibri"/>
               </a:rPr>
-              <a:t>SAR 30.00</a:t>
-            </a:r>
-          </a:p>
-        </p:txBody>
-      </p:sp>
-      <p:sp>
-        <p:nvSpPr>
-          <p:cNvPr id="74" name="TextBox 73"/>
+              <a:t>SAR 29.60</a:t>
+            </a:r>
+          </a:p>
+        </p:txBody>
+      </p:sp>
+      <p:sp>
+        <p:nvSpPr>
+          <p:cNvPr id="79" name="TextBox 78"/>
           <p:cNvSpPr txBox="1"/>
           <p:nvPr/>
         </p:nvSpPr>
@@ -12327,7 +12887,7 @@
       </p:sp>
       <p:sp>
         <p:nvSpPr>
-          <p:cNvPr id="75" name="TextBox 74"/>
+          <p:cNvPr id="80" name="TextBox 79"/>
           <p:cNvSpPr txBox="1"/>
           <p:nvPr/>
         </p:nvSpPr>
@@ -12355,14 +12915,14 @@
                 </a:solidFill>
                 <a:latin typeface="Calibri"/>
               </a:rPr>
-              <a:t>Implied +7.8% vs last close</a:t>
-            </a:r>
-          </a:p>
-        </p:txBody>
-      </p:sp>
-      <p:sp>
-        <p:nvSpPr>
-          <p:cNvPr id="76" name="Rectangle 75"/>
+              <a:t>Implied +6.4% vs last close</a:t>
+            </a:r>
+          </a:p>
+        </p:txBody>
+      </p:sp>
+      <p:sp>
+        <p:nvSpPr>
+          <p:cNvPr id="81" name="Rectangle 80"/>
           <p:cNvSpPr/>
           <p:nvPr/>
         </p:nvSpPr>
@@ -12408,7 +12968,7 @@
       </p:sp>
       <p:sp>
         <p:nvSpPr>
-          <p:cNvPr id="77" name="Rectangle 76"/>
+          <p:cNvPr id="82" name="Rectangle 81"/>
           <p:cNvSpPr/>
           <p:nvPr/>
         </p:nvSpPr>
@@ -12452,7 +13012,7 @@
       </p:sp>
       <p:sp>
         <p:nvSpPr>
-          <p:cNvPr id="78" name="TextBox 77"/>
+          <p:cNvPr id="83" name="TextBox 82"/>
           <p:cNvSpPr txBox="1"/>
           <p:nvPr/>
         </p:nvSpPr>
@@ -12487,7 +13047,7 @@
       </p:sp>
       <p:sp>
         <p:nvSpPr>
-          <p:cNvPr id="79" name="TextBox 78"/>
+          <p:cNvPr id="84" name="TextBox 83"/>
           <p:cNvSpPr txBox="1"/>
           <p:nvPr/>
         </p:nvSpPr>
@@ -12522,7 +13082,7 @@
       </p:sp>
       <p:sp>
         <p:nvSpPr>
-          <p:cNvPr id="80" name="TextBox 79"/>
+          <p:cNvPr id="85" name="TextBox 84"/>
           <p:cNvSpPr txBox="1"/>
           <p:nvPr/>
         </p:nvSpPr>
@@ -12557,7 +13117,7 @@
       </p:sp>
       <p:sp>
         <p:nvSpPr>
-          <p:cNvPr id="81" name="TextBox 80"/>
+          <p:cNvPr id="86" name="TextBox 85"/>
           <p:cNvSpPr txBox="1"/>
           <p:nvPr/>
         </p:nvSpPr>
@@ -12592,7 +13152,7 @@
       </p:sp>
       <p:sp>
         <p:nvSpPr>
-          <p:cNvPr id="82" name="TextBox 81"/>
+          <p:cNvPr id="87" name="TextBox 86"/>
           <p:cNvSpPr txBox="1"/>
           <p:nvPr/>
         </p:nvSpPr>
@@ -12627,7 +13187,7 @@
       </p:sp>
       <p:sp>
         <p:nvSpPr>
-          <p:cNvPr id="83" name="TextBox 82"/>
+          <p:cNvPr id="88" name="TextBox 87"/>
           <p:cNvSpPr txBox="1"/>
           <p:nvPr/>
         </p:nvSpPr>
@@ -12662,7 +13222,7 @@
       </p:sp>
       <p:sp>
         <p:nvSpPr>
-          <p:cNvPr id="84" name="TextBox 83"/>
+          <p:cNvPr id="89" name="TextBox 88"/>
           <p:cNvSpPr txBox="1"/>
           <p:nvPr/>
         </p:nvSpPr>
@@ -12697,7 +13257,7 @@
       </p:sp>
       <p:sp>
         <p:nvSpPr>
-          <p:cNvPr id="85" name="Rectangle 84"/>
+          <p:cNvPr id="90" name="Rectangle 89"/>
           <p:cNvSpPr/>
           <p:nvPr/>
         </p:nvSpPr>
@@ -12741,7 +13301,7 @@
       </p:sp>
       <p:sp>
         <p:nvSpPr>
-          <p:cNvPr id="86" name="TextBox 85"/>
+          <p:cNvPr id="91" name="TextBox 90"/>
           <p:cNvSpPr txBox="1"/>
           <p:nvPr/>
         </p:nvSpPr>
@@ -12776,7 +13336,7 @@
       </p:sp>
       <p:sp>
         <p:nvSpPr>
-          <p:cNvPr id="87" name="TextBox 86"/>
+          <p:cNvPr id="92" name="TextBox 91"/>
           <p:cNvSpPr txBox="1"/>
           <p:nvPr/>
         </p:nvSpPr>
@@ -12811,7 +13371,7 @@
       </p:sp>
       <p:sp>
         <p:nvSpPr>
-          <p:cNvPr id="88" name="TextBox 87"/>
+          <p:cNvPr id="93" name="TextBox 92"/>
           <p:cNvSpPr txBox="1"/>
           <p:nvPr/>
         </p:nvSpPr>
@@ -12846,7 +13406,7 @@
       </p:sp>
       <p:sp>
         <p:nvSpPr>
-          <p:cNvPr id="89" name="TextBox 88"/>
+          <p:cNvPr id="94" name="TextBox 93"/>
           <p:cNvSpPr txBox="1"/>
           <p:nvPr/>
         </p:nvSpPr>

--- a/static/decks/2222.SR.pptx
+++ b/static/decks/2222.SR.pptx
@@ -12220,7 +12220,7 @@
                 </a:solidFill>
                 <a:latin typeface="Calibri"/>
               </a:rPr>
-              <a:t>—</a:t>
+              <a:t>$739M</a:t>
             </a:r>
           </a:p>
         </p:txBody>
@@ -12290,7 +12290,7 @@
                 </a:solidFill>
                 <a:latin typeface="Calibri"/>
               </a:rPr>
-              <a:t>—</a:t>
+              <a:t>-8.3% YTD</a:t>
             </a:r>
           </a:p>
         </p:txBody>
@@ -12321,11 +12321,11 @@
             <a:r>
               <a:rPr sz="1000" b="0">
                 <a:solidFill>
-                  <a:srgbClr val="1A1A1A"/>
-                </a:solidFill>
-                <a:latin typeface="Calibri"/>
-              </a:rPr>
-              <a:t>—</a:t>
+                  <a:srgbClr val="B83227"/>
+                </a:solidFill>
+                <a:latin typeface="Calibri"/>
+              </a:rPr>
+              <a:t>-1.8%</a:t>
             </a:r>
           </a:p>
         </p:txBody>

--- a/static/decks/2222.SR.pptx
+++ b/static/decks/2222.SR.pptx
@@ -4259,7 +4259,7 @@
                 </a:solidFill>
                 <a:latin typeface="Calibri"/>
               </a:rPr>
-              <a:t>SAR 29.60</a:t>
+              <a:t>SAR 32.50</a:t>
             </a:r>
           </a:p>
         </p:txBody>
@@ -4419,7 +4419,7 @@
                 </a:solidFill>
                 <a:latin typeface="Calibri"/>
               </a:rPr>
-              <a:t>+6.4%</a:t>
+              <a:t>+16.8%</a:t>
             </a:r>
           </a:p>
         </p:txBody>
@@ -6453,7 +6453,7 @@
                 </a:solidFill>
                 <a:latin typeface="Calibri"/>
               </a:rPr>
-              <a:t>Source: investing, marketscreener, yahoo  |  Generated 13 May 2026  |  Analyst: Jabal Research</a:t>
+              <a:t>Source: bloomberg, investing, marketscreener, yahoo  |  Generated 14 May 2026  |  Analyst: Jabal Research</a:t>
             </a:r>
           </a:p>
         </p:txBody>
@@ -6999,7 +6999,7 @@
                 </a:solidFill>
                 <a:latin typeface="Calibri"/>
               </a:rPr>
-              <a:t>Jabal maintains a constructive view into the upcoming print. Saudi Arabian Oil Company sits in the Energy sector (Oil &amp; Gas Integrated). Street consensus is outperform (18 analysts covering); consensus target 29.60. The shares trade at a P/E around 15.1x trailing earnings. The macro and commodity backdrop is anchored by brent at 68  (-20.9% YoY); wti at 64  (-21.9% YoY). The thesis hinges on three factors: demand trajectory through H2, feedstock/input-cost discipline, and management's tone on guidance during the call. We expect the print itself to be within consensus bounds; the read on forward commentary is the swing factor.</a:t>
+              <a:t>Jabal maintains a constructive view into the upcoming print. Saudi Arabian Oil Company sits in the Energy sector (Oil &amp; Gas Integrated). Street consensus is outperform (18 analysts covering); consensus target 32.50. The shares trade at a P/E around 15.1x trailing earnings. The macro and commodity backdrop is anchored by brent at 68  (-20.9% YoY); wti at 64  (-21.9% YoY). The thesis hinges on three factors: demand trajectory through H2, feedstock/input-cost discipline, and management's tone on guidance during the call. We expect the print itself to be within consensus bounds; the read on forward commentary is the swing factor.</a:t>
             </a:r>
           </a:p>
         </p:txBody>
@@ -7367,7 +7367,7 @@
                 </a:solidFill>
                 <a:latin typeface="Calibri"/>
               </a:rPr>
-              <a:t>EPS — 06/2026</a:t>
+              <a:t>EPS — Q2_2026</a:t>
             </a:r>
           </a:p>
         </p:txBody>
@@ -7437,7 +7437,7 @@
                 </a:solidFill>
                 <a:latin typeface="Calibri"/>
               </a:rPr>
-              <a:t>0.463</a:t>
+              <a:t>0.480</a:t>
             </a:r>
           </a:p>
         </p:txBody>
@@ -7585,7 +7585,7 @@
                 </a:solidFill>
                 <a:latin typeface="Calibri"/>
               </a:rPr>
-              <a:t>Revenue — 06/2026</a:t>
+              <a:t>Revenue — Q2_2026</a:t>
             </a:r>
           </a:p>
         </p:txBody>
@@ -7655,7 +7655,7 @@
                 </a:solidFill>
                 <a:latin typeface="Calibri"/>
               </a:rPr>
-              <a:t>445.3B</a:t>
+              <a:t>460.0B</a:t>
             </a:r>
           </a:p>
         </p:txBody>
@@ -7830,7 +7830,7 @@
                 </a:solidFill>
                 <a:latin typeface="Calibri"/>
               </a:rPr>
-              <a:t>0.520</a:t>
+              <a:t>1.850</a:t>
             </a:r>
           </a:p>
         </p:txBody>
@@ -8048,7 +8048,7 @@
                 </a:solidFill>
                 <a:latin typeface="Calibri"/>
               </a:rPr>
-              <a:t>493.3B</a:t>
+              <a:t>1.82T</a:t>
             </a:r>
           </a:p>
         </p:txBody>
@@ -8223,7 +8223,7 @@
                 </a:solidFill>
                 <a:latin typeface="Calibri"/>
               </a:rPr>
-              <a:t>0.580</a:t>
+              <a:t>1.920</a:t>
             </a:r>
           </a:p>
         </p:txBody>
@@ -8441,7 +8441,7 @@
                 </a:solidFill>
                 <a:latin typeface="Calibri"/>
               </a:rPr>
-              <a:t>544.1B</a:t>
+              <a:t>1.89T</a:t>
             </a:r>
           </a:p>
         </p:txBody>
@@ -8721,7 +8721,7 @@
                 </a:solidFill>
                 <a:latin typeface="Calibri"/>
               </a:rPr>
-              <a:t>Next print: Aug 04, 2026 (period 06/2026)  ·  Consensus: Investing  ·  18 analysts covering</a:t>
+              <a:t>Consensus: Bloomberg  ·  18 analysts covering</a:t>
             </a:r>
           </a:p>
         </p:txBody>
@@ -9807,7 +9807,7 @@
                 </a:solidFill>
                 <a:latin typeface="Calibri"/>
               </a:rPr>
-              <a:t>Source: investing, marketscreener, yahoo  |  Generated 13 May 2026  |  Analyst: Jabal Research</a:t>
+              <a:t>Source: bloomberg, investing, marketscreener, yahoo  |  Generated 14 May 2026  |  Analyst: Jabal Research</a:t>
             </a:r>
           </a:p>
         </p:txBody>
@@ -12845,7 +12845,7 @@
                 </a:solidFill>
                 <a:latin typeface="Calibri"/>
               </a:rPr>
-              <a:t>SAR 29.60</a:t>
+              <a:t>SAR 32.50</a:t>
             </a:r>
           </a:p>
         </p:txBody>
@@ -12880,7 +12880,7 @@
                 </a:solidFill>
                 <a:latin typeface="Calibri"/>
               </a:rPr>
-              <a:t>Range  SAR 26 — 35</a:t>
+              <a:t>Range  SAR 27 — 38</a:t>
             </a:r>
           </a:p>
         </p:txBody>
@@ -12915,7 +12915,7 @@
                 </a:solidFill>
                 <a:latin typeface="Calibri"/>
               </a:rPr>
-              <a:t>Implied +6.4% vs last close</a:t>
+              <a:t>Implied +16.8% vs last close</a:t>
             </a:r>
           </a:p>
         </p:txBody>
@@ -13329,7 +13329,7 @@
                 </a:solidFill>
                 <a:latin typeface="Calibri"/>
               </a:rPr>
-              <a:t>Source: investing, marketscreener, yahoo  |  Generated 13 May 2026  |  Analyst: Jabal Research</a:t>
+              <a:t>Source: bloomberg, investing, marketscreener, yahoo  |  Generated 14 May 2026  |  Analyst: Jabal Research</a:t>
             </a:r>
           </a:p>
         </p:txBody>

--- a/static/decks/2222.SR.pptx
+++ b/static/decks/2222.SR.pptx
@@ -6453,7 +6453,7 @@
                 </a:solidFill>
                 <a:latin typeface="Calibri"/>
               </a:rPr>
-              <a:t>Source: bloomberg, investing, marketscreener, yahoo  |  Generated 14 May 2026  |  Analyst: Jabal Research</a:t>
+              <a:t>Source: bloomberg, investing, marketscreener, yahoo  |  Generated 15 May 2026  |  Analyst: Jabal Research</a:t>
             </a:r>
           </a:p>
         </p:txBody>
@@ -9807,7 +9807,7 @@
                 </a:solidFill>
                 <a:latin typeface="Calibri"/>
               </a:rPr>
-              <a:t>Source: bloomberg, investing, marketscreener, yahoo  |  Generated 14 May 2026  |  Analyst: Jabal Research</a:t>
+              <a:t>Source: bloomberg, investing, marketscreener, yahoo  |  Generated 15 May 2026  |  Analyst: Jabal Research</a:t>
             </a:r>
           </a:p>
         </p:txBody>
@@ -12122,217 +12122,7 @@
       </p:sp>
       <p:sp>
         <p:nvSpPr>
-          <p:cNvPr id="60" name="TextBox 59"/>
-          <p:cNvSpPr txBox="1"/>
-          <p:nvPr/>
-        </p:nvSpPr>
-        <p:spPr>
-          <a:xfrm>
-            <a:off x="411480" y="5093208"/>
-            <a:ext cx="1874520" cy="256032"/>
-          </a:xfrm>
-          <a:prstGeom prst="rect">
-            <a:avLst/>
-          </a:prstGeom>
-          <a:noFill/>
-        </p:spPr>
-        <p:txBody>
-          <a:bodyPr wrap="square" lIns="0" rIns="0" tIns="0" bIns="0" anchor="t">
-            <a:spAutoFit/>
-          </a:bodyPr>
-          <a:lstStyle/>
-          <a:p>
-            <a:pPr algn="l"/>
-            <a:r>
-              <a:rPr sz="1000" b="0">
-                <a:solidFill>
-                  <a:srgbClr val="1A1A1A"/>
-                </a:solidFill>
-                <a:latin typeface="Calibri"/>
-              </a:rPr>
-              <a:t>iShares MSCI Saudi Arabia ETF</a:t>
-            </a:r>
-          </a:p>
-        </p:txBody>
-      </p:sp>
-      <p:sp>
-        <p:nvSpPr>
-          <p:cNvPr id="61" name="TextBox 60"/>
-          <p:cNvSpPr txBox="1"/>
-          <p:nvPr/>
-        </p:nvSpPr>
-        <p:spPr>
-          <a:xfrm>
-            <a:off x="2331720" y="5093208"/>
-            <a:ext cx="960120" cy="256032"/>
-          </a:xfrm>
-          <a:prstGeom prst="rect">
-            <a:avLst/>
-          </a:prstGeom>
-          <a:noFill/>
-        </p:spPr>
-        <p:txBody>
-          <a:bodyPr wrap="square" lIns="0" rIns="0" tIns="0" bIns="0" anchor="t">
-            <a:spAutoFit/>
-          </a:bodyPr>
-          <a:lstStyle/>
-          <a:p>
-            <a:pPr algn="l"/>
-            <a:r>
-              <a:rPr sz="1000" b="0">
-                <a:solidFill>
-                  <a:srgbClr val="1A1A1A"/>
-                </a:solidFill>
-                <a:latin typeface="Calibri"/>
-              </a:rPr>
-              <a:t>KSA</a:t>
-            </a:r>
-          </a:p>
-        </p:txBody>
-      </p:sp>
-      <p:sp>
-        <p:nvSpPr>
-          <p:cNvPr id="62" name="TextBox 61"/>
-          <p:cNvSpPr txBox="1"/>
-          <p:nvPr/>
-        </p:nvSpPr>
-        <p:spPr>
-          <a:xfrm>
-            <a:off x="3337560" y="5093208"/>
-            <a:ext cx="960120" cy="256032"/>
-          </a:xfrm>
-          <a:prstGeom prst="rect">
-            <a:avLst/>
-          </a:prstGeom>
-          <a:noFill/>
-        </p:spPr>
-        <p:txBody>
-          <a:bodyPr wrap="square" lIns="0" rIns="0" tIns="0" bIns="0" anchor="t">
-            <a:spAutoFit/>
-          </a:bodyPr>
-          <a:lstStyle/>
-          <a:p>
-            <a:pPr algn="r"/>
-            <a:r>
-              <a:rPr sz="1000" b="0">
-                <a:solidFill>
-                  <a:srgbClr val="1A1A1A"/>
-                </a:solidFill>
-                <a:latin typeface="Calibri"/>
-              </a:rPr>
-              <a:t>$739M</a:t>
-            </a:r>
-          </a:p>
-        </p:txBody>
-      </p:sp>
-      <p:sp>
-        <p:nvSpPr>
-          <p:cNvPr id="63" name="TextBox 62"/>
-          <p:cNvSpPr txBox="1"/>
-          <p:nvPr/>
-        </p:nvSpPr>
-        <p:spPr>
-          <a:xfrm>
-            <a:off x="4343400" y="5093208"/>
-            <a:ext cx="594359" cy="256032"/>
-          </a:xfrm>
-          <a:prstGeom prst="rect">
-            <a:avLst/>
-          </a:prstGeom>
-          <a:noFill/>
-        </p:spPr>
-        <p:txBody>
-          <a:bodyPr wrap="square" lIns="0" rIns="0" tIns="0" bIns="0" anchor="t">
-            <a:spAutoFit/>
-          </a:bodyPr>
-          <a:lstStyle/>
-          <a:p>
-            <a:pPr algn="r"/>
-            <a:r>
-              <a:rPr sz="1000" b="0">
-                <a:solidFill>
-                  <a:srgbClr val="1A1A1A"/>
-                </a:solidFill>
-                <a:latin typeface="Calibri"/>
-              </a:rPr>
-              <a:t>—</a:t>
-            </a:r>
-          </a:p>
-        </p:txBody>
-      </p:sp>
-      <p:sp>
-        <p:nvSpPr>
-          <p:cNvPr id="64" name="TextBox 63"/>
-          <p:cNvSpPr txBox="1"/>
-          <p:nvPr/>
-        </p:nvSpPr>
-        <p:spPr>
-          <a:xfrm>
-            <a:off x="4983480" y="5093208"/>
-            <a:ext cx="685800" cy="256032"/>
-          </a:xfrm>
-          <a:prstGeom prst="rect">
-            <a:avLst/>
-          </a:prstGeom>
-          <a:noFill/>
-        </p:spPr>
-        <p:txBody>
-          <a:bodyPr wrap="square" lIns="0" rIns="0" tIns="0" bIns="0" anchor="t">
-            <a:spAutoFit/>
-          </a:bodyPr>
-          <a:lstStyle/>
-          <a:p>
-            <a:pPr algn="r"/>
-            <a:r>
-              <a:rPr sz="1000" b="0">
-                <a:solidFill>
-                  <a:srgbClr val="1A1A1A"/>
-                </a:solidFill>
-                <a:latin typeface="Calibri"/>
-              </a:rPr>
-              <a:t>-8.3% YTD</a:t>
-            </a:r>
-          </a:p>
-        </p:txBody>
-      </p:sp>
-      <p:sp>
-        <p:nvSpPr>
-          <p:cNvPr id="65" name="TextBox 64"/>
-          <p:cNvSpPr txBox="1"/>
-          <p:nvPr/>
-        </p:nvSpPr>
-        <p:spPr>
-          <a:xfrm>
-            <a:off x="5715000" y="5093208"/>
-            <a:ext cx="685800" cy="256032"/>
-          </a:xfrm>
-          <a:prstGeom prst="rect">
-            <a:avLst/>
-          </a:prstGeom>
-          <a:noFill/>
-        </p:spPr>
-        <p:txBody>
-          <a:bodyPr wrap="square" lIns="0" rIns="0" tIns="0" bIns="0" anchor="t">
-            <a:spAutoFit/>
-          </a:bodyPr>
-          <a:lstStyle/>
-          <a:p>
-            <a:pPr algn="r"/>
-            <a:r>
-              <a:rPr sz="1000" b="0">
-                <a:solidFill>
-                  <a:srgbClr val="B83227"/>
-                </a:solidFill>
-                <a:latin typeface="Calibri"/>
-              </a:rPr>
-              <a:t>-1.8%</a:t>
-            </a:r>
-          </a:p>
-        </p:txBody>
-      </p:sp>
-      <p:sp>
-        <p:nvSpPr>
-          <p:cNvPr id="66" name="Rectangle 65"/>
+          <p:cNvPr id="60" name="Rectangle 59"/>
           <p:cNvSpPr/>
           <p:nvPr/>
         </p:nvSpPr>
@@ -12376,7 +12166,7 @@
       </p:sp>
       <p:sp>
         <p:nvSpPr>
-          <p:cNvPr id="67" name="TextBox 66"/>
+          <p:cNvPr id="61" name="TextBox 60"/>
           <p:cNvSpPr txBox="1"/>
           <p:nvPr/>
         </p:nvSpPr>
@@ -12411,7 +12201,7 @@
       </p:sp>
       <p:sp>
         <p:nvSpPr>
-          <p:cNvPr id="68" name="Rectangle 67"/>
+          <p:cNvPr id="62" name="Rectangle 61"/>
           <p:cNvSpPr/>
           <p:nvPr/>
         </p:nvSpPr>
@@ -12457,7 +12247,7 @@
       </p:sp>
       <p:sp>
         <p:nvSpPr>
-          <p:cNvPr id="69" name="Rectangle 68"/>
+          <p:cNvPr id="63" name="Rectangle 62"/>
           <p:cNvSpPr/>
           <p:nvPr/>
         </p:nvSpPr>
@@ -12501,7 +12291,7 @@
       </p:sp>
       <p:sp>
         <p:nvSpPr>
-          <p:cNvPr id="70" name="TextBox 69"/>
+          <p:cNvPr id="64" name="TextBox 63"/>
           <p:cNvSpPr txBox="1"/>
           <p:nvPr/>
         </p:nvSpPr>
@@ -12536,7 +12326,7 @@
       </p:sp>
       <p:sp>
         <p:nvSpPr>
-          <p:cNvPr id="71" name="Rectangle 70"/>
+          <p:cNvPr id="65" name="Rectangle 64"/>
           <p:cNvSpPr/>
           <p:nvPr/>
         </p:nvSpPr>
@@ -12579,7 +12369,7 @@
       </p:sp>
       <p:sp>
         <p:nvSpPr>
-          <p:cNvPr id="72" name="Rectangle 71"/>
+          <p:cNvPr id="66" name="Rectangle 65"/>
           <p:cNvSpPr/>
           <p:nvPr/>
         </p:nvSpPr>
@@ -12622,7 +12412,7 @@
       </p:sp>
       <p:sp>
         <p:nvSpPr>
-          <p:cNvPr id="73" name="TextBox 72"/>
+          <p:cNvPr id="67" name="TextBox 66"/>
           <p:cNvSpPr txBox="1"/>
           <p:nvPr/>
         </p:nvSpPr>
@@ -12657,7 +12447,7 @@
       </p:sp>
       <p:sp>
         <p:nvSpPr>
-          <p:cNvPr id="74" name="TextBox 73"/>
+          <p:cNvPr id="68" name="TextBox 67"/>
           <p:cNvSpPr txBox="1"/>
           <p:nvPr/>
         </p:nvSpPr>
@@ -12692,7 +12482,7 @@
       </p:sp>
       <p:sp>
         <p:nvSpPr>
-          <p:cNvPr id="75" name="Rectangle 74"/>
+          <p:cNvPr id="69" name="Rectangle 68"/>
           <p:cNvSpPr/>
           <p:nvPr/>
         </p:nvSpPr>
@@ -12738,7 +12528,7 @@
       </p:sp>
       <p:sp>
         <p:nvSpPr>
-          <p:cNvPr id="76" name="Rectangle 75"/>
+          <p:cNvPr id="70" name="Rectangle 69"/>
           <p:cNvSpPr/>
           <p:nvPr/>
         </p:nvSpPr>
@@ -12782,7 +12572,7 @@
       </p:sp>
       <p:sp>
         <p:nvSpPr>
-          <p:cNvPr id="77" name="TextBox 76"/>
+          <p:cNvPr id="71" name="TextBox 70"/>
           <p:cNvSpPr txBox="1"/>
           <p:nvPr/>
         </p:nvSpPr>
@@ -12817,7 +12607,7 @@
       </p:sp>
       <p:sp>
         <p:nvSpPr>
-          <p:cNvPr id="78" name="TextBox 77"/>
+          <p:cNvPr id="72" name="TextBox 71"/>
           <p:cNvSpPr txBox="1"/>
           <p:nvPr/>
         </p:nvSpPr>
@@ -12852,7 +12642,7 @@
       </p:sp>
       <p:sp>
         <p:nvSpPr>
-          <p:cNvPr id="79" name="TextBox 78"/>
+          <p:cNvPr id="73" name="TextBox 72"/>
           <p:cNvSpPr txBox="1"/>
           <p:nvPr/>
         </p:nvSpPr>
@@ -12887,7 +12677,7 @@
       </p:sp>
       <p:sp>
         <p:nvSpPr>
-          <p:cNvPr id="80" name="TextBox 79"/>
+          <p:cNvPr id="74" name="TextBox 73"/>
           <p:cNvSpPr txBox="1"/>
           <p:nvPr/>
         </p:nvSpPr>
@@ -12922,7 +12712,7 @@
       </p:sp>
       <p:sp>
         <p:nvSpPr>
-          <p:cNvPr id="81" name="Rectangle 80"/>
+          <p:cNvPr id="75" name="Rectangle 74"/>
           <p:cNvSpPr/>
           <p:nvPr/>
         </p:nvSpPr>
@@ -12968,7 +12758,7 @@
       </p:sp>
       <p:sp>
         <p:nvSpPr>
-          <p:cNvPr id="82" name="Rectangle 81"/>
+          <p:cNvPr id="76" name="Rectangle 75"/>
           <p:cNvSpPr/>
           <p:nvPr/>
         </p:nvSpPr>
@@ -13012,7 +12802,7 @@
       </p:sp>
       <p:sp>
         <p:nvSpPr>
-          <p:cNvPr id="83" name="TextBox 82"/>
+          <p:cNvPr id="77" name="TextBox 76"/>
           <p:cNvSpPr txBox="1"/>
           <p:nvPr/>
         </p:nvSpPr>
@@ -13047,7 +12837,7 @@
       </p:sp>
       <p:sp>
         <p:nvSpPr>
-          <p:cNvPr id="84" name="TextBox 83"/>
+          <p:cNvPr id="78" name="TextBox 77"/>
           <p:cNvSpPr txBox="1"/>
           <p:nvPr/>
         </p:nvSpPr>
@@ -13082,7 +12872,7 @@
       </p:sp>
       <p:sp>
         <p:nvSpPr>
-          <p:cNvPr id="85" name="TextBox 84"/>
+          <p:cNvPr id="79" name="TextBox 78"/>
           <p:cNvSpPr txBox="1"/>
           <p:nvPr/>
         </p:nvSpPr>
@@ -13117,7 +12907,7 @@
       </p:sp>
       <p:sp>
         <p:nvSpPr>
-          <p:cNvPr id="86" name="TextBox 85"/>
+          <p:cNvPr id="80" name="TextBox 79"/>
           <p:cNvSpPr txBox="1"/>
           <p:nvPr/>
         </p:nvSpPr>
@@ -13152,7 +12942,7 @@
       </p:sp>
       <p:sp>
         <p:nvSpPr>
-          <p:cNvPr id="87" name="TextBox 86"/>
+          <p:cNvPr id="81" name="TextBox 80"/>
           <p:cNvSpPr txBox="1"/>
           <p:nvPr/>
         </p:nvSpPr>
@@ -13187,7 +12977,7 @@
       </p:sp>
       <p:sp>
         <p:nvSpPr>
-          <p:cNvPr id="88" name="TextBox 87"/>
+          <p:cNvPr id="82" name="TextBox 81"/>
           <p:cNvSpPr txBox="1"/>
           <p:nvPr/>
         </p:nvSpPr>
@@ -13222,7 +13012,7 @@
       </p:sp>
       <p:sp>
         <p:nvSpPr>
-          <p:cNvPr id="89" name="TextBox 88"/>
+          <p:cNvPr id="83" name="TextBox 82"/>
           <p:cNvSpPr txBox="1"/>
           <p:nvPr/>
         </p:nvSpPr>
@@ -13257,7 +13047,7 @@
       </p:sp>
       <p:sp>
         <p:nvSpPr>
-          <p:cNvPr id="90" name="Rectangle 89"/>
+          <p:cNvPr id="84" name="Rectangle 83"/>
           <p:cNvSpPr/>
           <p:nvPr/>
         </p:nvSpPr>
@@ -13301,7 +13091,7 @@
       </p:sp>
       <p:sp>
         <p:nvSpPr>
-          <p:cNvPr id="91" name="TextBox 90"/>
+          <p:cNvPr id="85" name="TextBox 84"/>
           <p:cNvSpPr txBox="1"/>
           <p:nvPr/>
         </p:nvSpPr>
@@ -13329,14 +13119,14 @@
                 </a:solidFill>
                 <a:latin typeface="Calibri"/>
               </a:rPr>
-              <a:t>Source: bloomberg, investing, marketscreener, yahoo  |  Generated 14 May 2026  |  Analyst: Jabal Research</a:t>
-            </a:r>
-          </a:p>
-        </p:txBody>
-      </p:sp>
-      <p:sp>
-        <p:nvSpPr>
-          <p:cNvPr id="92" name="TextBox 91"/>
+              <a:t>Source: bloomberg, investing, marketscreener, yahoo  |  Generated 15 May 2026  |  Analyst: Jabal Research</a:t>
+            </a:r>
+          </a:p>
+        </p:txBody>
+      </p:sp>
+      <p:sp>
+        <p:nvSpPr>
+          <p:cNvPr id="86" name="TextBox 85"/>
           <p:cNvSpPr txBox="1"/>
           <p:nvPr/>
         </p:nvSpPr>
@@ -13371,7 +13161,7 @@
       </p:sp>
       <p:sp>
         <p:nvSpPr>
-          <p:cNvPr id="93" name="TextBox 92"/>
+          <p:cNvPr id="87" name="TextBox 86"/>
           <p:cNvSpPr txBox="1"/>
           <p:nvPr/>
         </p:nvSpPr>
@@ -13406,7 +13196,7 @@
       </p:sp>
       <p:sp>
         <p:nvSpPr>
-          <p:cNvPr id="94" name="TextBox 93"/>
+          <p:cNvPr id="88" name="TextBox 87"/>
           <p:cNvSpPr txBox="1"/>
           <p:nvPr/>
         </p:nvSpPr>

--- a/static/decks/2222.SR.pptx
+++ b/static/decks/2222.SR.pptx
@@ -144,323 +144,317 @@
           </c:marker>
           <c:cat>
             <c:strRef>
-              <c:f>Sheet1!$A$2:$A$52</c:f>
+              <c:f>Sheet1!$A$2:$A$51</c:f>
               <c:strCache>
-                <c:ptCount val="51"/>
+                <c:ptCount val="50"/>
                 <c:pt idx="0">
-                  <c:v>05-13</c:v>
+                  <c:v>05-18</c:v>
                 </c:pt>
                 <c:pt idx="1">
-                  <c:v>05-20</c:v>
+                  <c:v>05-25</c:v>
                 </c:pt>
                 <c:pt idx="2">
-                  <c:v>05-27</c:v>
+                  <c:v>06-01</c:v>
                 </c:pt>
                 <c:pt idx="3">
-                  <c:v>06-03</c:v>
+                  <c:v>06-12</c:v>
                 </c:pt>
                 <c:pt idx="4">
-                  <c:v>06-16</c:v>
+                  <c:v>06-19</c:v>
                 </c:pt>
                 <c:pt idx="5">
-                  <c:v>06-23</c:v>
+                  <c:v>06-26</c:v>
                 </c:pt>
                 <c:pt idx="6">
-                  <c:v>06-30</c:v>
+                  <c:v>07-03</c:v>
                 </c:pt>
                 <c:pt idx="7">
-                  <c:v>07-07</c:v>
+                  <c:v>07-10</c:v>
                 </c:pt>
                 <c:pt idx="8">
-                  <c:v>07-14</c:v>
+                  <c:v>07-17</c:v>
                 </c:pt>
                 <c:pt idx="9">
-                  <c:v>07-21</c:v>
+                  <c:v>07-24</c:v>
                 </c:pt>
                 <c:pt idx="10">
-                  <c:v>07-28</c:v>
+                  <c:v>07-31</c:v>
                 </c:pt>
                 <c:pt idx="11">
-                  <c:v>08-04</c:v>
+                  <c:v>08-07</c:v>
                 </c:pt>
                 <c:pt idx="12">
-                  <c:v>08-11</c:v>
+                  <c:v>08-14</c:v>
                 </c:pt>
                 <c:pt idx="13">
-                  <c:v>08-18</c:v>
+                  <c:v>08-21</c:v>
                 </c:pt>
                 <c:pt idx="14">
-                  <c:v>08-25</c:v>
+                  <c:v>08-28</c:v>
                 </c:pt>
                 <c:pt idx="15">
-                  <c:v>09-01</c:v>
+                  <c:v>09-04</c:v>
                 </c:pt>
                 <c:pt idx="16">
-                  <c:v>09-08</c:v>
+                  <c:v>09-11</c:v>
                 </c:pt>
                 <c:pt idx="17">
-                  <c:v>09-15</c:v>
+                  <c:v>09-18</c:v>
                 </c:pt>
                 <c:pt idx="18">
-                  <c:v>09-22</c:v>
+                  <c:v>09-28</c:v>
                 </c:pt>
                 <c:pt idx="19">
-                  <c:v>09-30</c:v>
+                  <c:v>10-05</c:v>
                 </c:pt>
                 <c:pt idx="20">
-                  <c:v>10-07</c:v>
+                  <c:v>10-12</c:v>
                 </c:pt>
                 <c:pt idx="21">
-                  <c:v>10-14</c:v>
+                  <c:v>10-19</c:v>
                 </c:pt>
                 <c:pt idx="22">
-                  <c:v>10-21</c:v>
+                  <c:v>10-26</c:v>
                 </c:pt>
                 <c:pt idx="23">
-                  <c:v>10-28</c:v>
+                  <c:v>11-02</c:v>
                 </c:pt>
                 <c:pt idx="24">
-                  <c:v>11-04</c:v>
+                  <c:v>11-09</c:v>
                 </c:pt>
                 <c:pt idx="25">
-                  <c:v>11-11</c:v>
+                  <c:v>11-16</c:v>
                 </c:pt>
                 <c:pt idx="26">
-                  <c:v>11-18</c:v>
+                  <c:v>11-23</c:v>
                 </c:pt>
                 <c:pt idx="27">
-                  <c:v>11-25</c:v>
+                  <c:v>11-30</c:v>
                 </c:pt>
                 <c:pt idx="28">
-                  <c:v>12-02</c:v>
+                  <c:v>12-07</c:v>
                 </c:pt>
                 <c:pt idx="29">
-                  <c:v>12-09</c:v>
+                  <c:v>12-14</c:v>
                 </c:pt>
                 <c:pt idx="30">
-                  <c:v>12-16</c:v>
+                  <c:v>12-21</c:v>
                 </c:pt>
                 <c:pt idx="31">
-                  <c:v>12-23</c:v>
+                  <c:v>12-28</c:v>
                 </c:pt>
                 <c:pt idx="32">
-                  <c:v>12-30</c:v>
+                  <c:v>01-04</c:v>
                 </c:pt>
                 <c:pt idx="33">
-                  <c:v>01-06</c:v>
+                  <c:v>01-11</c:v>
                 </c:pt>
                 <c:pt idx="34">
-                  <c:v>01-13</c:v>
+                  <c:v>01-18</c:v>
                 </c:pt>
                 <c:pt idx="35">
-                  <c:v>01-20</c:v>
+                  <c:v>01-25</c:v>
                 </c:pt>
                 <c:pt idx="36">
-                  <c:v>01-27</c:v>
+                  <c:v>02-01</c:v>
                 </c:pt>
                 <c:pt idx="37">
-                  <c:v>02-03</c:v>
+                  <c:v>02-08</c:v>
                 </c:pt>
                 <c:pt idx="38">
-                  <c:v>02-10</c:v>
+                  <c:v>02-15</c:v>
                 </c:pt>
                 <c:pt idx="39">
-                  <c:v>02-17</c:v>
+                  <c:v>02-23</c:v>
                 </c:pt>
                 <c:pt idx="40">
-                  <c:v>02-25</c:v>
+                  <c:v>03-02</c:v>
                 </c:pt>
                 <c:pt idx="41">
-                  <c:v>03-04</c:v>
+                  <c:v>03-09</c:v>
                 </c:pt>
                 <c:pt idx="42">
-                  <c:v>03-11</c:v>
+                  <c:v>03-16</c:v>
                 </c:pt>
                 <c:pt idx="43">
-                  <c:v>03-25</c:v>
+                  <c:v>03-30</c:v>
                 </c:pt>
                 <c:pt idx="44">
-                  <c:v>04-01</c:v>
+                  <c:v>04-06</c:v>
                 </c:pt>
                 <c:pt idx="45">
-                  <c:v>04-08</c:v>
+                  <c:v>04-13</c:v>
                 </c:pt>
                 <c:pt idx="46">
-                  <c:v>04-15</c:v>
+                  <c:v>04-20</c:v>
                 </c:pt>
                 <c:pt idx="47">
-                  <c:v>04-22</c:v>
+                  <c:v>04-27</c:v>
                 </c:pt>
                 <c:pt idx="48">
-                  <c:v>04-29</c:v>
+                  <c:v>05-04</c:v>
                 </c:pt>
                 <c:pt idx="49">
-                  <c:v>05-06</c:v>
-                </c:pt>
-                <c:pt idx="50">
-                  <c:v>05-13</c:v>
+                  <c:v>05-11</c:v>
                 </c:pt>
               </c:strCache>
             </c:strRef>
           </c:cat>
           <c:val>
             <c:numRef>
-              <c:f>Sheet1!$B$2:$B$52</c:f>
+              <c:f>Sheet1!$B$2:$B$51</c:f>
               <c:numCache>
                 <c:formatCode>General</c:formatCode>
-                <c:ptCount val="51"/>
+                <c:ptCount val="50"/>
                 <c:pt idx="0">
-                  <c:v>25.549999237060547</c:v>
+                  <c:v>26.149999618530273</c:v>
                 </c:pt>
                 <c:pt idx="1">
-                  <c:v>26.200000762939453</c:v>
+                  <c:v>25.0</c:v>
                 </c:pt>
                 <c:pt idx="2">
-                  <c:v>25.049999237060547</c:v>
+                  <c:v>24.81999969482422</c:v>
                 </c:pt>
                 <c:pt idx="3">
+                  <c:v>24.959999084472656</c:v>
+                </c:pt>
+                <c:pt idx="4">
                   <c:v>24.81999969482422</c:v>
                 </c:pt>
-                <c:pt idx="4">
-                  <c:v>25.299999237060547</c:v>
-                </c:pt>
                 <c:pt idx="5">
-                  <c:v>24.739999771118164</c:v>
+                  <c:v>24.299999237060547</c:v>
                 </c:pt>
                 <c:pt idx="6">
-                  <c:v>24.31999969482422</c:v>
+                  <c:v>24.780000686645508</c:v>
                 </c:pt>
                 <c:pt idx="7">
-                  <c:v>25.079999923706055</c:v>
+                  <c:v>25.040000915527344</c:v>
                 </c:pt>
                 <c:pt idx="8">
-                  <c:v>24.860000610351562</c:v>
+                  <c:v>24.420000076293945</c:v>
                 </c:pt>
                 <c:pt idx="9">
-                  <c:v>24.100000381469727</c:v>
+                  <c:v>24.030000686645508</c:v>
                 </c:pt>
                 <c:pt idx="10">
-                  <c:v>24.15999984741211</c:v>
+                  <c:v>24.299999237060547</c:v>
                 </c:pt>
                 <c:pt idx="11">
-                  <c:v>23.90999984741211</c:v>
+                  <c:v>24.34000015258789</c:v>
                 </c:pt>
                 <c:pt idx="12">
-                  <c:v>24.049999237060547</c:v>
+                  <c:v>24.059999465942383</c:v>
                 </c:pt>
                 <c:pt idx="13">
-                  <c:v>24.1299991607666</c:v>
+                  <c:v>23.709999084472656</c:v>
                 </c:pt>
                 <c:pt idx="14">
-                  <c:v>23.790000915527344</c:v>
+                  <c:v>23.700000762939453</c:v>
                 </c:pt>
                 <c:pt idx="15">
-                  <c:v>23.600000381469727</c:v>
+                  <c:v>23.649999618530273</c:v>
                 </c:pt>
                 <c:pt idx="16">
-                  <c:v>23.25</c:v>
+                  <c:v>23.1299991607666</c:v>
                 </c:pt>
                 <c:pt idx="17">
-                  <c:v>23.219999313354492</c:v>
+                  <c:v>24.469999313354492</c:v>
                 </c:pt>
                 <c:pt idx="18">
-                  <c:v>24.950000762939453</c:v>
+                  <c:v>24.450000762939453</c:v>
                 </c:pt>
                 <c:pt idx="19">
-                  <c:v>24.6200008392334</c:v>
+                  <c:v>24.790000915527344</c:v>
                 </c:pt>
                 <c:pt idx="20">
-                  <c:v>24.809999465942383</c:v>
+                  <c:v>24.5</c:v>
                 </c:pt>
                 <c:pt idx="21">
-                  <c:v>24.75</c:v>
+                  <c:v>25.15999984741211</c:v>
                 </c:pt>
                 <c:pt idx="22">
-                  <c:v>25.040000915527344</c:v>
+                  <c:v>25.739999771118164</c:v>
                 </c:pt>
                 <c:pt idx="23">
-                  <c:v>25.8799991607666</c:v>
+                  <c:v>25.639999389648438</c:v>
                 </c:pt>
                 <c:pt idx="24">
-                  <c:v>25.760000228881836</c:v>
+                  <c:v>25.700000762939453</c:v>
                 </c:pt>
                 <c:pt idx="25">
-                  <c:v>25.940000534057617</c:v>
+                  <c:v>25.579999923706055</c:v>
                 </c:pt>
                 <c:pt idx="26">
-                  <c:v>25.84000015258789</c:v>
+                  <c:v>25.600000381469727</c:v>
                 </c:pt>
                 <c:pt idx="27">
-                  <c:v>24.56999969482422</c:v>
+                  <c:v>24.540000915527344</c:v>
                 </c:pt>
                 <c:pt idx="28">
-                  <c:v>24.399999618530273</c:v>
+                  <c:v>24.420000076293945</c:v>
                 </c:pt>
                 <c:pt idx="29">
-                  <c:v>24.34000015258789</c:v>
+                  <c:v>23.889999389648438</c:v>
                 </c:pt>
                 <c:pt idx="30">
-                  <c:v>23.75</c:v>
+                  <c:v>23.829999923706055</c:v>
                 </c:pt>
                 <c:pt idx="31">
-                  <c:v>23.760000228881836</c:v>
+                  <c:v>23.510000228881836</c:v>
                 </c:pt>
                 <c:pt idx="32">
-                  <c:v>23.6200008392334</c:v>
+                  <c:v>23.5</c:v>
                 </c:pt>
                 <c:pt idx="33">
-                  <c:v>23.440000534057617</c:v>
+                  <c:v>24.219999313354492</c:v>
                 </c:pt>
                 <c:pt idx="34">
-                  <c:v>24.920000076293945</c:v>
+                  <c:v>24.979999542236328</c:v>
                 </c:pt>
                 <c:pt idx="35">
-                  <c:v>25.0</c:v>
+                  <c:v>25.31999969482422</c:v>
                 </c:pt>
                 <c:pt idx="36">
-                  <c:v>25.260000228881836</c:v>
+                  <c:v>25.18000030517578</c:v>
                 </c:pt>
                 <c:pt idx="37">
-                  <c:v>25.600000381469727</c:v>
+                  <c:v>25.5</c:v>
                 </c:pt>
                 <c:pt idx="38">
-                  <c:v>25.860000610351562</c:v>
+                  <c:v>25.780000686645508</c:v>
                 </c:pt>
                 <c:pt idx="39">
-                  <c:v>25.440000534057617</c:v>
+                  <c:v>25.979999542236328</c:v>
                 </c:pt>
                 <c:pt idx="40">
-                  <c:v>25.739999771118164</c:v>
+                  <c:v>26.219999313354492</c:v>
                 </c:pt>
                 <c:pt idx="41">
-                  <c:v>26.100000381469727</c:v>
+                  <c:v>27.1200008392334</c:v>
                 </c:pt>
                 <c:pt idx="42">
-                  <c:v>27.15999984741211</c:v>
+                  <c:v>27.059999465942383</c:v>
                 </c:pt>
                 <c:pt idx="43">
-                  <c:v>26.860000610351562</c:v>
+                  <c:v>26.979999542236328</c:v>
                 </c:pt>
                 <c:pt idx="44">
-                  <c:v>27.559999465942383</c:v>
+                  <c:v>27.5</c:v>
                 </c:pt>
                 <c:pt idx="45">
-                  <c:v>26.979999542236328</c:v>
+                  <c:v>27.600000381469727</c:v>
                 </c:pt>
                 <c:pt idx="46">
-                  <c:v>27.540000915527344</c:v>
+                  <c:v>27.200000762939453</c:v>
                 </c:pt>
                 <c:pt idx="47">
                   <c:v>27.260000228881836</c:v>
                 </c:pt>
                 <c:pt idx="48">
-                  <c:v>27.579999923706055</c:v>
+                  <c:v>27.5</c:v>
                 </c:pt>
                 <c:pt idx="49">
-                  <c:v>27.0</c:v>
-                </c:pt>
-                <c:pt idx="50">
-                  <c:v>27.8799991607666</c:v>
+                  <c:v>27.639999389648438</c:v>
                 </c:pt>
               </c:numCache>
             </c:numRef>
@@ -3790,7 +3784,7 @@
                 </a:solidFill>
                 <a:latin typeface="Georgia"/>
               </a:rPr>
-              <a:t>Saudi Arabian Oil Company</a:t>
+              <a:t>Saudi Arabian Oil Co.</a:t>
             </a:r>
           </a:p>
         </p:txBody>
@@ -3825,7 +3819,7 @@
                 </a:solidFill>
                 <a:latin typeface="Calibri"/>
               </a:rPr>
-              <a:t>2222.SR  ·  Energy  ·  Oil &amp; Gas Integrated  ·  —</a:t>
+              <a:t>2222.SR  ·  Energy  ·  Oil &amp; Gas Integrated  ·  Tadawul (Saudi Arabia)</a:t>
             </a:r>
           </a:p>
         </p:txBody>
@@ -4099,7 +4093,7 @@
                 </a:solidFill>
                 <a:latin typeface="Calibri"/>
               </a:rPr>
-              <a:t>OUTPERFORM</a:t>
+              <a:t>BUY</a:t>
             </a:r>
           </a:p>
         </p:txBody>
@@ -4259,7 +4253,7 @@
                 </a:solidFill>
                 <a:latin typeface="Calibri"/>
               </a:rPr>
-              <a:t>SAR 32.50</a:t>
+              <a:t>SAR 30.08</a:t>
             </a:r>
           </a:p>
         </p:txBody>
@@ -4419,7 +4413,7 @@
                 </a:solidFill>
                 <a:latin typeface="Calibri"/>
               </a:rPr>
-              <a:t>+16.8%</a:t>
+              <a:t>+8.5%</a:t>
             </a:r>
           </a:p>
         </p:txBody>
@@ -4568,7 +4562,7 @@
                 </a:solidFill>
                 <a:latin typeface="Calibri"/>
               </a:rPr>
-              <a:t>SAR 27.82</a:t>
+              <a:t>SAR 27.72</a:t>
             </a:r>
           </a:p>
         </p:txBody>
@@ -4638,7 +4632,7 @@
                 </a:solidFill>
                 <a:latin typeface="Calibri"/>
               </a:rPr>
-              <a:t>SAR 6.73T</a:t>
+              <a:t>SAR 6.70T</a:t>
             </a:r>
           </a:p>
         </p:txBody>
@@ -4743,7 +4737,7 @@
                 </a:solidFill>
                 <a:latin typeface="Calibri"/>
               </a:rPr>
-              <a:t>P/E (FY EST)</a:t>
+              <a:t>P/E (FY26E)</a:t>
             </a:r>
           </a:p>
         </p:txBody>
@@ -4778,7 +4772,7 @@
                 </a:solidFill>
                 <a:latin typeface="Calibri"/>
               </a:rPr>
-              <a:t>15.1x</a:t>
+              <a:t>13.7x</a:t>
             </a:r>
           </a:p>
         </p:txBody>
@@ -4848,7 +4842,7 @@
                 </a:solidFill>
                 <a:latin typeface="Calibri"/>
               </a:rPr>
-              <a:t>5.63%</a:t>
+              <a:t>4.90%</a:t>
             </a:r>
           </a:p>
         </p:txBody>
@@ -5067,7 +5061,7 @@
                 </a:solidFill>
                 <a:latin typeface="Calibri"/>
               </a:rPr>
-              <a:t>+0.2%</a:t>
+              <a:t>+0.1%</a:t>
             </a:r>
           </a:p>
         </p:txBody>
@@ -5137,7 +5131,7 @@
                 </a:solidFill>
                 <a:latin typeface="Calibri"/>
               </a:rPr>
-              <a:t>+3.3%</a:t>
+              <a:t>+1.2%</a:t>
             </a:r>
           </a:p>
         </p:txBody>
@@ -5207,7 +5201,7 @@
                 </a:solidFill>
                 <a:latin typeface="Calibri"/>
               </a:rPr>
-              <a:t>+1.9%</a:t>
+              <a:t>+0.8%</a:t>
             </a:r>
           </a:p>
         </p:txBody>
@@ -5277,7 +5271,7 @@
                 </a:solidFill>
                 <a:latin typeface="Calibri"/>
               </a:rPr>
-              <a:t>+8.9%</a:t>
+              <a:t>+8.0%</a:t>
             </a:r>
           </a:p>
         </p:txBody>
@@ -5347,7 +5341,7 @@
                 </a:solidFill>
                 <a:latin typeface="Calibri"/>
               </a:rPr>
-              <a:t>+7.5%</a:t>
+              <a:t>+6.9%</a:t>
             </a:r>
           </a:p>
         </p:txBody>
@@ -5417,7 +5411,7 @@
                 </a:solidFill>
                 <a:latin typeface="Calibri"/>
               </a:rPr>
-              <a:t>+16.8%</a:t>
+              <a:t>+16.2%</a:t>
             </a:r>
           </a:p>
         </p:txBody>
@@ -5566,7 +5560,7 @@
                 </a:solidFill>
                 <a:latin typeface="Calibri"/>
               </a:rPr>
-              <a:t>SAR 27.88</a:t>
+              <a:t>SAR 27.92</a:t>
             </a:r>
           </a:p>
         </p:txBody>
@@ -5623,7 +5617,7 @@
         <p:spPr>
           <a:xfrm>
             <a:off x="1280160" y="6400799"/>
-            <a:ext cx="4243394" cy="54864"/>
+            <a:ext cx="4118236" cy="54864"/>
           </a:xfrm>
           <a:prstGeom prst="rect">
             <a:avLst/>
@@ -5665,7 +5659,7 @@
         </p:nvSpPr>
         <p:spPr>
           <a:xfrm>
-            <a:off x="5441258" y="6345936"/>
+            <a:off x="5316100" y="6345936"/>
             <a:ext cx="164592" cy="164592"/>
           </a:xfrm>
           <a:prstGeom prst="diamond">
@@ -5708,7 +5702,7 @@
         </p:nvSpPr>
         <p:spPr>
           <a:xfrm>
-            <a:off x="4883474" y="6565392"/>
+            <a:off x="4758316" y="6565392"/>
             <a:ext cx="1280160" cy="182880"/>
           </a:xfrm>
           <a:prstGeom prst="rect">
@@ -5730,7 +5724,7 @@
                 </a:solidFill>
                 <a:latin typeface="Calibri"/>
               </a:rPr>
-              <a:t>Current  SAR 27.82</a:t>
+              <a:t>Current  SAR 27.72</a:t>
             </a:r>
           </a:p>
         </p:txBody>
@@ -5922,7 +5916,7 @@
                 </a:solidFill>
                 <a:latin typeface="Calibri"/>
               </a:rPr>
-              <a:t>Awaiting next print; consensus updates trickling in.</a:t>
+              <a:t>Consensus Buy from 18 analysts covering.</a:t>
             </a:r>
           </a:p>
         </p:txBody>
@@ -6035,7 +6029,7 @@
                 </a:solidFill>
                 <a:latin typeface="Calibri"/>
               </a:rPr>
-              <a:t>Multiple sits in mid-range vs. 5-year history.</a:t>
+              <a:t>Forward P/E 13.7x — anchor for re-rate / de-rate debate.</a:t>
             </a:r>
           </a:p>
         </p:txBody>
@@ -6148,7 +6142,7 @@
                 </a:solidFill>
                 <a:latin typeface="Calibri"/>
               </a:rPr>
-              <a:t>Dividend yield in line with sector peers.</a:t>
+              <a:t>Dividend yield 4.90% supports income mandate fit.</a:t>
             </a:r>
           </a:p>
         </p:txBody>
@@ -6261,7 +6255,7 @@
                 </a:solidFill>
                 <a:latin typeface="Calibri"/>
               </a:rPr>
-              <a:t>Management commentary on forward demand is key.</a:t>
+              <a:t>Target SAR 30.08 (+8.5% vs last close).</a:t>
             </a:r>
           </a:p>
         </p:txBody>
@@ -6374,7 +6368,7 @@
                 </a:solidFill>
                 <a:latin typeface="Calibri"/>
               </a:rPr>
-              <a:t>Macro and feedstock-cost volatility remain top risks.</a:t>
+              <a:t>Consensus mixed — 9/18 ratings are Hold despite Buy screen (9 Buy · 0 Sell).</a:t>
             </a:r>
           </a:p>
         </p:txBody>
@@ -6453,7 +6447,7 @@
                 </a:solidFill>
                 <a:latin typeface="Calibri"/>
               </a:rPr>
-              <a:t>Source: bloomberg, investing, marketscreener, yahoo  |  Generated 15 May 2026  |  Analyst: Jabal Research</a:t>
+              <a:t>Source: Investing.com, Yahoo Finance, MarketScreener, World Bank / IMF, iShares, World Bank / OPEC / EIA  |  Generated 17 May 2026  |  Analyst: Jabal Research</a:t>
             </a:r>
           </a:p>
         </p:txBody>
@@ -6999,7 +6993,7 @@
                 </a:solidFill>
                 <a:latin typeface="Calibri"/>
               </a:rPr>
-              <a:t>Jabal maintains a constructive view into the upcoming print. Saudi Arabian Oil Company sits in the Energy sector (Oil &amp; Gas Integrated). Street consensus is outperform (18 analysts covering); consensus target 32.50. The shares trade at a P/E around 15.1x trailing earnings. The macro and commodity backdrop is anchored by brent at 68  (-20.9% YoY); wti at 64  (-21.9% YoY). The thesis hinges on three factors: demand trajectory through H2, feedstock/input-cost discipline, and management's tone on guidance during the call. We expect the print itself to be within consensus bounds; the read on forward commentary is the swing factor.</a:t>
+              <a:t>Jabal maintains a constructive view into the upcoming print. Saudi Arabian Oil Co. sits in the Energy sector (Oil &amp; Gas Integrated). Street consensus is Buy (18 analysts covering); consensus target 30.08. The macro and commodity backdrop is anchored by brent at 75  (-12.8% YoY); wti at 70  (-13.6% YoY). Macro context: local-economy GDP growth recently at 2.0%. The thesis hinges on three factors: demand trajectory through H2, feedstock/input-cost discipline, and management's tone on guidance during the call. We expect the print itself to be within consensus bounds; the read on forward commentary is the swing factor.</a:t>
             </a:r>
           </a:p>
         </p:txBody>
@@ -7113,7 +7107,7 @@
                 </a:solidFill>
                 <a:latin typeface="Calibri"/>
               </a:rPr>
-              <a:t>Jabal estimates vs. consensus  ·  Local currency unless stated</a:t>
+              <a:t>Jabal estimates vs. consensus  ·  SAR billions unless stated</a:t>
             </a:r>
           </a:p>
         </p:txBody>
@@ -7127,7 +7121,7 @@
         <p:spPr>
           <a:xfrm>
             <a:off x="411480" y="4096512"/>
-            <a:ext cx="2148840" cy="274320"/>
+            <a:ext cx="1965960" cy="274320"/>
           </a:xfrm>
           <a:prstGeom prst="rect">
             <a:avLst/>
@@ -7161,7 +7155,7 @@
         </p:nvSpPr>
         <p:spPr>
           <a:xfrm>
-            <a:off x="2606040" y="4096512"/>
+            <a:off x="2423160" y="4096512"/>
             <a:ext cx="960120" cy="274320"/>
           </a:xfrm>
           <a:prstGeom prst="rect">
@@ -7183,7 +7177,7 @@
                 </a:solidFill>
                 <a:latin typeface="Calibri"/>
               </a:rPr>
-              <a:t>JABAL EST.</a:t>
+              <a:t>Q2 2026E</a:t>
             </a:r>
           </a:p>
         </p:txBody>
@@ -7196,8 +7190,8 @@
         </p:nvSpPr>
         <p:spPr>
           <a:xfrm>
-            <a:off x="3611880" y="4096512"/>
-            <a:ext cx="960120" cy="274320"/>
+            <a:off x="3429000" y="4096512"/>
+            <a:ext cx="868680" cy="274320"/>
           </a:xfrm>
           <a:prstGeom prst="rect">
             <a:avLst/>
@@ -7218,77 +7212,77 @@
                 </a:solidFill>
                 <a:latin typeface="Calibri"/>
               </a:rPr>
+              <a:t>YOY</a:t>
+            </a:r>
+          </a:p>
+        </p:txBody>
+      </p:sp>
+      <p:sp>
+        <p:nvSpPr>
+          <p:cNvPr id="19" name="TextBox 18"/>
+          <p:cNvSpPr txBox="1"/>
+          <p:nvPr/>
+        </p:nvSpPr>
+        <p:spPr>
+          <a:xfrm>
+            <a:off x="4343400" y="4096512"/>
+            <a:ext cx="868680" cy="274320"/>
+          </a:xfrm>
+          <a:prstGeom prst="rect">
+            <a:avLst/>
+          </a:prstGeom>
+          <a:noFill/>
+        </p:spPr>
+        <p:txBody>
+          <a:bodyPr wrap="square" lIns="0" rIns="0" tIns="0" bIns="0" anchor="t">
+            <a:spAutoFit/>
+          </a:bodyPr>
+          <a:lstStyle/>
+          <a:p>
+            <a:pPr algn="r"/>
+            <a:r>
+              <a:rPr sz="850" b="0">
+                <a:solidFill>
+                  <a:srgbClr val="9A9A9A"/>
+                </a:solidFill>
+                <a:latin typeface="Calibri"/>
+              </a:rPr>
+              <a:t>QOQ</a:t>
+            </a:r>
+          </a:p>
+        </p:txBody>
+      </p:sp>
+      <p:sp>
+        <p:nvSpPr>
+          <p:cNvPr id="20" name="TextBox 19"/>
+          <p:cNvSpPr txBox="1"/>
+          <p:nvPr/>
+        </p:nvSpPr>
+        <p:spPr>
+          <a:xfrm>
+            <a:off x="5257800" y="4096512"/>
+            <a:ext cx="1143000" cy="274320"/>
+          </a:xfrm>
+          <a:prstGeom prst="rect">
+            <a:avLst/>
+          </a:prstGeom>
+          <a:noFill/>
+        </p:spPr>
+        <p:txBody>
+          <a:bodyPr wrap="square" lIns="0" rIns="0" tIns="0" bIns="0" anchor="t">
+            <a:spAutoFit/>
+          </a:bodyPr>
+          <a:lstStyle/>
+          <a:p>
+            <a:pPr algn="r"/>
+            <a:r>
+              <a:rPr sz="850" b="0">
+                <a:solidFill>
+                  <a:srgbClr val="9A9A9A"/>
+                </a:solidFill>
+                <a:latin typeface="Calibri"/>
+              </a:rPr>
               <a:t>CONSENSUS</a:t>
-            </a:r>
-          </a:p>
-        </p:txBody>
-      </p:sp>
-      <p:sp>
-        <p:nvSpPr>
-          <p:cNvPr id="19" name="TextBox 18"/>
-          <p:cNvSpPr txBox="1"/>
-          <p:nvPr/>
-        </p:nvSpPr>
-        <p:spPr>
-          <a:xfrm>
-            <a:off x="4617720" y="4096512"/>
-            <a:ext cx="960120" cy="274320"/>
-          </a:xfrm>
-          <a:prstGeom prst="rect">
-            <a:avLst/>
-          </a:prstGeom>
-          <a:noFill/>
-        </p:spPr>
-        <p:txBody>
-          <a:bodyPr wrap="square" lIns="0" rIns="0" tIns="0" bIns="0" anchor="t">
-            <a:spAutoFit/>
-          </a:bodyPr>
-          <a:lstStyle/>
-          <a:p>
-            <a:pPr algn="r"/>
-            <a:r>
-              <a:rPr sz="850" b="0">
-                <a:solidFill>
-                  <a:srgbClr val="9A9A9A"/>
-                </a:solidFill>
-                <a:latin typeface="Calibri"/>
-              </a:rPr>
-              <a:t>Δ VS CONSENSUS</a:t>
-            </a:r>
-          </a:p>
-        </p:txBody>
-      </p:sp>
-      <p:sp>
-        <p:nvSpPr>
-          <p:cNvPr id="20" name="TextBox 19"/>
-          <p:cNvSpPr txBox="1"/>
-          <p:nvPr/>
-        </p:nvSpPr>
-        <p:spPr>
-          <a:xfrm>
-            <a:off x="5623560" y="4096512"/>
-            <a:ext cx="777240" cy="274320"/>
-          </a:xfrm>
-          <a:prstGeom prst="rect">
-            <a:avLst/>
-          </a:prstGeom>
-          <a:noFill/>
-        </p:spPr>
-        <p:txBody>
-          <a:bodyPr wrap="square" lIns="0" rIns="0" tIns="0" bIns="0" anchor="t">
-            <a:spAutoFit/>
-          </a:bodyPr>
-          <a:lstStyle/>
-          <a:p>
-            <a:pPr algn="r"/>
-            <a:r>
-              <a:rPr sz="850" b="0">
-                <a:solidFill>
-                  <a:srgbClr val="9A9A9A"/>
-                </a:solidFill>
-                <a:latin typeface="Calibri"/>
-              </a:rPr>
-              <a:t>YOY</a:t>
             </a:r>
           </a:p>
         </p:txBody>
@@ -7346,7 +7340,7 @@
         <p:spPr>
           <a:xfrm>
             <a:off x="411480" y="4370832"/>
-            <a:ext cx="2148840" cy="274320"/>
+            <a:ext cx="1965960" cy="274320"/>
           </a:xfrm>
           <a:prstGeom prst="rect">
             <a:avLst/>
@@ -7367,7 +7361,7 @@
                 </a:solidFill>
                 <a:latin typeface="Calibri"/>
               </a:rPr>
-              <a:t>EPS — Q2_2026</a:t>
+              <a:t>Revenue (SARB)</a:t>
             </a:r>
           </a:p>
         </p:txBody>
@@ -7380,7 +7374,7 @@
         </p:nvSpPr>
         <p:spPr>
           <a:xfrm>
-            <a:off x="2606040" y="4370832"/>
+            <a:off x="2423160" y="4370832"/>
             <a:ext cx="960120" cy="274320"/>
           </a:xfrm>
           <a:prstGeom prst="rect">
@@ -7415,8 +7409,8 @@
         </p:nvSpPr>
         <p:spPr>
           <a:xfrm>
-            <a:off x="3611880" y="4370832"/>
-            <a:ext cx="960120" cy="274320"/>
+            <a:off x="3429000" y="4370832"/>
+            <a:ext cx="868680" cy="274320"/>
           </a:xfrm>
           <a:prstGeom prst="rect">
             <a:avLst/>
@@ -7433,25 +7427,60 @@
             <a:r>
               <a:rPr sz="1000" b="0">
                 <a:solidFill>
+                  <a:srgbClr val="2F7D4F"/>
+                </a:solidFill>
+                <a:latin typeface="Calibri"/>
+              </a:rPr>
+              <a:t>+28.0%</a:t>
+            </a:r>
+          </a:p>
+        </p:txBody>
+      </p:sp>
+      <p:sp>
+        <p:nvSpPr>
+          <p:cNvPr id="25" name="TextBox 24"/>
+          <p:cNvSpPr txBox="1"/>
+          <p:nvPr/>
+        </p:nvSpPr>
+        <p:spPr>
+          <a:xfrm>
+            <a:off x="4343400" y="4370832"/>
+            <a:ext cx="868680" cy="274320"/>
+          </a:xfrm>
+          <a:prstGeom prst="rect">
+            <a:avLst/>
+          </a:prstGeom>
+          <a:noFill/>
+        </p:spPr>
+        <p:txBody>
+          <a:bodyPr wrap="square" lIns="0" rIns="0" tIns="0" bIns="0" anchor="t">
+            <a:spAutoFit/>
+          </a:bodyPr>
+          <a:lstStyle/>
+          <a:p>
+            <a:pPr algn="r"/>
+            <a:r>
+              <a:rPr sz="1000" b="0">
+                <a:solidFill>
                   <a:srgbClr val="1A1A1A"/>
                 </a:solidFill>
                 <a:latin typeface="Calibri"/>
               </a:rPr>
-              <a:t>0.480</a:t>
-            </a:r>
-          </a:p>
-        </p:txBody>
-      </p:sp>
-      <p:sp>
-        <p:nvSpPr>
-          <p:cNvPr id="25" name="TextBox 24"/>
-          <p:cNvSpPr txBox="1"/>
-          <p:nvPr/>
-        </p:nvSpPr>
-        <p:spPr>
-          <a:xfrm>
-            <a:off x="4617720" y="4370832"/>
-            <a:ext cx="960120" cy="274320"/>
+              <a:t>—</a:t>
+            </a:r>
+          </a:p>
+        </p:txBody>
+      </p:sp>
+      <p:sp>
+        <p:nvSpPr>
+          <p:cNvPr id="26" name="TextBox 25"/>
+          <p:cNvSpPr txBox="1"/>
+          <p:nvPr/>
+        </p:nvSpPr>
+        <p:spPr>
+          <a:xfrm>
+            <a:off x="5257800" y="4370832"/>
+            <a:ext cx="1143000" cy="274320"/>
           </a:xfrm>
           <a:prstGeom prst="rect">
             <a:avLst/>
@@ -7472,42 +7501,7 @@
                 </a:solidFill>
                 <a:latin typeface="Calibri"/>
               </a:rPr>
-              <a:t>—</a:t>
-            </a:r>
-          </a:p>
-        </p:txBody>
-      </p:sp>
-      <p:sp>
-        <p:nvSpPr>
-          <p:cNvPr id="26" name="TextBox 25"/>
-          <p:cNvSpPr txBox="1"/>
-          <p:nvPr/>
-        </p:nvSpPr>
-        <p:spPr>
-          <a:xfrm>
-            <a:off x="5623560" y="4370832"/>
-            <a:ext cx="777240" cy="274320"/>
-          </a:xfrm>
-          <a:prstGeom prst="rect">
-            <a:avLst/>
-          </a:prstGeom>
-          <a:noFill/>
-        </p:spPr>
-        <p:txBody>
-          <a:bodyPr wrap="square" lIns="0" rIns="0" tIns="0" bIns="0" anchor="t">
-            <a:spAutoFit/>
-          </a:bodyPr>
-          <a:lstStyle/>
-          <a:p>
-            <a:pPr algn="r"/>
-            <a:r>
-              <a:rPr sz="1000" b="0">
-                <a:solidFill>
-                  <a:srgbClr val="1A1A1A"/>
-                </a:solidFill>
-                <a:latin typeface="Calibri"/>
-              </a:rPr>
-              <a:t>—</a:t>
+              <a:t>521</a:t>
             </a:r>
           </a:p>
         </p:txBody>
@@ -7564,7 +7558,7 @@
         <p:spPr>
           <a:xfrm>
             <a:off x="411480" y="4645152"/>
-            <a:ext cx="2148840" cy="274320"/>
+            <a:ext cx="1965960" cy="274320"/>
           </a:xfrm>
           <a:prstGeom prst="rect">
             <a:avLst/>
@@ -7585,7 +7579,7 @@
                 </a:solidFill>
                 <a:latin typeface="Calibri"/>
               </a:rPr>
-              <a:t>Revenue — Q2_2026</a:t>
+              <a:t>EBITDA (SARB)</a:t>
             </a:r>
           </a:p>
         </p:txBody>
@@ -7598,7 +7592,7 @@
         </p:nvSpPr>
         <p:spPr>
           <a:xfrm>
-            <a:off x="2606040" y="4645152"/>
+            <a:off x="2423160" y="4645152"/>
             <a:ext cx="960120" cy="274320"/>
           </a:xfrm>
           <a:prstGeom prst="rect">
@@ -7633,7 +7627,147 @@
         </p:nvSpPr>
         <p:spPr>
           <a:xfrm>
-            <a:off x="3611880" y="4645152"/>
+            <a:off x="3429000" y="4645152"/>
+            <a:ext cx="868680" cy="274320"/>
+          </a:xfrm>
+          <a:prstGeom prst="rect">
+            <a:avLst/>
+          </a:prstGeom>
+          <a:noFill/>
+        </p:spPr>
+        <p:txBody>
+          <a:bodyPr wrap="square" lIns="0" rIns="0" tIns="0" bIns="0" anchor="t">
+            <a:spAutoFit/>
+          </a:bodyPr>
+          <a:lstStyle/>
+          <a:p>
+            <a:pPr algn="r"/>
+            <a:r>
+              <a:rPr sz="1000" b="0">
+                <a:solidFill>
+                  <a:srgbClr val="1A1A1A"/>
+                </a:solidFill>
+                <a:latin typeface="Calibri"/>
+              </a:rPr>
+              <a:t>—</a:t>
+            </a:r>
+          </a:p>
+        </p:txBody>
+      </p:sp>
+      <p:sp>
+        <p:nvSpPr>
+          <p:cNvPr id="31" name="TextBox 30"/>
+          <p:cNvSpPr txBox="1"/>
+          <p:nvPr/>
+        </p:nvSpPr>
+        <p:spPr>
+          <a:xfrm>
+            <a:off x="4343400" y="4645152"/>
+            <a:ext cx="868680" cy="274320"/>
+          </a:xfrm>
+          <a:prstGeom prst="rect">
+            <a:avLst/>
+          </a:prstGeom>
+          <a:noFill/>
+        </p:spPr>
+        <p:txBody>
+          <a:bodyPr wrap="square" lIns="0" rIns="0" tIns="0" bIns="0" anchor="t">
+            <a:spAutoFit/>
+          </a:bodyPr>
+          <a:lstStyle/>
+          <a:p>
+            <a:pPr algn="r"/>
+            <a:r>
+              <a:rPr sz="1000" b="0">
+                <a:solidFill>
+                  <a:srgbClr val="1A1A1A"/>
+                </a:solidFill>
+                <a:latin typeface="Calibri"/>
+              </a:rPr>
+              <a:t>—</a:t>
+            </a:r>
+          </a:p>
+        </p:txBody>
+      </p:sp>
+      <p:sp>
+        <p:nvSpPr>
+          <p:cNvPr id="32" name="TextBox 31"/>
+          <p:cNvSpPr txBox="1"/>
+          <p:nvPr/>
+        </p:nvSpPr>
+        <p:spPr>
+          <a:xfrm>
+            <a:off x="5257800" y="4645152"/>
+            <a:ext cx="1143000" cy="274320"/>
+          </a:xfrm>
+          <a:prstGeom prst="rect">
+            <a:avLst/>
+          </a:prstGeom>
+          <a:noFill/>
+        </p:spPr>
+        <p:txBody>
+          <a:bodyPr wrap="square" lIns="0" rIns="0" tIns="0" bIns="0" anchor="t">
+            <a:spAutoFit/>
+          </a:bodyPr>
+          <a:lstStyle/>
+          <a:p>
+            <a:pPr algn="r"/>
+            <a:r>
+              <a:rPr sz="1000" b="0">
+                <a:solidFill>
+                  <a:srgbClr val="1A1A1A"/>
+                </a:solidFill>
+                <a:latin typeface="Calibri"/>
+              </a:rPr>
+              <a:t>—</a:t>
+            </a:r>
+          </a:p>
+        </p:txBody>
+      </p:sp>
+      <p:sp>
+        <p:nvSpPr>
+          <p:cNvPr id="33" name="TextBox 32"/>
+          <p:cNvSpPr txBox="1"/>
+          <p:nvPr/>
+        </p:nvSpPr>
+        <p:spPr>
+          <a:xfrm>
+            <a:off x="411480" y="4919472"/>
+            <a:ext cx="1965960" cy="274320"/>
+          </a:xfrm>
+          <a:prstGeom prst="rect">
+            <a:avLst/>
+          </a:prstGeom>
+          <a:noFill/>
+        </p:spPr>
+        <p:txBody>
+          <a:bodyPr wrap="square" lIns="0" rIns="0" tIns="0" bIns="0" anchor="t">
+            <a:spAutoFit/>
+          </a:bodyPr>
+          <a:lstStyle/>
+          <a:p>
+            <a:pPr algn="l"/>
+            <a:r>
+              <a:rPr sz="1000" b="0">
+                <a:solidFill>
+                  <a:srgbClr val="1A1A1A"/>
+                </a:solidFill>
+                <a:latin typeface="Calibri"/>
+              </a:rPr>
+              <a:t>Net Income (SARB)</a:t>
+            </a:r>
+          </a:p>
+        </p:txBody>
+      </p:sp>
+      <p:sp>
+        <p:nvSpPr>
+          <p:cNvPr id="34" name="TextBox 33"/>
+          <p:cNvSpPr txBox="1"/>
+          <p:nvPr/>
+        </p:nvSpPr>
+        <p:spPr>
+          <a:xfrm>
+            <a:off x="2423160" y="4919472"/>
             <a:ext cx="960120" cy="274320"/>
           </a:xfrm>
           <a:prstGeom prst="rect">
@@ -7655,21 +7789,21 @@
                 </a:solidFill>
                 <a:latin typeface="Calibri"/>
               </a:rPr>
-              <a:t>460.0B</a:t>
-            </a:r>
-          </a:p>
-        </p:txBody>
-      </p:sp>
-      <p:sp>
-        <p:nvSpPr>
-          <p:cNvPr id="31" name="TextBox 30"/>
-          <p:cNvSpPr txBox="1"/>
-          <p:nvPr/>
-        </p:nvSpPr>
-        <p:spPr>
-          <a:xfrm>
-            <a:off x="4617720" y="4645152"/>
-            <a:ext cx="960120" cy="274320"/>
+              <a:t>—</a:t>
+            </a:r>
+          </a:p>
+        </p:txBody>
+      </p:sp>
+      <p:sp>
+        <p:nvSpPr>
+          <p:cNvPr id="35" name="TextBox 34"/>
+          <p:cNvSpPr txBox="1"/>
+          <p:nvPr/>
+        </p:nvSpPr>
+        <p:spPr>
+          <a:xfrm>
+            <a:off x="3429000" y="4919472"/>
+            <a:ext cx="868680" cy="274320"/>
           </a:xfrm>
           <a:prstGeom prst="rect">
             <a:avLst/>
@@ -7697,14 +7831,14 @@
       </p:sp>
       <p:sp>
         <p:nvSpPr>
-          <p:cNvPr id="32" name="TextBox 31"/>
-          <p:cNvSpPr txBox="1"/>
-          <p:nvPr/>
-        </p:nvSpPr>
-        <p:spPr>
-          <a:xfrm>
-            <a:off x="5623560" y="4645152"/>
-            <a:ext cx="777240" cy="274320"/>
+          <p:cNvPr id="36" name="TextBox 35"/>
+          <p:cNvSpPr txBox="1"/>
+          <p:nvPr/>
+        </p:nvSpPr>
+        <p:spPr>
+          <a:xfrm>
+            <a:off x="4343400" y="4919472"/>
+            <a:ext cx="868680" cy="274320"/>
           </a:xfrm>
           <a:prstGeom prst="rect">
             <a:avLst/>
@@ -7732,154 +7866,14 @@
       </p:sp>
       <p:sp>
         <p:nvSpPr>
-          <p:cNvPr id="33" name="TextBox 32"/>
-          <p:cNvSpPr txBox="1"/>
-          <p:nvPr/>
-        </p:nvSpPr>
-        <p:spPr>
-          <a:xfrm>
-            <a:off x="411480" y="4919472"/>
-            <a:ext cx="2148840" cy="274320"/>
-          </a:xfrm>
-          <a:prstGeom prst="rect">
-            <a:avLst/>
-          </a:prstGeom>
-          <a:noFill/>
-        </p:spPr>
-        <p:txBody>
-          <a:bodyPr wrap="square" lIns="0" rIns="0" tIns="0" bIns="0" anchor="t">
-            <a:spAutoFit/>
-          </a:bodyPr>
-          <a:lstStyle/>
-          <a:p>
-            <a:pPr algn="l"/>
-            <a:r>
-              <a:rPr sz="1000" b="0">
-                <a:solidFill>
-                  <a:srgbClr val="1A1A1A"/>
-                </a:solidFill>
-                <a:latin typeface="Calibri"/>
-              </a:rPr>
-              <a:t>EPS — FY2026</a:t>
-            </a:r>
-          </a:p>
-        </p:txBody>
-      </p:sp>
-      <p:sp>
-        <p:nvSpPr>
-          <p:cNvPr id="34" name="TextBox 33"/>
-          <p:cNvSpPr txBox="1"/>
-          <p:nvPr/>
-        </p:nvSpPr>
-        <p:spPr>
-          <a:xfrm>
-            <a:off x="2606040" y="4919472"/>
-            <a:ext cx="960120" cy="274320"/>
-          </a:xfrm>
-          <a:prstGeom prst="rect">
-            <a:avLst/>
-          </a:prstGeom>
-          <a:noFill/>
-        </p:spPr>
-        <p:txBody>
-          <a:bodyPr wrap="square" lIns="0" rIns="0" tIns="0" bIns="0" anchor="t">
-            <a:spAutoFit/>
-          </a:bodyPr>
-          <a:lstStyle/>
-          <a:p>
-            <a:pPr algn="r"/>
-            <a:r>
-              <a:rPr sz="1000" b="0">
-                <a:solidFill>
-                  <a:srgbClr val="1A1A1A"/>
-                </a:solidFill>
-                <a:latin typeface="Calibri"/>
-              </a:rPr>
-              <a:t>—</a:t>
-            </a:r>
-          </a:p>
-        </p:txBody>
-      </p:sp>
-      <p:sp>
-        <p:nvSpPr>
-          <p:cNvPr id="35" name="TextBox 34"/>
-          <p:cNvSpPr txBox="1"/>
-          <p:nvPr/>
-        </p:nvSpPr>
-        <p:spPr>
-          <a:xfrm>
-            <a:off x="3611880" y="4919472"/>
-            <a:ext cx="960120" cy="274320"/>
-          </a:xfrm>
-          <a:prstGeom prst="rect">
-            <a:avLst/>
-          </a:prstGeom>
-          <a:noFill/>
-        </p:spPr>
-        <p:txBody>
-          <a:bodyPr wrap="square" lIns="0" rIns="0" tIns="0" bIns="0" anchor="t">
-            <a:spAutoFit/>
-          </a:bodyPr>
-          <a:lstStyle/>
-          <a:p>
-            <a:pPr algn="r"/>
-            <a:r>
-              <a:rPr sz="1000" b="0">
-                <a:solidFill>
-                  <a:srgbClr val="1A1A1A"/>
-                </a:solidFill>
-                <a:latin typeface="Calibri"/>
-              </a:rPr>
-              <a:t>1.850</a:t>
-            </a:r>
-          </a:p>
-        </p:txBody>
-      </p:sp>
-      <p:sp>
-        <p:nvSpPr>
-          <p:cNvPr id="36" name="TextBox 35"/>
-          <p:cNvSpPr txBox="1"/>
-          <p:nvPr/>
-        </p:nvSpPr>
-        <p:spPr>
-          <a:xfrm>
-            <a:off x="4617720" y="4919472"/>
-            <a:ext cx="960120" cy="274320"/>
-          </a:xfrm>
-          <a:prstGeom prst="rect">
-            <a:avLst/>
-          </a:prstGeom>
-          <a:noFill/>
-        </p:spPr>
-        <p:txBody>
-          <a:bodyPr wrap="square" lIns="0" rIns="0" tIns="0" bIns="0" anchor="t">
-            <a:spAutoFit/>
-          </a:bodyPr>
-          <a:lstStyle/>
-          <a:p>
-            <a:pPr algn="r"/>
-            <a:r>
-              <a:rPr sz="1000" b="0">
-                <a:solidFill>
-                  <a:srgbClr val="1A1A1A"/>
-                </a:solidFill>
-                <a:latin typeface="Calibri"/>
-              </a:rPr>
-              <a:t>—</a:t>
-            </a:r>
-          </a:p>
-        </p:txBody>
-      </p:sp>
-      <p:sp>
-        <p:nvSpPr>
           <p:cNvPr id="37" name="TextBox 36"/>
           <p:cNvSpPr txBox="1"/>
           <p:nvPr/>
         </p:nvSpPr>
         <p:spPr>
           <a:xfrm>
-            <a:off x="5623560" y="4919472"/>
-            <a:ext cx="777240" cy="274320"/>
+            <a:off x="5257800" y="4919472"/>
+            <a:ext cx="1143000" cy="274320"/>
           </a:xfrm>
           <a:prstGeom prst="rect">
             <a:avLst/>
@@ -7957,7 +7951,7 @@
         <p:spPr>
           <a:xfrm>
             <a:off x="411480" y="5193792"/>
-            <a:ext cx="2148840" cy="274320"/>
+            <a:ext cx="1965960" cy="274320"/>
           </a:xfrm>
           <a:prstGeom prst="rect">
             <a:avLst/>
@@ -7978,7 +7972,7 @@
                 </a:solidFill>
                 <a:latin typeface="Calibri"/>
               </a:rPr>
-              <a:t>Revenue — FY2026</a:t>
+              <a:t>EPS (SAR)</a:t>
             </a:r>
           </a:p>
         </p:txBody>
@@ -7991,7 +7985,7 @@
         </p:nvSpPr>
         <p:spPr>
           <a:xfrm>
-            <a:off x="2606040" y="5193792"/>
+            <a:off x="2423160" y="5193792"/>
             <a:ext cx="960120" cy="274320"/>
           </a:xfrm>
           <a:prstGeom prst="rect">
@@ -8026,7 +8020,147 @@
         </p:nvSpPr>
         <p:spPr>
           <a:xfrm>
-            <a:off x="3611880" y="5193792"/>
+            <a:off x="3429000" y="5193792"/>
+            <a:ext cx="868680" cy="274320"/>
+          </a:xfrm>
+          <a:prstGeom prst="rect">
+            <a:avLst/>
+          </a:prstGeom>
+          <a:noFill/>
+        </p:spPr>
+        <p:txBody>
+          <a:bodyPr wrap="square" lIns="0" rIns="0" tIns="0" bIns="0" anchor="t">
+            <a:spAutoFit/>
+          </a:bodyPr>
+          <a:lstStyle/>
+          <a:p>
+            <a:pPr algn="r"/>
+            <a:r>
+              <a:rPr sz="1000" b="0">
+                <a:solidFill>
+                  <a:srgbClr val="2F7D4F"/>
+                </a:solidFill>
+                <a:latin typeface="Calibri"/>
+              </a:rPr>
+              <a:t>+52.0%</a:t>
+            </a:r>
+          </a:p>
+        </p:txBody>
+      </p:sp>
+      <p:sp>
+        <p:nvSpPr>
+          <p:cNvPr id="42" name="TextBox 41"/>
+          <p:cNvSpPr txBox="1"/>
+          <p:nvPr/>
+        </p:nvSpPr>
+        <p:spPr>
+          <a:xfrm>
+            <a:off x="4343400" y="5193792"/>
+            <a:ext cx="868680" cy="274320"/>
+          </a:xfrm>
+          <a:prstGeom prst="rect">
+            <a:avLst/>
+          </a:prstGeom>
+          <a:noFill/>
+        </p:spPr>
+        <p:txBody>
+          <a:bodyPr wrap="square" lIns="0" rIns="0" tIns="0" bIns="0" anchor="t">
+            <a:spAutoFit/>
+          </a:bodyPr>
+          <a:lstStyle/>
+          <a:p>
+            <a:pPr algn="r"/>
+            <a:r>
+              <a:rPr sz="1000" b="0">
+                <a:solidFill>
+                  <a:srgbClr val="1A1A1A"/>
+                </a:solidFill>
+                <a:latin typeface="Calibri"/>
+              </a:rPr>
+              <a:t>—</a:t>
+            </a:r>
+          </a:p>
+        </p:txBody>
+      </p:sp>
+      <p:sp>
+        <p:nvSpPr>
+          <p:cNvPr id="43" name="TextBox 42"/>
+          <p:cNvSpPr txBox="1"/>
+          <p:nvPr/>
+        </p:nvSpPr>
+        <p:spPr>
+          <a:xfrm>
+            <a:off x="5257800" y="5193792"/>
+            <a:ext cx="1143000" cy="274320"/>
+          </a:xfrm>
+          <a:prstGeom prst="rect">
+            <a:avLst/>
+          </a:prstGeom>
+          <a:noFill/>
+        </p:spPr>
+        <p:txBody>
+          <a:bodyPr wrap="square" lIns="0" rIns="0" tIns="0" bIns="0" anchor="t">
+            <a:spAutoFit/>
+          </a:bodyPr>
+          <a:lstStyle/>
+          <a:p>
+            <a:pPr algn="r"/>
+            <a:r>
+              <a:rPr sz="1000" b="0">
+                <a:solidFill>
+                  <a:srgbClr val="1A1A1A"/>
+                </a:solidFill>
+                <a:latin typeface="Calibri"/>
+              </a:rPr>
+              <a:t>0.53</a:t>
+            </a:r>
+          </a:p>
+        </p:txBody>
+      </p:sp>
+      <p:sp>
+        <p:nvSpPr>
+          <p:cNvPr id="44" name="TextBox 43"/>
+          <p:cNvSpPr txBox="1"/>
+          <p:nvPr/>
+        </p:nvSpPr>
+        <p:spPr>
+          <a:xfrm>
+            <a:off x="411480" y="5468112"/>
+            <a:ext cx="1965960" cy="274320"/>
+          </a:xfrm>
+          <a:prstGeom prst="rect">
+            <a:avLst/>
+          </a:prstGeom>
+          <a:noFill/>
+        </p:spPr>
+        <p:txBody>
+          <a:bodyPr wrap="square" lIns="0" rIns="0" tIns="0" bIns="0" anchor="t">
+            <a:spAutoFit/>
+          </a:bodyPr>
+          <a:lstStyle/>
+          <a:p>
+            <a:pPr algn="l"/>
+            <a:r>
+              <a:rPr sz="1000" b="0">
+                <a:solidFill>
+                  <a:srgbClr val="1A1A1A"/>
+                </a:solidFill>
+                <a:latin typeface="Calibri"/>
+              </a:rPr>
+              <a:t>EBITDA Margin</a:t>
+            </a:r>
+          </a:p>
+        </p:txBody>
+      </p:sp>
+      <p:sp>
+        <p:nvSpPr>
+          <p:cNvPr id="45" name="TextBox 44"/>
+          <p:cNvSpPr txBox="1"/>
+          <p:nvPr/>
+        </p:nvSpPr>
+        <p:spPr>
+          <a:xfrm>
+            <a:off x="2423160" y="5468112"/>
             <a:ext cx="960120" cy="274320"/>
           </a:xfrm>
           <a:prstGeom prst="rect">
@@ -8048,21 +8182,21 @@
                 </a:solidFill>
                 <a:latin typeface="Calibri"/>
               </a:rPr>
-              <a:t>1.82T</a:t>
-            </a:r>
-          </a:p>
-        </p:txBody>
-      </p:sp>
-      <p:sp>
-        <p:nvSpPr>
-          <p:cNvPr id="42" name="TextBox 41"/>
-          <p:cNvSpPr txBox="1"/>
-          <p:nvPr/>
-        </p:nvSpPr>
-        <p:spPr>
-          <a:xfrm>
-            <a:off x="4617720" y="5193792"/>
-            <a:ext cx="960120" cy="274320"/>
+              <a:t>—</a:t>
+            </a:r>
+          </a:p>
+        </p:txBody>
+      </p:sp>
+      <p:sp>
+        <p:nvSpPr>
+          <p:cNvPr id="46" name="TextBox 45"/>
+          <p:cNvSpPr txBox="1"/>
+          <p:nvPr/>
+        </p:nvSpPr>
+        <p:spPr>
+          <a:xfrm>
+            <a:off x="3429000" y="5468112"/>
+            <a:ext cx="868680" cy="274320"/>
           </a:xfrm>
           <a:prstGeom prst="rect">
             <a:avLst/>
@@ -8090,14 +8224,14 @@
       </p:sp>
       <p:sp>
         <p:nvSpPr>
-          <p:cNvPr id="43" name="TextBox 42"/>
-          <p:cNvSpPr txBox="1"/>
-          <p:nvPr/>
-        </p:nvSpPr>
-        <p:spPr>
-          <a:xfrm>
-            <a:off x="5623560" y="5193792"/>
-            <a:ext cx="777240" cy="274320"/>
+          <p:cNvPr id="47" name="TextBox 46"/>
+          <p:cNvSpPr txBox="1"/>
+          <p:nvPr/>
+        </p:nvSpPr>
+        <p:spPr>
+          <a:xfrm>
+            <a:off x="4343400" y="5468112"/>
+            <a:ext cx="868680" cy="274320"/>
           </a:xfrm>
           <a:prstGeom prst="rect">
             <a:avLst/>
@@ -8125,27 +8259,27 @@
       </p:sp>
       <p:sp>
         <p:nvSpPr>
-          <p:cNvPr id="44" name="TextBox 43"/>
-          <p:cNvSpPr txBox="1"/>
-          <p:nvPr/>
-        </p:nvSpPr>
-        <p:spPr>
-          <a:xfrm>
-            <a:off x="411480" y="5468112"/>
-            <a:ext cx="2148840" cy="274320"/>
-          </a:xfrm>
-          <a:prstGeom prst="rect">
-            <a:avLst/>
-          </a:prstGeom>
-          <a:noFill/>
-        </p:spPr>
-        <p:txBody>
-          <a:bodyPr wrap="square" lIns="0" rIns="0" tIns="0" bIns="0" anchor="t">
-            <a:spAutoFit/>
-          </a:bodyPr>
-          <a:lstStyle/>
-          <a:p>
-            <a:pPr algn="l"/>
+          <p:cNvPr id="48" name="TextBox 47"/>
+          <p:cNvSpPr txBox="1"/>
+          <p:nvPr/>
+        </p:nvSpPr>
+        <p:spPr>
+          <a:xfrm>
+            <a:off x="5257800" y="5468112"/>
+            <a:ext cx="1143000" cy="274320"/>
+          </a:xfrm>
+          <a:prstGeom prst="rect">
+            <a:avLst/>
+          </a:prstGeom>
+          <a:noFill/>
+        </p:spPr>
+        <p:txBody>
+          <a:bodyPr wrap="square" lIns="0" rIns="0" tIns="0" bIns="0" anchor="t">
+            <a:spAutoFit/>
+          </a:bodyPr>
+          <a:lstStyle/>
+          <a:p>
+            <a:pPr algn="r"/>
             <a:r>
               <a:rPr sz="1000" b="0">
                 <a:solidFill>
@@ -8153,41 +8287,6 @@
                 </a:solidFill>
                 <a:latin typeface="Calibri"/>
               </a:rPr>
-              <a:t>EPS — FY2027</a:t>
-            </a:r>
-          </a:p>
-        </p:txBody>
-      </p:sp>
-      <p:sp>
-        <p:nvSpPr>
-          <p:cNvPr id="45" name="TextBox 44"/>
-          <p:cNvSpPr txBox="1"/>
-          <p:nvPr/>
-        </p:nvSpPr>
-        <p:spPr>
-          <a:xfrm>
-            <a:off x="2606040" y="5468112"/>
-            <a:ext cx="960120" cy="274320"/>
-          </a:xfrm>
-          <a:prstGeom prst="rect">
-            <a:avLst/>
-          </a:prstGeom>
-          <a:noFill/>
-        </p:spPr>
-        <p:txBody>
-          <a:bodyPr wrap="square" lIns="0" rIns="0" tIns="0" bIns="0" anchor="t">
-            <a:spAutoFit/>
-          </a:bodyPr>
-          <a:lstStyle/>
-          <a:p>
-            <a:pPr algn="r"/>
-            <a:r>
-              <a:rPr sz="1000" b="0">
-                <a:solidFill>
-                  <a:srgbClr val="1A1A1A"/>
-                </a:solidFill>
-                <a:latin typeface="Calibri"/>
-              </a:rPr>
               <a:t>—</a:t>
             </a:r>
           </a:p>
@@ -8195,505 +8294,7 @@
       </p:sp>
       <p:sp>
         <p:nvSpPr>
-          <p:cNvPr id="46" name="TextBox 45"/>
-          <p:cNvSpPr txBox="1"/>
-          <p:nvPr/>
-        </p:nvSpPr>
-        <p:spPr>
-          <a:xfrm>
-            <a:off x="3611880" y="5468112"/>
-            <a:ext cx="960120" cy="274320"/>
-          </a:xfrm>
-          <a:prstGeom prst="rect">
-            <a:avLst/>
-          </a:prstGeom>
-          <a:noFill/>
-        </p:spPr>
-        <p:txBody>
-          <a:bodyPr wrap="square" lIns="0" rIns="0" tIns="0" bIns="0" anchor="t">
-            <a:spAutoFit/>
-          </a:bodyPr>
-          <a:lstStyle/>
-          <a:p>
-            <a:pPr algn="r"/>
-            <a:r>
-              <a:rPr sz="1000" b="0">
-                <a:solidFill>
-                  <a:srgbClr val="1A1A1A"/>
-                </a:solidFill>
-                <a:latin typeface="Calibri"/>
-              </a:rPr>
-              <a:t>1.920</a:t>
-            </a:r>
-          </a:p>
-        </p:txBody>
-      </p:sp>
-      <p:sp>
-        <p:nvSpPr>
-          <p:cNvPr id="47" name="TextBox 46"/>
-          <p:cNvSpPr txBox="1"/>
-          <p:nvPr/>
-        </p:nvSpPr>
-        <p:spPr>
-          <a:xfrm>
-            <a:off x="4617720" y="5468112"/>
-            <a:ext cx="960120" cy="274320"/>
-          </a:xfrm>
-          <a:prstGeom prst="rect">
-            <a:avLst/>
-          </a:prstGeom>
-          <a:noFill/>
-        </p:spPr>
-        <p:txBody>
-          <a:bodyPr wrap="square" lIns="0" rIns="0" tIns="0" bIns="0" anchor="t">
-            <a:spAutoFit/>
-          </a:bodyPr>
-          <a:lstStyle/>
-          <a:p>
-            <a:pPr algn="r"/>
-            <a:r>
-              <a:rPr sz="1000" b="0">
-                <a:solidFill>
-                  <a:srgbClr val="1A1A1A"/>
-                </a:solidFill>
-                <a:latin typeface="Calibri"/>
-              </a:rPr>
-              <a:t>—</a:t>
-            </a:r>
-          </a:p>
-        </p:txBody>
-      </p:sp>
-      <p:sp>
-        <p:nvSpPr>
-          <p:cNvPr id="48" name="TextBox 47"/>
-          <p:cNvSpPr txBox="1"/>
-          <p:nvPr/>
-        </p:nvSpPr>
-        <p:spPr>
-          <a:xfrm>
-            <a:off x="5623560" y="5468112"/>
-            <a:ext cx="777240" cy="274320"/>
-          </a:xfrm>
-          <a:prstGeom prst="rect">
-            <a:avLst/>
-          </a:prstGeom>
-          <a:noFill/>
-        </p:spPr>
-        <p:txBody>
-          <a:bodyPr wrap="square" lIns="0" rIns="0" tIns="0" bIns="0" anchor="t">
-            <a:spAutoFit/>
-          </a:bodyPr>
-          <a:lstStyle/>
-          <a:p>
-            <a:pPr algn="r"/>
-            <a:r>
-              <a:rPr sz="1000" b="0">
-                <a:solidFill>
-                  <a:srgbClr val="1A1A1A"/>
-                </a:solidFill>
-                <a:latin typeface="Calibri"/>
-              </a:rPr>
-              <a:t>—</a:t>
-            </a:r>
-          </a:p>
-        </p:txBody>
-      </p:sp>
-      <p:sp>
-        <p:nvSpPr>
-          <p:cNvPr id="49" name="Rectangle 48"/>
-          <p:cNvSpPr/>
-          <p:nvPr/>
-        </p:nvSpPr>
-        <p:spPr>
-          <a:xfrm>
-            <a:off x="411480" y="5724144"/>
-            <a:ext cx="6035040" cy="274320"/>
-          </a:xfrm>
-          <a:prstGeom prst="rect">
-            <a:avLst/>
-          </a:prstGeom>
-          <a:solidFill>
-            <a:srgbClr val="EFE8DC"/>
-          </a:solidFill>
-          <a:ln>
-            <a:noFill/>
-          </a:ln>
-        </p:spPr>
-        <p:style>
-          <a:lnRef idx="1">
-            <a:schemeClr val="accent1"/>
-          </a:lnRef>
-          <a:fillRef idx="3">
-            <a:schemeClr val="accent1"/>
-          </a:fillRef>
-          <a:effectRef idx="2">
-            <a:schemeClr val="accent1"/>
-          </a:effectRef>
-          <a:fontRef idx="minor">
-            <a:schemeClr val="lt1"/>
-          </a:fontRef>
-        </p:style>
-        <p:txBody>
-          <a:bodyPr rtlCol="0" anchor="ctr"/>
-          <a:lstStyle/>
-          <a:p>
-            <a:pPr algn="ctr"/>
-          </a:p>
-        </p:txBody>
-      </p:sp>
-      <p:sp>
-        <p:nvSpPr>
-          <p:cNvPr id="50" name="TextBox 49"/>
-          <p:cNvSpPr txBox="1"/>
-          <p:nvPr/>
-        </p:nvSpPr>
-        <p:spPr>
-          <a:xfrm>
-            <a:off x="411480" y="5742432"/>
-            <a:ext cx="2148840" cy="274320"/>
-          </a:xfrm>
-          <a:prstGeom prst="rect">
-            <a:avLst/>
-          </a:prstGeom>
-          <a:noFill/>
-        </p:spPr>
-        <p:txBody>
-          <a:bodyPr wrap="square" lIns="0" rIns="0" tIns="0" bIns="0" anchor="t">
-            <a:spAutoFit/>
-          </a:bodyPr>
-          <a:lstStyle/>
-          <a:p>
-            <a:pPr algn="l"/>
-            <a:r>
-              <a:rPr sz="1000" b="0">
-                <a:solidFill>
-                  <a:srgbClr val="1A1A1A"/>
-                </a:solidFill>
-                <a:latin typeface="Calibri"/>
-              </a:rPr>
-              <a:t>Revenue — FY2027</a:t>
-            </a:r>
-          </a:p>
-        </p:txBody>
-      </p:sp>
-      <p:sp>
-        <p:nvSpPr>
-          <p:cNvPr id="51" name="TextBox 50"/>
-          <p:cNvSpPr txBox="1"/>
-          <p:nvPr/>
-        </p:nvSpPr>
-        <p:spPr>
-          <a:xfrm>
-            <a:off x="2606040" y="5742432"/>
-            <a:ext cx="960120" cy="274320"/>
-          </a:xfrm>
-          <a:prstGeom prst="rect">
-            <a:avLst/>
-          </a:prstGeom>
-          <a:noFill/>
-        </p:spPr>
-        <p:txBody>
-          <a:bodyPr wrap="square" lIns="0" rIns="0" tIns="0" bIns="0" anchor="t">
-            <a:spAutoFit/>
-          </a:bodyPr>
-          <a:lstStyle/>
-          <a:p>
-            <a:pPr algn="r"/>
-            <a:r>
-              <a:rPr sz="1000" b="0">
-                <a:solidFill>
-                  <a:srgbClr val="1A1A1A"/>
-                </a:solidFill>
-                <a:latin typeface="Calibri"/>
-              </a:rPr>
-              <a:t>—</a:t>
-            </a:r>
-          </a:p>
-        </p:txBody>
-      </p:sp>
-      <p:sp>
-        <p:nvSpPr>
-          <p:cNvPr id="52" name="TextBox 51"/>
-          <p:cNvSpPr txBox="1"/>
-          <p:nvPr/>
-        </p:nvSpPr>
-        <p:spPr>
-          <a:xfrm>
-            <a:off x="3611880" y="5742432"/>
-            <a:ext cx="960120" cy="274320"/>
-          </a:xfrm>
-          <a:prstGeom prst="rect">
-            <a:avLst/>
-          </a:prstGeom>
-          <a:noFill/>
-        </p:spPr>
-        <p:txBody>
-          <a:bodyPr wrap="square" lIns="0" rIns="0" tIns="0" bIns="0" anchor="t">
-            <a:spAutoFit/>
-          </a:bodyPr>
-          <a:lstStyle/>
-          <a:p>
-            <a:pPr algn="r"/>
-            <a:r>
-              <a:rPr sz="1000" b="0">
-                <a:solidFill>
-                  <a:srgbClr val="1A1A1A"/>
-                </a:solidFill>
-                <a:latin typeface="Calibri"/>
-              </a:rPr>
-              <a:t>1.89T</a:t>
-            </a:r>
-          </a:p>
-        </p:txBody>
-      </p:sp>
-      <p:sp>
-        <p:nvSpPr>
-          <p:cNvPr id="53" name="TextBox 52"/>
-          <p:cNvSpPr txBox="1"/>
-          <p:nvPr/>
-        </p:nvSpPr>
-        <p:spPr>
-          <a:xfrm>
-            <a:off x="4617720" y="5742432"/>
-            <a:ext cx="960120" cy="274320"/>
-          </a:xfrm>
-          <a:prstGeom prst="rect">
-            <a:avLst/>
-          </a:prstGeom>
-          <a:noFill/>
-        </p:spPr>
-        <p:txBody>
-          <a:bodyPr wrap="square" lIns="0" rIns="0" tIns="0" bIns="0" anchor="t">
-            <a:spAutoFit/>
-          </a:bodyPr>
-          <a:lstStyle/>
-          <a:p>
-            <a:pPr algn="r"/>
-            <a:r>
-              <a:rPr sz="1000" b="0">
-                <a:solidFill>
-                  <a:srgbClr val="1A1A1A"/>
-                </a:solidFill>
-                <a:latin typeface="Calibri"/>
-              </a:rPr>
-              <a:t>—</a:t>
-            </a:r>
-          </a:p>
-        </p:txBody>
-      </p:sp>
-      <p:sp>
-        <p:nvSpPr>
-          <p:cNvPr id="54" name="TextBox 53"/>
-          <p:cNvSpPr txBox="1"/>
-          <p:nvPr/>
-        </p:nvSpPr>
-        <p:spPr>
-          <a:xfrm>
-            <a:off x="5623560" y="5742432"/>
-            <a:ext cx="777240" cy="274320"/>
-          </a:xfrm>
-          <a:prstGeom prst="rect">
-            <a:avLst/>
-          </a:prstGeom>
-          <a:noFill/>
-        </p:spPr>
-        <p:txBody>
-          <a:bodyPr wrap="square" lIns="0" rIns="0" tIns="0" bIns="0" anchor="t">
-            <a:spAutoFit/>
-          </a:bodyPr>
-          <a:lstStyle/>
-          <a:p>
-            <a:pPr algn="r"/>
-            <a:r>
-              <a:rPr sz="1000" b="0">
-                <a:solidFill>
-                  <a:srgbClr val="1A1A1A"/>
-                </a:solidFill>
-                <a:latin typeface="Calibri"/>
-              </a:rPr>
-              <a:t>—</a:t>
-            </a:r>
-          </a:p>
-        </p:txBody>
-      </p:sp>
-      <p:sp>
-        <p:nvSpPr>
-          <p:cNvPr id="55" name="TextBox 54"/>
-          <p:cNvSpPr txBox="1"/>
-          <p:nvPr/>
-        </p:nvSpPr>
-        <p:spPr>
-          <a:xfrm>
-            <a:off x="411480" y="6016752"/>
-            <a:ext cx="2148840" cy="274320"/>
-          </a:xfrm>
-          <a:prstGeom prst="rect">
-            <a:avLst/>
-          </a:prstGeom>
-          <a:noFill/>
-        </p:spPr>
-        <p:txBody>
-          <a:bodyPr wrap="square" lIns="0" rIns="0" tIns="0" bIns="0" anchor="t">
-            <a:spAutoFit/>
-          </a:bodyPr>
-          <a:lstStyle/>
-          <a:p>
-            <a:pPr algn="l"/>
-            <a:r>
-              <a:rPr sz="1000" b="0">
-                <a:solidFill>
-                  <a:srgbClr val="1A1A1A"/>
-                </a:solidFill>
-                <a:latin typeface="Calibri"/>
-              </a:rPr>
-              <a:t>Dividend yield (TTM)</a:t>
-            </a:r>
-          </a:p>
-        </p:txBody>
-      </p:sp>
-      <p:sp>
-        <p:nvSpPr>
-          <p:cNvPr id="56" name="TextBox 55"/>
-          <p:cNvSpPr txBox="1"/>
-          <p:nvPr/>
-        </p:nvSpPr>
-        <p:spPr>
-          <a:xfrm>
-            <a:off x="2606040" y="6016752"/>
-            <a:ext cx="960120" cy="274320"/>
-          </a:xfrm>
-          <a:prstGeom prst="rect">
-            <a:avLst/>
-          </a:prstGeom>
-          <a:noFill/>
-        </p:spPr>
-        <p:txBody>
-          <a:bodyPr wrap="square" lIns="0" rIns="0" tIns="0" bIns="0" anchor="t">
-            <a:spAutoFit/>
-          </a:bodyPr>
-          <a:lstStyle/>
-          <a:p>
-            <a:pPr algn="r"/>
-            <a:r>
-              <a:rPr sz="1000" b="0">
-                <a:solidFill>
-                  <a:srgbClr val="1A1A1A"/>
-                </a:solidFill>
-                <a:latin typeface="Calibri"/>
-              </a:rPr>
-              <a:t>—</a:t>
-            </a:r>
-          </a:p>
-        </p:txBody>
-      </p:sp>
-      <p:sp>
-        <p:nvSpPr>
-          <p:cNvPr id="57" name="TextBox 56"/>
-          <p:cNvSpPr txBox="1"/>
-          <p:nvPr/>
-        </p:nvSpPr>
-        <p:spPr>
-          <a:xfrm>
-            <a:off x="3611880" y="6016752"/>
-            <a:ext cx="960120" cy="274320"/>
-          </a:xfrm>
-          <a:prstGeom prst="rect">
-            <a:avLst/>
-          </a:prstGeom>
-          <a:noFill/>
-        </p:spPr>
-        <p:txBody>
-          <a:bodyPr wrap="square" lIns="0" rIns="0" tIns="0" bIns="0" anchor="t">
-            <a:spAutoFit/>
-          </a:bodyPr>
-          <a:lstStyle/>
-          <a:p>
-            <a:pPr algn="r"/>
-            <a:r>
-              <a:rPr sz="1000" b="0">
-                <a:solidFill>
-                  <a:srgbClr val="1A1A1A"/>
-                </a:solidFill>
-                <a:latin typeface="Calibri"/>
-              </a:rPr>
-              <a:t>5.63%</a:t>
-            </a:r>
-          </a:p>
-        </p:txBody>
-      </p:sp>
-      <p:sp>
-        <p:nvSpPr>
-          <p:cNvPr id="58" name="TextBox 57"/>
-          <p:cNvSpPr txBox="1"/>
-          <p:nvPr/>
-        </p:nvSpPr>
-        <p:spPr>
-          <a:xfrm>
-            <a:off x="4617720" y="6016752"/>
-            <a:ext cx="960120" cy="274320"/>
-          </a:xfrm>
-          <a:prstGeom prst="rect">
-            <a:avLst/>
-          </a:prstGeom>
-          <a:noFill/>
-        </p:spPr>
-        <p:txBody>
-          <a:bodyPr wrap="square" lIns="0" rIns="0" tIns="0" bIns="0" anchor="t">
-            <a:spAutoFit/>
-          </a:bodyPr>
-          <a:lstStyle/>
-          <a:p>
-            <a:pPr algn="r"/>
-            <a:r>
-              <a:rPr sz="1000" b="0">
-                <a:solidFill>
-                  <a:srgbClr val="1A1A1A"/>
-                </a:solidFill>
-                <a:latin typeface="Calibri"/>
-              </a:rPr>
-              <a:t>—</a:t>
-            </a:r>
-          </a:p>
-        </p:txBody>
-      </p:sp>
-      <p:sp>
-        <p:nvSpPr>
-          <p:cNvPr id="59" name="TextBox 58"/>
-          <p:cNvSpPr txBox="1"/>
-          <p:nvPr/>
-        </p:nvSpPr>
-        <p:spPr>
-          <a:xfrm>
-            <a:off x="5623560" y="6016752"/>
-            <a:ext cx="777240" cy="274320"/>
-          </a:xfrm>
-          <a:prstGeom prst="rect">
-            <a:avLst/>
-          </a:prstGeom>
-          <a:noFill/>
-        </p:spPr>
-        <p:txBody>
-          <a:bodyPr wrap="square" lIns="0" rIns="0" tIns="0" bIns="0" anchor="t">
-            <a:spAutoFit/>
-          </a:bodyPr>
-          <a:lstStyle/>
-          <a:p>
-            <a:pPr algn="r"/>
-            <a:r>
-              <a:rPr sz="1000" b="0">
-                <a:solidFill>
-                  <a:srgbClr val="1A1A1A"/>
-                </a:solidFill>
-                <a:latin typeface="Calibri"/>
-              </a:rPr>
-              <a:t>—</a:t>
-            </a:r>
-          </a:p>
-        </p:txBody>
-      </p:sp>
-      <p:sp>
-        <p:nvSpPr>
-          <p:cNvPr id="60" name="TextBox 59"/>
+          <p:cNvPr id="49" name="TextBox 48"/>
           <p:cNvSpPr txBox="1"/>
           <p:nvPr/>
         </p:nvSpPr>
@@ -8721,14 +8322,14 @@
                 </a:solidFill>
                 <a:latin typeface="Calibri"/>
               </a:rPr>
-              <a:t>Consensus: Bloomberg  ·  18 analysts covering</a:t>
-            </a:r>
-          </a:p>
-        </p:txBody>
-      </p:sp>
-      <p:sp>
-        <p:nvSpPr>
-          <p:cNvPr id="61" name="Rectangle 60"/>
+              <a:t>Estimates: Jabal Research  ·  Consensus: Investing (18 analysts)  ·  Bps = basis points</a:t>
+            </a:r>
+          </a:p>
+        </p:txBody>
+      </p:sp>
+      <p:sp>
+        <p:nvSpPr>
+          <p:cNvPr id="50" name="Rectangle 49"/>
           <p:cNvSpPr/>
           <p:nvPr/>
         </p:nvSpPr>
@@ -8774,7 +8375,7 @@
       </p:sp>
       <p:sp>
         <p:nvSpPr>
-          <p:cNvPr id="62" name="Rectangle 61"/>
+          <p:cNvPr id="51" name="Rectangle 50"/>
           <p:cNvSpPr/>
           <p:nvPr/>
         </p:nvSpPr>
@@ -8818,7 +8419,7 @@
       </p:sp>
       <p:sp>
         <p:nvSpPr>
-          <p:cNvPr id="63" name="TextBox 62"/>
+          <p:cNvPr id="52" name="TextBox 51"/>
           <p:cNvSpPr txBox="1"/>
           <p:nvPr/>
         </p:nvSpPr>
@@ -8853,7 +8454,7 @@
       </p:sp>
       <p:sp>
         <p:nvSpPr>
-          <p:cNvPr id="64" name="Oval 63"/>
+          <p:cNvPr id="53" name="Oval 52"/>
           <p:cNvSpPr/>
           <p:nvPr/>
         </p:nvSpPr>
@@ -8896,7 +8497,7 @@
       </p:sp>
       <p:sp>
         <p:nvSpPr>
-          <p:cNvPr id="65" name="TextBox 64"/>
+          <p:cNvPr id="54" name="TextBox 53"/>
           <p:cNvSpPr txBox="1"/>
           <p:nvPr/>
         </p:nvSpPr>
@@ -8924,14 +8525,14 @@
                 </a:solidFill>
                 <a:latin typeface="Calibri"/>
               </a:rPr>
-              <a:t>EPS beat consensus by 29.8% last quarter; 1 of last 4 quarters above estimates</a:t>
-            </a:r>
-          </a:p>
-        </p:txBody>
-      </p:sp>
-      <p:sp>
-        <p:nvSpPr>
-          <p:cNvPr id="66" name="Oval 65"/>
+              <a:t>EPS missed consensus by 0.0% last quarter; 1 of last 4 quarters above estimates</a:t>
+            </a:r>
+          </a:p>
+        </p:txBody>
+      </p:sp>
+      <p:sp>
+        <p:nvSpPr>
+          <p:cNvPr id="55" name="Oval 54"/>
           <p:cNvSpPr/>
           <p:nvPr/>
         </p:nvSpPr>
@@ -8974,7 +8575,7 @@
       </p:sp>
       <p:sp>
         <p:nvSpPr>
-          <p:cNvPr id="67" name="TextBox 66"/>
+          <p:cNvPr id="56" name="TextBox 55"/>
           <p:cNvSpPr txBox="1"/>
           <p:nvPr/>
         </p:nvSpPr>
@@ -9009,7 +8610,7 @@
       </p:sp>
       <p:sp>
         <p:nvSpPr>
-          <p:cNvPr id="68" name="Oval 67"/>
+          <p:cNvPr id="57" name="Oval 56"/>
           <p:cNvSpPr/>
           <p:nvPr/>
         </p:nvSpPr>
@@ -9052,7 +8653,7 @@
       </p:sp>
       <p:sp>
         <p:nvSpPr>
-          <p:cNvPr id="69" name="TextBox 68"/>
+          <p:cNvPr id="58" name="TextBox 57"/>
           <p:cNvSpPr txBox="1"/>
           <p:nvPr/>
         </p:nvSpPr>
@@ -9087,7 +8688,7 @@
       </p:sp>
       <p:sp>
         <p:nvSpPr>
-          <p:cNvPr id="70" name="Rectangle 69"/>
+          <p:cNvPr id="59" name="Rectangle 58"/>
           <p:cNvSpPr/>
           <p:nvPr/>
         </p:nvSpPr>
@@ -9133,7 +8734,7 @@
       </p:sp>
       <p:sp>
         <p:nvSpPr>
-          <p:cNvPr id="71" name="Rectangle 70"/>
+          <p:cNvPr id="60" name="Rectangle 59"/>
           <p:cNvSpPr/>
           <p:nvPr/>
         </p:nvSpPr>
@@ -9177,7 +8778,7 @@
       </p:sp>
       <p:sp>
         <p:nvSpPr>
-          <p:cNvPr id="72" name="TextBox 71"/>
+          <p:cNvPr id="61" name="TextBox 60"/>
           <p:cNvSpPr txBox="1"/>
           <p:nvPr/>
         </p:nvSpPr>
@@ -9212,7 +8813,7 @@
       </p:sp>
       <p:sp>
         <p:nvSpPr>
-          <p:cNvPr id="73" name="Oval 72"/>
+          <p:cNvPr id="62" name="Oval 61"/>
           <p:cNvSpPr/>
           <p:nvPr/>
         </p:nvSpPr>
@@ -9255,7 +8856,7 @@
       </p:sp>
       <p:sp>
         <p:nvSpPr>
-          <p:cNvPr id="74" name="TextBox 73"/>
+          <p:cNvPr id="63" name="TextBox 62"/>
           <p:cNvSpPr txBox="1"/>
           <p:nvPr/>
         </p:nvSpPr>
@@ -9290,7 +8891,7 @@
       </p:sp>
       <p:sp>
         <p:nvSpPr>
-          <p:cNvPr id="75" name="Oval 74"/>
+          <p:cNvPr id="64" name="Oval 63"/>
           <p:cNvSpPr/>
           <p:nvPr/>
         </p:nvSpPr>
@@ -9333,7 +8934,7 @@
       </p:sp>
       <p:sp>
         <p:nvSpPr>
-          <p:cNvPr id="76" name="TextBox 75"/>
+          <p:cNvPr id="65" name="TextBox 64"/>
           <p:cNvSpPr txBox="1"/>
           <p:nvPr/>
         </p:nvSpPr>
@@ -9368,7 +8969,7 @@
       </p:sp>
       <p:sp>
         <p:nvSpPr>
-          <p:cNvPr id="77" name="Oval 76"/>
+          <p:cNvPr id="66" name="Oval 65"/>
           <p:cNvSpPr/>
           <p:nvPr/>
         </p:nvSpPr>
@@ -9411,7 +9012,7 @@
       </p:sp>
       <p:sp>
         <p:nvSpPr>
-          <p:cNvPr id="78" name="TextBox 77"/>
+          <p:cNvPr id="67" name="TextBox 66"/>
           <p:cNvSpPr txBox="1"/>
           <p:nvPr/>
         </p:nvSpPr>
@@ -9446,7 +9047,7 @@
       </p:sp>
       <p:sp>
         <p:nvSpPr>
-          <p:cNvPr id="79" name="Rectangle 78"/>
+          <p:cNvPr id="68" name="Rectangle 67"/>
           <p:cNvSpPr/>
           <p:nvPr/>
         </p:nvSpPr>
@@ -9490,7 +9091,7 @@
       </p:sp>
       <p:sp>
         <p:nvSpPr>
-          <p:cNvPr id="80" name="TextBox 79"/>
+          <p:cNvPr id="69" name="TextBox 68"/>
           <p:cNvSpPr txBox="1"/>
           <p:nvPr/>
         </p:nvSpPr>
@@ -9525,7 +9126,7 @@
       </p:sp>
       <p:sp>
         <p:nvSpPr>
-          <p:cNvPr id="81" name="TextBox 80"/>
+          <p:cNvPr id="70" name="TextBox 69"/>
           <p:cNvSpPr txBox="1"/>
           <p:nvPr/>
         </p:nvSpPr>
@@ -9560,7 +9161,7 @@
       </p:sp>
       <p:sp>
         <p:nvSpPr>
-          <p:cNvPr id="82" name="TextBox 81"/>
+          <p:cNvPr id="71" name="TextBox 70"/>
           <p:cNvSpPr txBox="1"/>
           <p:nvPr/>
         </p:nvSpPr>
@@ -9595,7 +9196,7 @@
       </p:sp>
       <p:sp>
         <p:nvSpPr>
-          <p:cNvPr id="83" name="TextBox 82"/>
+          <p:cNvPr id="72" name="TextBox 71"/>
           <p:cNvSpPr txBox="1"/>
           <p:nvPr/>
         </p:nvSpPr>
@@ -9630,7 +9231,7 @@
       </p:sp>
       <p:sp>
         <p:nvSpPr>
-          <p:cNvPr id="84" name="TextBox 83"/>
+          <p:cNvPr id="73" name="TextBox 72"/>
           <p:cNvSpPr txBox="1"/>
           <p:nvPr/>
         </p:nvSpPr>
@@ -9665,7 +9266,7 @@
       </p:sp>
       <p:sp>
         <p:nvSpPr>
-          <p:cNvPr id="85" name="TextBox 84"/>
+          <p:cNvPr id="74" name="TextBox 73"/>
           <p:cNvSpPr txBox="1"/>
           <p:nvPr/>
         </p:nvSpPr>
@@ -9700,7 +9301,7 @@
       </p:sp>
       <p:sp>
         <p:nvSpPr>
-          <p:cNvPr id="86" name="TextBox 85"/>
+          <p:cNvPr id="75" name="TextBox 74"/>
           <p:cNvSpPr txBox="1"/>
           <p:nvPr/>
         </p:nvSpPr>
@@ -9735,7 +9336,7 @@
       </p:sp>
       <p:sp>
         <p:nvSpPr>
-          <p:cNvPr id="87" name="Rectangle 86"/>
+          <p:cNvPr id="76" name="Rectangle 75"/>
           <p:cNvSpPr/>
           <p:nvPr/>
         </p:nvSpPr>
@@ -9779,7 +9380,7 @@
       </p:sp>
       <p:sp>
         <p:nvSpPr>
-          <p:cNvPr id="88" name="TextBox 87"/>
+          <p:cNvPr id="77" name="TextBox 76"/>
           <p:cNvSpPr txBox="1"/>
           <p:nvPr/>
         </p:nvSpPr>
@@ -9807,14 +9408,14 @@
                 </a:solidFill>
                 <a:latin typeface="Calibri"/>
               </a:rPr>
-              <a:t>Source: bloomberg, investing, marketscreener, yahoo  |  Generated 15 May 2026  |  Analyst: Jabal Research</a:t>
-            </a:r>
-          </a:p>
-        </p:txBody>
-      </p:sp>
-      <p:sp>
-        <p:nvSpPr>
-          <p:cNvPr id="89" name="TextBox 88"/>
+              <a:t>Source: Investing.com, Yahoo Finance, MarketScreener, World Bank / IMF, iShares, World Bank / OPEC / EIA  |  Generated 17 May 2026  |  Analyst: Jabal Research</a:t>
+            </a:r>
+          </a:p>
+        </p:txBody>
+      </p:sp>
+      <p:sp>
+        <p:nvSpPr>
+          <p:cNvPr id="78" name="TextBox 77"/>
           <p:cNvSpPr txBox="1"/>
           <p:nvPr/>
         </p:nvSpPr>
@@ -9849,7 +9450,7 @@
       </p:sp>
       <p:sp>
         <p:nvSpPr>
-          <p:cNvPr id="90" name="TextBox 89"/>
+          <p:cNvPr id="79" name="TextBox 78"/>
           <p:cNvSpPr txBox="1"/>
           <p:nvPr/>
         </p:nvSpPr>
@@ -9884,7 +9485,7 @@
       </p:sp>
       <p:sp>
         <p:nvSpPr>
-          <p:cNvPr id="91" name="TextBox 90"/>
+          <p:cNvPr id="80" name="TextBox 79"/>
           <p:cNvSpPr txBox="1"/>
           <p:nvPr/>
         </p:nvSpPr>
@@ -10351,7 +9952,7 @@
                 </a:solidFill>
                 <a:latin typeface="Calibri"/>
               </a:rPr>
-              <a:t>FY2021</a:t>
+              <a:t>FY2026</a:t>
             </a:r>
           </a:p>
         </p:txBody>
@@ -10365,7 +9966,7 @@
         <p:spPr>
           <a:xfrm>
             <a:off x="4023360" y="2121408"/>
-            <a:ext cx="1775181" cy="73152"/>
+            <a:ext cx="1332411" cy="73152"/>
           </a:xfrm>
           <a:prstGeom prst="rect">
             <a:avLst/>
@@ -10407,7 +10008,7 @@
         </p:nvSpPr>
         <p:spPr>
           <a:xfrm>
-            <a:off x="5752821" y="2103120"/>
+            <a:off x="5310051" y="2103120"/>
             <a:ext cx="91440" cy="109728"/>
           </a:xfrm>
           <a:prstGeom prst="ellipse">
@@ -10450,7 +10051,7 @@
         </p:nvSpPr>
         <p:spPr>
           <a:xfrm>
-            <a:off x="5844261" y="2084831"/>
+            <a:off x="5401491" y="2084831"/>
             <a:ext cx="411480" cy="182880"/>
           </a:xfrm>
           <a:prstGeom prst="rect">
@@ -10472,7 +10073,7 @@
                 </a:solidFill>
                 <a:latin typeface="Calibri"/>
               </a:rPr>
-              <a:t>18.1x</a:t>
+              <a:t>13.7x</a:t>
             </a:r>
           </a:p>
         </p:txBody>
@@ -10485,8 +10086,8 @@
         </p:nvSpPr>
         <p:spPr>
           <a:xfrm>
-            <a:off x="3520440" y="2340863"/>
-            <a:ext cx="502920" cy="182880"/>
+            <a:off x="3886200" y="2377439"/>
+            <a:ext cx="365760" cy="164592"/>
           </a:xfrm>
           <a:prstGeom prst="rect">
             <a:avLst/>
@@ -10501,1223 +10102,131 @@
           <a:p>
             <a:pPr algn="l"/>
             <a:r>
-              <a:rPr sz="1000" b="0">
-                <a:solidFill>
-                  <a:srgbClr val="1A1A1A"/>
-                </a:solidFill>
-                <a:latin typeface="Calibri"/>
-              </a:rPr>
-              <a:t>FY2022</a:t>
-            </a:r>
-          </a:p>
-        </p:txBody>
-      </p:sp>
-      <p:sp>
-        <p:nvSpPr>
-          <p:cNvPr id="18" name="Rectangle 17"/>
+              <a:rPr sz="700" b="0">
+                <a:solidFill>
+                  <a:srgbClr val="9A9A9A"/>
+                </a:solidFill>
+                <a:latin typeface="Calibri"/>
+              </a:rPr>
+              <a:t>11x</a:t>
+            </a:r>
+          </a:p>
+        </p:txBody>
+      </p:sp>
+      <p:sp>
+        <p:nvSpPr>
+          <p:cNvPr id="18" name="TextBox 17"/>
+          <p:cNvSpPr txBox="1"/>
+          <p:nvPr/>
+        </p:nvSpPr>
+        <p:spPr>
+          <a:xfrm>
+            <a:off x="4663440" y="2377439"/>
+            <a:ext cx="365760" cy="164592"/>
+          </a:xfrm>
+          <a:prstGeom prst="rect">
+            <a:avLst/>
+          </a:prstGeom>
+          <a:noFill/>
+        </p:spPr>
+        <p:txBody>
+          <a:bodyPr wrap="square" lIns="0" rIns="0" tIns="0" bIns="0" anchor="t">
+            <a:spAutoFit/>
+          </a:bodyPr>
+          <a:lstStyle/>
+          <a:p>
+            <a:pPr algn="l"/>
+            <a:r>
+              <a:rPr sz="700" b="0">
+                <a:solidFill>
+                  <a:srgbClr val="9A9A9A"/>
+                </a:solidFill>
+                <a:latin typeface="Calibri"/>
+              </a:rPr>
+              <a:t>13x</a:t>
+            </a:r>
+          </a:p>
+        </p:txBody>
+      </p:sp>
+      <p:sp>
+        <p:nvSpPr>
+          <p:cNvPr id="19" name="TextBox 18"/>
+          <p:cNvSpPr txBox="1"/>
+          <p:nvPr/>
+        </p:nvSpPr>
+        <p:spPr>
+          <a:xfrm>
+            <a:off x="5440679" y="2377439"/>
+            <a:ext cx="365760" cy="164592"/>
+          </a:xfrm>
+          <a:prstGeom prst="rect">
+            <a:avLst/>
+          </a:prstGeom>
+          <a:noFill/>
+        </p:spPr>
+        <p:txBody>
+          <a:bodyPr wrap="square" lIns="0" rIns="0" tIns="0" bIns="0" anchor="t">
+            <a:spAutoFit/>
+          </a:bodyPr>
+          <a:lstStyle/>
+          <a:p>
+            <a:pPr algn="l"/>
+            <a:r>
+              <a:rPr sz="700" b="0">
+                <a:solidFill>
+                  <a:srgbClr val="9A9A9A"/>
+                </a:solidFill>
+                <a:latin typeface="Calibri"/>
+              </a:rPr>
+              <a:t>14x</a:t>
+            </a:r>
+          </a:p>
+        </p:txBody>
+      </p:sp>
+      <p:sp>
+        <p:nvSpPr>
+          <p:cNvPr id="20" name="TextBox 19"/>
+          <p:cNvSpPr txBox="1"/>
+          <p:nvPr/>
+        </p:nvSpPr>
+        <p:spPr>
+          <a:xfrm>
+            <a:off x="6217920" y="2377439"/>
+            <a:ext cx="365760" cy="164592"/>
+          </a:xfrm>
+          <a:prstGeom prst="rect">
+            <a:avLst/>
+          </a:prstGeom>
+          <a:noFill/>
+        </p:spPr>
+        <p:txBody>
+          <a:bodyPr wrap="square" lIns="0" rIns="0" tIns="0" bIns="0" anchor="t">
+            <a:spAutoFit/>
+          </a:bodyPr>
+          <a:lstStyle/>
+          <a:p>
+            <a:pPr algn="l"/>
+            <a:r>
+              <a:rPr sz="700" b="0">
+                <a:solidFill>
+                  <a:srgbClr val="9A9A9A"/>
+                </a:solidFill>
+                <a:latin typeface="Calibri"/>
+              </a:rPr>
+              <a:t>16x</a:t>
+            </a:r>
+          </a:p>
+        </p:txBody>
+      </p:sp>
+      <p:sp>
+        <p:nvSpPr>
+          <p:cNvPr id="21" name="Diamond 20"/>
           <p:cNvSpPr/>
           <p:nvPr/>
         </p:nvSpPr>
         <p:spPr>
           <a:xfrm>
-            <a:off x="4023360" y="2395727"/>
-            <a:ext cx="483767" cy="73152"/>
-          </a:xfrm>
-          <a:prstGeom prst="rect">
-            <a:avLst/>
-          </a:prstGeom>
-          <a:solidFill>
-            <a:srgbClr val="EFE8DC"/>
-          </a:solidFill>
-          <a:ln>
-            <a:noFill/>
-          </a:ln>
-        </p:spPr>
-        <p:style>
-          <a:lnRef idx="1">
-            <a:schemeClr val="accent1"/>
-          </a:lnRef>
-          <a:fillRef idx="3">
-            <a:schemeClr val="accent1"/>
-          </a:fillRef>
-          <a:effectRef idx="2">
-            <a:schemeClr val="accent1"/>
-          </a:effectRef>
-          <a:fontRef idx="minor">
-            <a:schemeClr val="lt1"/>
-          </a:fontRef>
-        </p:style>
-        <p:txBody>
-          <a:bodyPr rtlCol="0" anchor="ctr"/>
-          <a:lstStyle/>
-          <a:p>
-            <a:pPr algn="ctr"/>
-          </a:p>
-        </p:txBody>
-      </p:sp>
-      <p:sp>
-        <p:nvSpPr>
-          <p:cNvPr id="19" name="Oval 18"/>
-          <p:cNvSpPr/>
-          <p:nvPr/>
-        </p:nvSpPr>
-        <p:spPr>
-          <a:xfrm>
-            <a:off x="4461407" y="2377439"/>
-            <a:ext cx="91440" cy="109728"/>
-          </a:xfrm>
-          <a:prstGeom prst="ellipse">
-            <a:avLst/>
-          </a:prstGeom>
-          <a:solidFill>
-            <a:srgbClr val="7E6849"/>
-          </a:solidFill>
-          <a:ln>
-            <a:noFill/>
-          </a:ln>
-        </p:spPr>
-        <p:style>
-          <a:lnRef idx="1">
-            <a:schemeClr val="accent1"/>
-          </a:lnRef>
-          <a:fillRef idx="3">
-            <a:schemeClr val="accent1"/>
-          </a:fillRef>
-          <a:effectRef idx="2">
-            <a:schemeClr val="accent1"/>
-          </a:effectRef>
-          <a:fontRef idx="minor">
-            <a:schemeClr val="lt1"/>
-          </a:fontRef>
-        </p:style>
-        <p:txBody>
-          <a:bodyPr rtlCol="0" anchor="ctr"/>
-          <a:lstStyle/>
-          <a:p>
-            <a:pPr algn="ctr"/>
-          </a:p>
-        </p:txBody>
-      </p:sp>
-      <p:sp>
-        <p:nvSpPr>
-          <p:cNvPr id="20" name="TextBox 19"/>
-          <p:cNvSpPr txBox="1"/>
-          <p:nvPr/>
-        </p:nvSpPr>
-        <p:spPr>
-          <a:xfrm>
-            <a:off x="4552847" y="2359151"/>
-            <a:ext cx="411480" cy="182880"/>
-          </a:xfrm>
-          <a:prstGeom prst="rect">
-            <a:avLst/>
-          </a:prstGeom>
-          <a:noFill/>
-        </p:spPr>
-        <p:txBody>
-          <a:bodyPr wrap="square" lIns="0" rIns="0" tIns="0" bIns="0" anchor="t">
-            <a:spAutoFit/>
-          </a:bodyPr>
-          <a:lstStyle/>
-          <a:p>
-            <a:pPr algn="l"/>
-            <a:r>
-              <a:rPr sz="1000" b="0">
-                <a:solidFill>
-                  <a:srgbClr val="1A1A1A"/>
-                </a:solidFill>
-                <a:latin typeface="Calibri"/>
-              </a:rPr>
-              <a:t>11.8x</a:t>
-            </a:r>
-          </a:p>
-        </p:txBody>
-      </p:sp>
-      <p:sp>
-        <p:nvSpPr>
-          <p:cNvPr id="21" name="TextBox 20"/>
-          <p:cNvSpPr txBox="1"/>
-          <p:nvPr/>
-        </p:nvSpPr>
-        <p:spPr>
-          <a:xfrm>
-            <a:off x="3520440" y="2615184"/>
-            <a:ext cx="502920" cy="182880"/>
-          </a:xfrm>
-          <a:prstGeom prst="rect">
-            <a:avLst/>
-          </a:prstGeom>
-          <a:noFill/>
-        </p:spPr>
-        <p:txBody>
-          <a:bodyPr wrap="square" lIns="0" rIns="0" tIns="0" bIns="0" anchor="t">
-            <a:spAutoFit/>
-          </a:bodyPr>
-          <a:lstStyle/>
-          <a:p>
-            <a:pPr algn="l"/>
-            <a:r>
-              <a:rPr sz="1000" b="0">
-                <a:solidFill>
-                  <a:srgbClr val="1A1A1A"/>
-                </a:solidFill>
-                <a:latin typeface="Calibri"/>
-              </a:rPr>
-              <a:t>FY2023</a:t>
-            </a:r>
-          </a:p>
-        </p:txBody>
-      </p:sp>
-      <p:sp>
-        <p:nvSpPr>
-          <p:cNvPr id="22" name="Rectangle 21"/>
-          <p:cNvSpPr/>
-          <p:nvPr/>
-        </p:nvSpPr>
-        <p:spPr>
-          <a:xfrm>
-            <a:off x="4023360" y="2670048"/>
-            <a:ext cx="1672688" cy="73152"/>
-          </a:xfrm>
-          <a:prstGeom prst="rect">
-            <a:avLst/>
-          </a:prstGeom>
-          <a:solidFill>
-            <a:srgbClr val="EFE8DC"/>
-          </a:solidFill>
-          <a:ln>
-            <a:noFill/>
-          </a:ln>
-        </p:spPr>
-        <p:style>
-          <a:lnRef idx="1">
-            <a:schemeClr val="accent1"/>
-          </a:lnRef>
-          <a:fillRef idx="3">
-            <a:schemeClr val="accent1"/>
-          </a:fillRef>
-          <a:effectRef idx="2">
-            <a:schemeClr val="accent1"/>
-          </a:effectRef>
-          <a:fontRef idx="minor">
-            <a:schemeClr val="lt1"/>
-          </a:fontRef>
-        </p:style>
-        <p:txBody>
-          <a:bodyPr rtlCol="0" anchor="ctr"/>
-          <a:lstStyle/>
-          <a:p>
-            <a:pPr algn="ctr"/>
-          </a:p>
-        </p:txBody>
-      </p:sp>
-      <p:sp>
-        <p:nvSpPr>
-          <p:cNvPr id="23" name="Oval 22"/>
-          <p:cNvSpPr/>
-          <p:nvPr/>
-        </p:nvSpPr>
-        <p:spPr>
-          <a:xfrm>
-            <a:off x="5650328" y="2651760"/>
-            <a:ext cx="91440" cy="109728"/>
-          </a:xfrm>
-          <a:prstGeom prst="ellipse">
-            <a:avLst/>
-          </a:prstGeom>
-          <a:solidFill>
-            <a:srgbClr val="7E6849"/>
-          </a:solidFill>
-          <a:ln>
-            <a:noFill/>
-          </a:ln>
-        </p:spPr>
-        <p:style>
-          <a:lnRef idx="1">
-            <a:schemeClr val="accent1"/>
-          </a:lnRef>
-          <a:fillRef idx="3">
-            <a:schemeClr val="accent1"/>
-          </a:fillRef>
-          <a:effectRef idx="2">
-            <a:schemeClr val="accent1"/>
-          </a:effectRef>
-          <a:fontRef idx="minor">
-            <a:schemeClr val="lt1"/>
-          </a:fontRef>
-        </p:style>
-        <p:txBody>
-          <a:bodyPr rtlCol="0" anchor="ctr"/>
-          <a:lstStyle/>
-          <a:p>
-            <a:pPr algn="ctr"/>
-          </a:p>
-        </p:txBody>
-      </p:sp>
-      <p:sp>
-        <p:nvSpPr>
-          <p:cNvPr id="24" name="TextBox 23"/>
-          <p:cNvSpPr txBox="1"/>
-          <p:nvPr/>
-        </p:nvSpPr>
-        <p:spPr>
-          <a:xfrm>
-            <a:off x="5741768" y="2633472"/>
-            <a:ext cx="411480" cy="182880"/>
-          </a:xfrm>
-          <a:prstGeom prst="rect">
-            <a:avLst/>
-          </a:prstGeom>
-          <a:noFill/>
-        </p:spPr>
-        <p:txBody>
-          <a:bodyPr wrap="square" lIns="0" rIns="0" tIns="0" bIns="0" anchor="t">
-            <a:spAutoFit/>
-          </a:bodyPr>
-          <a:lstStyle/>
-          <a:p>
-            <a:pPr algn="l"/>
-            <a:r>
-              <a:rPr sz="1000" b="0">
-                <a:solidFill>
-                  <a:srgbClr val="1A1A1A"/>
-                </a:solidFill>
-                <a:latin typeface="Calibri"/>
-              </a:rPr>
-              <a:t>17.6x</a:t>
-            </a:r>
-          </a:p>
-        </p:txBody>
-      </p:sp>
-      <p:sp>
-        <p:nvSpPr>
-          <p:cNvPr id="25" name="TextBox 24"/>
-          <p:cNvSpPr txBox="1"/>
-          <p:nvPr/>
-        </p:nvSpPr>
-        <p:spPr>
-          <a:xfrm>
-            <a:off x="3520440" y="2889503"/>
-            <a:ext cx="502920" cy="182880"/>
-          </a:xfrm>
-          <a:prstGeom prst="rect">
-            <a:avLst/>
-          </a:prstGeom>
-          <a:noFill/>
-        </p:spPr>
-        <p:txBody>
-          <a:bodyPr wrap="square" lIns="0" rIns="0" tIns="0" bIns="0" anchor="t">
-            <a:spAutoFit/>
-          </a:bodyPr>
-          <a:lstStyle/>
-          <a:p>
-            <a:pPr algn="l"/>
-            <a:r>
-              <a:rPr sz="1000" b="0">
-                <a:solidFill>
-                  <a:srgbClr val="1A1A1A"/>
-                </a:solidFill>
-                <a:latin typeface="Calibri"/>
-              </a:rPr>
-              <a:t>FY2024</a:t>
-            </a:r>
-          </a:p>
-        </p:txBody>
-      </p:sp>
-      <p:sp>
-        <p:nvSpPr>
-          <p:cNvPr id="26" name="Rectangle 25"/>
-          <p:cNvSpPr/>
-          <p:nvPr/>
-        </p:nvSpPr>
-        <p:spPr>
-          <a:xfrm>
-            <a:off x="4023360" y="2944368"/>
-            <a:ext cx="1590694" cy="73152"/>
-          </a:xfrm>
-          <a:prstGeom prst="rect">
-            <a:avLst/>
-          </a:prstGeom>
-          <a:solidFill>
-            <a:srgbClr val="EFE8DC"/>
-          </a:solidFill>
-          <a:ln>
-            <a:noFill/>
-          </a:ln>
-        </p:spPr>
-        <p:style>
-          <a:lnRef idx="1">
-            <a:schemeClr val="accent1"/>
-          </a:lnRef>
-          <a:fillRef idx="3">
-            <a:schemeClr val="accent1"/>
-          </a:fillRef>
-          <a:effectRef idx="2">
-            <a:schemeClr val="accent1"/>
-          </a:effectRef>
-          <a:fontRef idx="minor">
-            <a:schemeClr val="lt1"/>
-          </a:fontRef>
-        </p:style>
-        <p:txBody>
-          <a:bodyPr rtlCol="0" anchor="ctr"/>
-          <a:lstStyle/>
-          <a:p>
-            <a:pPr algn="ctr"/>
-          </a:p>
-        </p:txBody>
-      </p:sp>
-      <p:sp>
-        <p:nvSpPr>
-          <p:cNvPr id="27" name="Oval 26"/>
-          <p:cNvSpPr/>
-          <p:nvPr/>
-        </p:nvSpPr>
-        <p:spPr>
-          <a:xfrm>
-            <a:off x="5568334" y="2926079"/>
-            <a:ext cx="91440" cy="109728"/>
-          </a:xfrm>
-          <a:prstGeom prst="ellipse">
-            <a:avLst/>
-          </a:prstGeom>
-          <a:solidFill>
-            <a:srgbClr val="7E6849"/>
-          </a:solidFill>
-          <a:ln>
-            <a:noFill/>
-          </a:ln>
-        </p:spPr>
-        <p:style>
-          <a:lnRef idx="1">
-            <a:schemeClr val="accent1"/>
-          </a:lnRef>
-          <a:fillRef idx="3">
-            <a:schemeClr val="accent1"/>
-          </a:fillRef>
-          <a:effectRef idx="2">
-            <a:schemeClr val="accent1"/>
-          </a:effectRef>
-          <a:fontRef idx="minor">
-            <a:schemeClr val="lt1"/>
-          </a:fontRef>
-        </p:style>
-        <p:txBody>
-          <a:bodyPr rtlCol="0" anchor="ctr"/>
-          <a:lstStyle/>
-          <a:p>
-            <a:pPr algn="ctr"/>
-          </a:p>
-        </p:txBody>
-      </p:sp>
-      <p:sp>
-        <p:nvSpPr>
-          <p:cNvPr id="28" name="TextBox 27"/>
-          <p:cNvSpPr txBox="1"/>
-          <p:nvPr/>
-        </p:nvSpPr>
-        <p:spPr>
-          <a:xfrm>
-            <a:off x="5659774" y="2907791"/>
-            <a:ext cx="411480" cy="182880"/>
-          </a:xfrm>
-          <a:prstGeom prst="rect">
-            <a:avLst/>
-          </a:prstGeom>
-          <a:noFill/>
-        </p:spPr>
-        <p:txBody>
-          <a:bodyPr wrap="square" lIns="0" rIns="0" tIns="0" bIns="0" anchor="t">
-            <a:spAutoFit/>
-          </a:bodyPr>
-          <a:lstStyle/>
-          <a:p>
-            <a:pPr algn="l"/>
-            <a:r>
-              <a:rPr sz="1000" b="0">
-                <a:solidFill>
-                  <a:srgbClr val="1A1A1A"/>
-                </a:solidFill>
-                <a:latin typeface="Calibri"/>
-              </a:rPr>
-              <a:t>17.2x</a:t>
-            </a:r>
-          </a:p>
-        </p:txBody>
-      </p:sp>
-      <p:sp>
-        <p:nvSpPr>
-          <p:cNvPr id="29" name="TextBox 28"/>
-          <p:cNvSpPr txBox="1"/>
-          <p:nvPr/>
-        </p:nvSpPr>
-        <p:spPr>
-          <a:xfrm>
-            <a:off x="3520440" y="3163824"/>
-            <a:ext cx="502920" cy="182880"/>
-          </a:xfrm>
-          <a:prstGeom prst="rect">
-            <a:avLst/>
-          </a:prstGeom>
-          <a:noFill/>
-        </p:spPr>
-        <p:txBody>
-          <a:bodyPr wrap="square" lIns="0" rIns="0" tIns="0" bIns="0" anchor="t">
-            <a:spAutoFit/>
-          </a:bodyPr>
-          <a:lstStyle/>
-          <a:p>
-            <a:pPr algn="l"/>
-            <a:r>
-              <a:rPr sz="1000" b="0">
-                <a:solidFill>
-                  <a:srgbClr val="1A1A1A"/>
-                </a:solidFill>
-                <a:latin typeface="Calibri"/>
-              </a:rPr>
-              <a:t>FY2025</a:t>
-            </a:r>
-          </a:p>
-        </p:txBody>
-      </p:sp>
-      <p:sp>
-        <p:nvSpPr>
-          <p:cNvPr id="30" name="Rectangle 29"/>
-          <p:cNvSpPr/>
-          <p:nvPr/>
-        </p:nvSpPr>
-        <p:spPr>
-          <a:xfrm>
-            <a:off x="4023360" y="3218688"/>
-            <a:ext cx="1447203" cy="73152"/>
-          </a:xfrm>
-          <a:prstGeom prst="rect">
-            <a:avLst/>
-          </a:prstGeom>
-          <a:solidFill>
-            <a:srgbClr val="EFE8DC"/>
-          </a:solidFill>
-          <a:ln>
-            <a:noFill/>
-          </a:ln>
-        </p:spPr>
-        <p:style>
-          <a:lnRef idx="1">
-            <a:schemeClr val="accent1"/>
-          </a:lnRef>
-          <a:fillRef idx="3">
-            <a:schemeClr val="accent1"/>
-          </a:fillRef>
-          <a:effectRef idx="2">
-            <a:schemeClr val="accent1"/>
-          </a:effectRef>
-          <a:fontRef idx="minor">
-            <a:schemeClr val="lt1"/>
-          </a:fontRef>
-        </p:style>
-        <p:txBody>
-          <a:bodyPr rtlCol="0" anchor="ctr"/>
-          <a:lstStyle/>
-          <a:p>
-            <a:pPr algn="ctr"/>
-          </a:p>
-        </p:txBody>
-      </p:sp>
-      <p:sp>
-        <p:nvSpPr>
-          <p:cNvPr id="31" name="Oval 30"/>
-          <p:cNvSpPr/>
-          <p:nvPr/>
-        </p:nvSpPr>
-        <p:spPr>
-          <a:xfrm>
-            <a:off x="5424843" y="3200400"/>
-            <a:ext cx="91440" cy="109728"/>
-          </a:xfrm>
-          <a:prstGeom prst="ellipse">
-            <a:avLst/>
-          </a:prstGeom>
-          <a:solidFill>
-            <a:srgbClr val="7E6849"/>
-          </a:solidFill>
-          <a:ln>
-            <a:noFill/>
-          </a:ln>
-        </p:spPr>
-        <p:style>
-          <a:lnRef idx="1">
-            <a:schemeClr val="accent1"/>
-          </a:lnRef>
-          <a:fillRef idx="3">
-            <a:schemeClr val="accent1"/>
-          </a:fillRef>
-          <a:effectRef idx="2">
-            <a:schemeClr val="accent1"/>
-          </a:effectRef>
-          <a:fontRef idx="minor">
-            <a:schemeClr val="lt1"/>
-          </a:fontRef>
-        </p:style>
-        <p:txBody>
-          <a:bodyPr rtlCol="0" anchor="ctr"/>
-          <a:lstStyle/>
-          <a:p>
-            <a:pPr algn="ctr"/>
-          </a:p>
-        </p:txBody>
-      </p:sp>
-      <p:sp>
-        <p:nvSpPr>
-          <p:cNvPr id="32" name="TextBox 31"/>
-          <p:cNvSpPr txBox="1"/>
-          <p:nvPr/>
-        </p:nvSpPr>
-        <p:spPr>
-          <a:xfrm>
-            <a:off x="5516283" y="3182112"/>
-            <a:ext cx="411480" cy="182880"/>
-          </a:xfrm>
-          <a:prstGeom prst="rect">
-            <a:avLst/>
-          </a:prstGeom>
-          <a:noFill/>
-        </p:spPr>
-        <p:txBody>
-          <a:bodyPr wrap="square" lIns="0" rIns="0" tIns="0" bIns="0" anchor="t">
-            <a:spAutoFit/>
-          </a:bodyPr>
-          <a:lstStyle/>
-          <a:p>
-            <a:pPr algn="l"/>
-            <a:r>
-              <a:rPr sz="1000" b="0">
-                <a:solidFill>
-                  <a:srgbClr val="1A1A1A"/>
-                </a:solidFill>
-                <a:latin typeface="Calibri"/>
-              </a:rPr>
-              <a:t>16.5x</a:t>
-            </a:r>
-          </a:p>
-        </p:txBody>
-      </p:sp>
-      <p:sp>
-        <p:nvSpPr>
-          <p:cNvPr id="33" name="TextBox 32"/>
-          <p:cNvSpPr txBox="1"/>
-          <p:nvPr/>
-        </p:nvSpPr>
-        <p:spPr>
-          <a:xfrm>
-            <a:off x="3520440" y="3438144"/>
-            <a:ext cx="502920" cy="182880"/>
-          </a:xfrm>
-          <a:prstGeom prst="rect">
-            <a:avLst/>
-          </a:prstGeom>
-          <a:noFill/>
-        </p:spPr>
-        <p:txBody>
-          <a:bodyPr wrap="square" lIns="0" rIns="0" tIns="0" bIns="0" anchor="t">
-            <a:spAutoFit/>
-          </a:bodyPr>
-          <a:lstStyle/>
-          <a:p>
-            <a:pPr algn="l"/>
-            <a:r>
-              <a:rPr sz="1000" b="0">
-                <a:solidFill>
-                  <a:srgbClr val="1A1A1A"/>
-                </a:solidFill>
-                <a:latin typeface="Calibri"/>
-              </a:rPr>
-              <a:t>FY2026</a:t>
-            </a:r>
-          </a:p>
-        </p:txBody>
-      </p:sp>
-      <p:sp>
-        <p:nvSpPr>
-          <p:cNvPr id="34" name="Rectangle 33"/>
-          <p:cNvSpPr/>
-          <p:nvPr/>
-        </p:nvSpPr>
-        <p:spPr>
-          <a:xfrm>
-            <a:off x="4023360" y="3493008"/>
-            <a:ext cx="852743" cy="73152"/>
-          </a:xfrm>
-          <a:prstGeom prst="rect">
-            <a:avLst/>
-          </a:prstGeom>
-          <a:solidFill>
-            <a:srgbClr val="EFE8DC"/>
-          </a:solidFill>
-          <a:ln>
-            <a:noFill/>
-          </a:ln>
-        </p:spPr>
-        <p:style>
-          <a:lnRef idx="1">
-            <a:schemeClr val="accent1"/>
-          </a:lnRef>
-          <a:fillRef idx="3">
-            <a:schemeClr val="accent1"/>
-          </a:fillRef>
-          <a:effectRef idx="2">
-            <a:schemeClr val="accent1"/>
-          </a:effectRef>
-          <a:fontRef idx="minor">
-            <a:schemeClr val="lt1"/>
-          </a:fontRef>
-        </p:style>
-        <p:txBody>
-          <a:bodyPr rtlCol="0" anchor="ctr"/>
-          <a:lstStyle/>
-          <a:p>
-            <a:pPr algn="ctr"/>
-          </a:p>
-        </p:txBody>
-      </p:sp>
-      <p:sp>
-        <p:nvSpPr>
-          <p:cNvPr id="35" name="Oval 34"/>
-          <p:cNvSpPr/>
-          <p:nvPr/>
-        </p:nvSpPr>
-        <p:spPr>
-          <a:xfrm>
-            <a:off x="4830383" y="3474720"/>
-            <a:ext cx="91440" cy="109728"/>
-          </a:xfrm>
-          <a:prstGeom prst="ellipse">
-            <a:avLst/>
-          </a:prstGeom>
-          <a:solidFill>
-            <a:srgbClr val="7E6849"/>
-          </a:solidFill>
-          <a:ln>
-            <a:noFill/>
-          </a:ln>
-        </p:spPr>
-        <p:style>
-          <a:lnRef idx="1">
-            <a:schemeClr val="accent1"/>
-          </a:lnRef>
-          <a:fillRef idx="3">
-            <a:schemeClr val="accent1"/>
-          </a:fillRef>
-          <a:effectRef idx="2">
-            <a:schemeClr val="accent1"/>
-          </a:effectRef>
-          <a:fontRef idx="minor">
-            <a:schemeClr val="lt1"/>
-          </a:fontRef>
-        </p:style>
-        <p:txBody>
-          <a:bodyPr rtlCol="0" anchor="ctr"/>
-          <a:lstStyle/>
-          <a:p>
-            <a:pPr algn="ctr"/>
-          </a:p>
-        </p:txBody>
-      </p:sp>
-      <p:sp>
-        <p:nvSpPr>
-          <p:cNvPr id="36" name="TextBox 35"/>
-          <p:cNvSpPr txBox="1"/>
-          <p:nvPr/>
-        </p:nvSpPr>
-        <p:spPr>
-          <a:xfrm>
-            <a:off x="4921823" y="3456432"/>
-            <a:ext cx="411480" cy="182880"/>
-          </a:xfrm>
-          <a:prstGeom prst="rect">
-            <a:avLst/>
-          </a:prstGeom>
-          <a:noFill/>
-        </p:spPr>
-        <p:txBody>
-          <a:bodyPr wrap="square" lIns="0" rIns="0" tIns="0" bIns="0" anchor="t">
-            <a:spAutoFit/>
-          </a:bodyPr>
-          <a:lstStyle/>
-          <a:p>
-            <a:pPr algn="l"/>
-            <a:r>
-              <a:rPr sz="1000" b="0">
-                <a:solidFill>
-                  <a:srgbClr val="1A1A1A"/>
-                </a:solidFill>
-                <a:latin typeface="Calibri"/>
-              </a:rPr>
-              <a:t>13.6x</a:t>
-            </a:r>
-          </a:p>
-        </p:txBody>
-      </p:sp>
-      <p:sp>
-        <p:nvSpPr>
-          <p:cNvPr id="37" name="TextBox 36"/>
-          <p:cNvSpPr txBox="1"/>
-          <p:nvPr/>
-        </p:nvSpPr>
-        <p:spPr>
-          <a:xfrm>
-            <a:off x="3520440" y="3712463"/>
-            <a:ext cx="502920" cy="182880"/>
-          </a:xfrm>
-          <a:prstGeom prst="rect">
-            <a:avLst/>
-          </a:prstGeom>
-          <a:noFill/>
-        </p:spPr>
-        <p:txBody>
-          <a:bodyPr wrap="square" lIns="0" rIns="0" tIns="0" bIns="0" anchor="t">
-            <a:spAutoFit/>
-          </a:bodyPr>
-          <a:lstStyle/>
-          <a:p>
-            <a:pPr algn="l"/>
-            <a:r>
-              <a:rPr sz="1000" b="0">
-                <a:solidFill>
-                  <a:srgbClr val="1A1A1A"/>
-                </a:solidFill>
-                <a:latin typeface="Calibri"/>
-              </a:rPr>
-              <a:t>FY2027</a:t>
-            </a:r>
-          </a:p>
-        </p:txBody>
-      </p:sp>
-      <p:sp>
-        <p:nvSpPr>
-          <p:cNvPr id="38" name="Rectangle 37"/>
-          <p:cNvSpPr/>
-          <p:nvPr/>
-        </p:nvSpPr>
-        <p:spPr>
-          <a:xfrm>
-            <a:off x="4023360" y="3767327"/>
-            <a:ext cx="1160222" cy="73152"/>
-          </a:xfrm>
-          <a:prstGeom prst="rect">
-            <a:avLst/>
-          </a:prstGeom>
-          <a:solidFill>
-            <a:srgbClr val="EFE8DC"/>
-          </a:solidFill>
-          <a:ln>
-            <a:noFill/>
-          </a:ln>
-        </p:spPr>
-        <p:style>
-          <a:lnRef idx="1">
-            <a:schemeClr val="accent1"/>
-          </a:lnRef>
-          <a:fillRef idx="3">
-            <a:schemeClr val="accent1"/>
-          </a:fillRef>
-          <a:effectRef idx="2">
-            <a:schemeClr val="accent1"/>
-          </a:effectRef>
-          <a:fontRef idx="minor">
-            <a:schemeClr val="lt1"/>
-          </a:fontRef>
-        </p:style>
-        <p:txBody>
-          <a:bodyPr rtlCol="0" anchor="ctr"/>
-          <a:lstStyle/>
-          <a:p>
-            <a:pPr algn="ctr"/>
-          </a:p>
-        </p:txBody>
-      </p:sp>
-      <p:sp>
-        <p:nvSpPr>
-          <p:cNvPr id="39" name="Oval 38"/>
-          <p:cNvSpPr/>
-          <p:nvPr/>
-        </p:nvSpPr>
-        <p:spPr>
-          <a:xfrm>
-            <a:off x="5137862" y="3749039"/>
-            <a:ext cx="91440" cy="109728"/>
-          </a:xfrm>
-          <a:prstGeom prst="ellipse">
-            <a:avLst/>
-          </a:prstGeom>
-          <a:solidFill>
-            <a:srgbClr val="7E6849"/>
-          </a:solidFill>
-          <a:ln>
-            <a:noFill/>
-          </a:ln>
-        </p:spPr>
-        <p:style>
-          <a:lnRef idx="1">
-            <a:schemeClr val="accent1"/>
-          </a:lnRef>
-          <a:fillRef idx="3">
-            <a:schemeClr val="accent1"/>
-          </a:fillRef>
-          <a:effectRef idx="2">
-            <a:schemeClr val="accent1"/>
-          </a:effectRef>
-          <a:fontRef idx="minor">
-            <a:schemeClr val="lt1"/>
-          </a:fontRef>
-        </p:style>
-        <p:txBody>
-          <a:bodyPr rtlCol="0" anchor="ctr"/>
-          <a:lstStyle/>
-          <a:p>
-            <a:pPr algn="ctr"/>
-          </a:p>
-        </p:txBody>
-      </p:sp>
-      <p:sp>
-        <p:nvSpPr>
-          <p:cNvPr id="40" name="TextBox 39"/>
-          <p:cNvSpPr txBox="1"/>
-          <p:nvPr/>
-        </p:nvSpPr>
-        <p:spPr>
-          <a:xfrm>
-            <a:off x="5229302" y="3730751"/>
-            <a:ext cx="411480" cy="182880"/>
-          </a:xfrm>
-          <a:prstGeom prst="rect">
-            <a:avLst/>
-          </a:prstGeom>
-          <a:noFill/>
-        </p:spPr>
-        <p:txBody>
-          <a:bodyPr wrap="square" lIns="0" rIns="0" tIns="0" bIns="0" anchor="t">
-            <a:spAutoFit/>
-          </a:bodyPr>
-          <a:lstStyle/>
-          <a:p>
-            <a:pPr algn="l"/>
-            <a:r>
-              <a:rPr sz="1000" b="0">
-                <a:solidFill>
-                  <a:srgbClr val="1A1A1A"/>
-                </a:solidFill>
-                <a:latin typeface="Calibri"/>
-              </a:rPr>
-              <a:t>15.1x</a:t>
-            </a:r>
-          </a:p>
-        </p:txBody>
-      </p:sp>
-      <p:sp>
-        <p:nvSpPr>
-          <p:cNvPr id="41" name="TextBox 40"/>
-          <p:cNvSpPr txBox="1"/>
-          <p:nvPr/>
-        </p:nvSpPr>
-        <p:spPr>
-          <a:xfrm>
-            <a:off x="3520440" y="3986783"/>
-            <a:ext cx="502920" cy="182880"/>
-          </a:xfrm>
-          <a:prstGeom prst="rect">
-            <a:avLst/>
-          </a:prstGeom>
-          <a:noFill/>
-        </p:spPr>
-        <p:txBody>
-          <a:bodyPr wrap="square" lIns="0" rIns="0" tIns="0" bIns="0" anchor="t">
-            <a:spAutoFit/>
-          </a:bodyPr>
-          <a:lstStyle/>
-          <a:p>
-            <a:pPr algn="l"/>
-            <a:r>
-              <a:rPr sz="1000" b="0">
-                <a:solidFill>
-                  <a:srgbClr val="1A1A1A"/>
-                </a:solidFill>
-                <a:latin typeface="Calibri"/>
-              </a:rPr>
-              <a:t>FY2028</a:t>
-            </a:r>
-          </a:p>
-        </p:txBody>
-      </p:sp>
-      <p:sp>
-        <p:nvSpPr>
-          <p:cNvPr id="42" name="Rectangle 41"/>
-          <p:cNvSpPr/>
-          <p:nvPr/>
-        </p:nvSpPr>
-        <p:spPr>
-          <a:xfrm>
-            <a:off x="4023360" y="4041647"/>
-            <a:ext cx="1160222" cy="73152"/>
-          </a:xfrm>
-          <a:prstGeom prst="rect">
-            <a:avLst/>
-          </a:prstGeom>
-          <a:solidFill>
-            <a:srgbClr val="EFE8DC"/>
-          </a:solidFill>
-          <a:ln>
-            <a:noFill/>
-          </a:ln>
-        </p:spPr>
-        <p:style>
-          <a:lnRef idx="1">
-            <a:schemeClr val="accent1"/>
-          </a:lnRef>
-          <a:fillRef idx="3">
-            <a:schemeClr val="accent1"/>
-          </a:fillRef>
-          <a:effectRef idx="2">
-            <a:schemeClr val="accent1"/>
-          </a:effectRef>
-          <a:fontRef idx="minor">
-            <a:schemeClr val="lt1"/>
-          </a:fontRef>
-        </p:style>
-        <p:txBody>
-          <a:bodyPr rtlCol="0" anchor="ctr"/>
-          <a:lstStyle/>
-          <a:p>
-            <a:pPr algn="ctr"/>
-          </a:p>
-        </p:txBody>
-      </p:sp>
-      <p:sp>
-        <p:nvSpPr>
-          <p:cNvPr id="43" name="Oval 42"/>
-          <p:cNvSpPr/>
-          <p:nvPr/>
-        </p:nvSpPr>
-        <p:spPr>
-          <a:xfrm>
-            <a:off x="5137862" y="4023359"/>
-            <a:ext cx="91440" cy="109728"/>
-          </a:xfrm>
-          <a:prstGeom prst="ellipse">
-            <a:avLst/>
-          </a:prstGeom>
-          <a:solidFill>
-            <a:srgbClr val="7E6849"/>
-          </a:solidFill>
-          <a:ln>
-            <a:noFill/>
-          </a:ln>
-        </p:spPr>
-        <p:style>
-          <a:lnRef idx="1">
-            <a:schemeClr val="accent1"/>
-          </a:lnRef>
-          <a:fillRef idx="3">
-            <a:schemeClr val="accent1"/>
-          </a:fillRef>
-          <a:effectRef idx="2">
-            <a:schemeClr val="accent1"/>
-          </a:effectRef>
-          <a:fontRef idx="minor">
-            <a:schemeClr val="lt1"/>
-          </a:fontRef>
-        </p:style>
-        <p:txBody>
-          <a:bodyPr rtlCol="0" anchor="ctr"/>
-          <a:lstStyle/>
-          <a:p>
-            <a:pPr algn="ctr"/>
-          </a:p>
-        </p:txBody>
-      </p:sp>
-      <p:sp>
-        <p:nvSpPr>
-          <p:cNvPr id="44" name="TextBox 43"/>
-          <p:cNvSpPr txBox="1"/>
-          <p:nvPr/>
-        </p:nvSpPr>
-        <p:spPr>
-          <a:xfrm>
-            <a:off x="5229302" y="4005071"/>
-            <a:ext cx="411480" cy="182880"/>
-          </a:xfrm>
-          <a:prstGeom prst="rect">
-            <a:avLst/>
-          </a:prstGeom>
-          <a:noFill/>
-        </p:spPr>
-        <p:txBody>
-          <a:bodyPr wrap="square" lIns="0" rIns="0" tIns="0" bIns="0" anchor="t">
-            <a:spAutoFit/>
-          </a:bodyPr>
-          <a:lstStyle/>
-          <a:p>
-            <a:pPr algn="l"/>
-            <a:r>
-              <a:rPr sz="1000" b="0">
-                <a:solidFill>
-                  <a:srgbClr val="1A1A1A"/>
-                </a:solidFill>
-                <a:latin typeface="Calibri"/>
-              </a:rPr>
-              <a:t>15.1x</a:t>
-            </a:r>
-          </a:p>
-        </p:txBody>
-      </p:sp>
-      <p:sp>
-        <p:nvSpPr>
-          <p:cNvPr id="45" name="TextBox 44"/>
-          <p:cNvSpPr txBox="1"/>
-          <p:nvPr/>
-        </p:nvSpPr>
-        <p:spPr>
-          <a:xfrm>
-            <a:off x="3886200" y="4297680"/>
-            <a:ext cx="365760" cy="164592"/>
-          </a:xfrm>
-          <a:prstGeom prst="rect">
-            <a:avLst/>
-          </a:prstGeom>
-          <a:noFill/>
-        </p:spPr>
-        <p:txBody>
-          <a:bodyPr wrap="square" lIns="0" rIns="0" tIns="0" bIns="0" anchor="t">
-            <a:spAutoFit/>
-          </a:bodyPr>
-          <a:lstStyle/>
-          <a:p>
-            <a:pPr algn="l"/>
-            <a:r>
-              <a:rPr sz="700" b="0">
-                <a:solidFill>
-                  <a:srgbClr val="9A9A9A"/>
-                </a:solidFill>
-                <a:latin typeface="Calibri"/>
-              </a:rPr>
-              <a:t>9x</a:t>
-            </a:r>
-          </a:p>
-        </p:txBody>
-      </p:sp>
-      <p:sp>
-        <p:nvSpPr>
-          <p:cNvPr id="46" name="TextBox 45"/>
-          <p:cNvSpPr txBox="1"/>
-          <p:nvPr/>
-        </p:nvSpPr>
-        <p:spPr>
-          <a:xfrm>
-            <a:off x="4663440" y="4297680"/>
-            <a:ext cx="365760" cy="164592"/>
-          </a:xfrm>
-          <a:prstGeom prst="rect">
-            <a:avLst/>
-          </a:prstGeom>
-          <a:noFill/>
-        </p:spPr>
-        <p:txBody>
-          <a:bodyPr wrap="square" lIns="0" rIns="0" tIns="0" bIns="0" anchor="t">
-            <a:spAutoFit/>
-          </a:bodyPr>
-          <a:lstStyle/>
-          <a:p>
-            <a:pPr algn="l"/>
-            <a:r>
-              <a:rPr sz="700" b="0">
-                <a:solidFill>
-                  <a:srgbClr val="9A9A9A"/>
-                </a:solidFill>
-                <a:latin typeface="Calibri"/>
-              </a:rPr>
-              <a:t>13x</a:t>
-            </a:r>
-          </a:p>
-        </p:txBody>
-      </p:sp>
-      <p:sp>
-        <p:nvSpPr>
-          <p:cNvPr id="47" name="TextBox 46"/>
-          <p:cNvSpPr txBox="1"/>
-          <p:nvPr/>
-        </p:nvSpPr>
-        <p:spPr>
-          <a:xfrm>
-            <a:off x="5440679" y="4297680"/>
-            <a:ext cx="365760" cy="164592"/>
-          </a:xfrm>
-          <a:prstGeom prst="rect">
-            <a:avLst/>
-          </a:prstGeom>
-          <a:noFill/>
-        </p:spPr>
-        <p:txBody>
-          <a:bodyPr wrap="square" lIns="0" rIns="0" tIns="0" bIns="0" anchor="t">
-            <a:spAutoFit/>
-          </a:bodyPr>
-          <a:lstStyle/>
-          <a:p>
-            <a:pPr algn="l"/>
-            <a:r>
-              <a:rPr sz="700" b="0">
-                <a:solidFill>
-                  <a:srgbClr val="9A9A9A"/>
-                </a:solidFill>
-                <a:latin typeface="Calibri"/>
-              </a:rPr>
-              <a:t>17x</a:t>
-            </a:r>
-          </a:p>
-        </p:txBody>
-      </p:sp>
-      <p:sp>
-        <p:nvSpPr>
-          <p:cNvPr id="48" name="TextBox 47"/>
-          <p:cNvSpPr txBox="1"/>
-          <p:nvPr/>
-        </p:nvSpPr>
-        <p:spPr>
-          <a:xfrm>
-            <a:off x="6217920" y="4297680"/>
-            <a:ext cx="365760" cy="164592"/>
-          </a:xfrm>
-          <a:prstGeom prst="rect">
-            <a:avLst/>
-          </a:prstGeom>
-          <a:noFill/>
-        </p:spPr>
-        <p:txBody>
-          <a:bodyPr wrap="square" lIns="0" rIns="0" tIns="0" bIns="0" anchor="t">
-            <a:spAutoFit/>
-          </a:bodyPr>
-          <a:lstStyle/>
-          <a:p>
-            <a:pPr algn="l"/>
-            <a:r>
-              <a:rPr sz="700" b="0">
-                <a:solidFill>
-                  <a:srgbClr val="9A9A9A"/>
-                </a:solidFill>
-                <a:latin typeface="Calibri"/>
-              </a:rPr>
-              <a:t>21x</a:t>
-            </a:r>
-          </a:p>
-        </p:txBody>
-      </p:sp>
-      <p:sp>
-        <p:nvSpPr>
-          <p:cNvPr id="49" name="Diamond 48"/>
-          <p:cNvSpPr/>
-          <p:nvPr/>
-        </p:nvSpPr>
-        <p:spPr>
-          <a:xfrm>
-            <a:off x="5110430" y="4242816"/>
+            <a:off x="5282619" y="2322575"/>
             <a:ext cx="146304" cy="146304"/>
           </a:xfrm>
           <a:prstGeom prst="diamond">
@@ -11754,13 +10263,13 @@
       </p:sp>
       <p:sp>
         <p:nvSpPr>
-          <p:cNvPr id="50" name="TextBox 49"/>
-          <p:cNvSpPr txBox="1"/>
-          <p:nvPr/>
-        </p:nvSpPr>
-        <p:spPr>
-          <a:xfrm>
-            <a:off x="5275022" y="4224528"/>
+          <p:cNvPr id="22" name="TextBox 21"/>
+          <p:cNvSpPr txBox="1"/>
+          <p:nvPr/>
+        </p:nvSpPr>
+        <p:spPr>
+          <a:xfrm>
+            <a:off x="5447211" y="2304287"/>
             <a:ext cx="1280160" cy="164592"/>
           </a:xfrm>
           <a:prstGeom prst="rect">
@@ -11782,14 +10291,14 @@
                 </a:solidFill>
                 <a:latin typeface="Calibri"/>
               </a:rPr>
-              <a:t>Current  (15.1x)</a:t>
-            </a:r>
-          </a:p>
-        </p:txBody>
-      </p:sp>
-      <p:sp>
-        <p:nvSpPr>
-          <p:cNvPr id="51" name="Rectangle 50"/>
+              <a:t>Current  (13.7x)</a:t>
+            </a:r>
+          </a:p>
+        </p:txBody>
+      </p:sp>
+      <p:sp>
+        <p:nvSpPr>
+          <p:cNvPr id="23" name="Rectangle 22"/>
           <p:cNvSpPr/>
           <p:nvPr/>
         </p:nvSpPr>
@@ -11833,7 +10342,7 @@
       </p:sp>
       <p:sp>
         <p:nvSpPr>
-          <p:cNvPr id="52" name="TextBox 51"/>
+          <p:cNvPr id="24" name="TextBox 23"/>
           <p:cNvSpPr txBox="1"/>
           <p:nvPr/>
         </p:nvSpPr>
@@ -11861,14 +10370,14 @@
                 </a:solidFill>
                 <a:latin typeface="Calibri"/>
               </a:rPr>
-              <a:t>PEER COMPARABLES  ·  SELECTED GLOBAL PEERS</a:t>
-            </a:r>
-          </a:p>
-        </p:txBody>
-      </p:sp>
-      <p:sp>
-        <p:nvSpPr>
-          <p:cNvPr id="53" name="TextBox 52"/>
+              <a:t>PEER COMPARABLES  ·  GCC OIL &amp; GAS PEERS</a:t>
+            </a:r>
+          </a:p>
+        </p:txBody>
+      </p:sp>
+      <p:sp>
+        <p:nvSpPr>
+          <p:cNvPr id="25" name="TextBox 24"/>
           <p:cNvSpPr txBox="1"/>
           <p:nvPr/>
         </p:nvSpPr>
@@ -11903,7 +10412,7 @@
       </p:sp>
       <p:sp>
         <p:nvSpPr>
-          <p:cNvPr id="54" name="TextBox 53"/>
+          <p:cNvPr id="26" name="TextBox 25"/>
           <p:cNvSpPr txBox="1"/>
           <p:nvPr/>
         </p:nvSpPr>
@@ -11938,7 +10447,7 @@
       </p:sp>
       <p:sp>
         <p:nvSpPr>
-          <p:cNvPr id="55" name="TextBox 54"/>
+          <p:cNvPr id="27" name="TextBox 26"/>
           <p:cNvSpPr txBox="1"/>
           <p:nvPr/>
         </p:nvSpPr>
@@ -11973,7 +10482,7 @@
       </p:sp>
       <p:sp>
         <p:nvSpPr>
-          <p:cNvPr id="56" name="TextBox 55"/>
+          <p:cNvPr id="28" name="TextBox 27"/>
           <p:cNvSpPr txBox="1"/>
           <p:nvPr/>
         </p:nvSpPr>
@@ -12008,7 +10517,7 @@
       </p:sp>
       <p:sp>
         <p:nvSpPr>
-          <p:cNvPr id="57" name="TextBox 56"/>
+          <p:cNvPr id="29" name="TextBox 28"/>
           <p:cNvSpPr txBox="1"/>
           <p:nvPr/>
         </p:nvSpPr>
@@ -12043,7 +10552,7 @@
       </p:sp>
       <p:sp>
         <p:nvSpPr>
-          <p:cNvPr id="58" name="TextBox 57"/>
+          <p:cNvPr id="30" name="TextBox 29"/>
           <p:cNvSpPr txBox="1"/>
           <p:nvPr/>
         </p:nvSpPr>
@@ -12078,7 +10587,7 @@
       </p:sp>
       <p:sp>
         <p:nvSpPr>
-          <p:cNvPr id="59" name="Rectangle 58"/>
+          <p:cNvPr id="31" name="Rectangle 30"/>
           <p:cNvSpPr/>
           <p:nvPr/>
         </p:nvSpPr>
@@ -12122,7 +10631,7 @@
       </p:sp>
       <p:sp>
         <p:nvSpPr>
-          <p:cNvPr id="60" name="Rectangle 59"/>
+          <p:cNvPr id="32" name="Rectangle 31"/>
           <p:cNvSpPr/>
           <p:nvPr/>
         </p:nvSpPr>
@@ -12166,7 +10675,7 @@
       </p:sp>
       <p:sp>
         <p:nvSpPr>
-          <p:cNvPr id="61" name="TextBox 60"/>
+          <p:cNvPr id="33" name="TextBox 32"/>
           <p:cNvSpPr txBox="1"/>
           <p:nvPr/>
         </p:nvSpPr>
@@ -12201,7 +10710,7 @@
       </p:sp>
       <p:sp>
         <p:nvSpPr>
-          <p:cNvPr id="62" name="Rectangle 61"/>
+          <p:cNvPr id="34" name="Rectangle 33"/>
           <p:cNvSpPr/>
           <p:nvPr/>
         </p:nvSpPr>
@@ -12247,7 +10756,7 @@
       </p:sp>
       <p:sp>
         <p:nvSpPr>
-          <p:cNvPr id="63" name="Rectangle 62"/>
+          <p:cNvPr id="35" name="Rectangle 34"/>
           <p:cNvSpPr/>
           <p:nvPr/>
         </p:nvSpPr>
@@ -12291,7 +10800,7 @@
       </p:sp>
       <p:sp>
         <p:nvSpPr>
-          <p:cNvPr id="64" name="TextBox 63"/>
+          <p:cNvPr id="36" name="TextBox 35"/>
           <p:cNvSpPr txBox="1"/>
           <p:nvPr/>
         </p:nvSpPr>
@@ -12326,7 +10835,7 @@
       </p:sp>
       <p:sp>
         <p:nvSpPr>
-          <p:cNvPr id="65" name="Rectangle 64"/>
+          <p:cNvPr id="37" name="Rectangle 36"/>
           <p:cNvSpPr/>
           <p:nvPr/>
         </p:nvSpPr>
@@ -12369,7 +10878,7 @@
       </p:sp>
       <p:sp>
         <p:nvSpPr>
-          <p:cNvPr id="66" name="Rectangle 65"/>
+          <p:cNvPr id="38" name="Rectangle 37"/>
           <p:cNvSpPr/>
           <p:nvPr/>
         </p:nvSpPr>
@@ -12412,7 +10921,7 @@
       </p:sp>
       <p:sp>
         <p:nvSpPr>
-          <p:cNvPr id="67" name="TextBox 66"/>
+          <p:cNvPr id="39" name="TextBox 38"/>
           <p:cNvSpPr txBox="1"/>
           <p:nvPr/>
         </p:nvSpPr>
@@ -12447,7 +10956,7 @@
       </p:sp>
       <p:sp>
         <p:nvSpPr>
-          <p:cNvPr id="68" name="TextBox 67"/>
+          <p:cNvPr id="40" name="TextBox 39"/>
           <p:cNvSpPr txBox="1"/>
           <p:nvPr/>
         </p:nvSpPr>
@@ -12482,7 +10991,7 @@
       </p:sp>
       <p:sp>
         <p:nvSpPr>
-          <p:cNvPr id="69" name="Rectangle 68"/>
+          <p:cNvPr id="41" name="Rectangle 40"/>
           <p:cNvSpPr/>
           <p:nvPr/>
         </p:nvSpPr>
@@ -12528,7 +11037,7 @@
       </p:sp>
       <p:sp>
         <p:nvSpPr>
-          <p:cNvPr id="70" name="Rectangle 69"/>
+          <p:cNvPr id="42" name="Rectangle 41"/>
           <p:cNvSpPr/>
           <p:nvPr/>
         </p:nvSpPr>
@@ -12572,7 +11081,7 @@
       </p:sp>
       <p:sp>
         <p:nvSpPr>
-          <p:cNvPr id="71" name="TextBox 70"/>
+          <p:cNvPr id="43" name="TextBox 42"/>
           <p:cNvSpPr txBox="1"/>
           <p:nvPr/>
         </p:nvSpPr>
@@ -12607,7 +11116,7 @@
       </p:sp>
       <p:sp>
         <p:nvSpPr>
-          <p:cNvPr id="72" name="TextBox 71"/>
+          <p:cNvPr id="44" name="TextBox 43"/>
           <p:cNvSpPr txBox="1"/>
           <p:nvPr/>
         </p:nvSpPr>
@@ -12635,14 +11144,14 @@
                 </a:solidFill>
                 <a:latin typeface="Calibri"/>
               </a:rPr>
-              <a:t>SAR 32.50</a:t>
-            </a:r>
-          </a:p>
-        </p:txBody>
-      </p:sp>
-      <p:sp>
-        <p:nvSpPr>
-          <p:cNvPr id="73" name="TextBox 72"/>
+              <a:t>SAR 30.08</a:t>
+            </a:r>
+          </a:p>
+        </p:txBody>
+      </p:sp>
+      <p:sp>
+        <p:nvSpPr>
+          <p:cNvPr id="45" name="TextBox 44"/>
           <p:cNvSpPr txBox="1"/>
           <p:nvPr/>
         </p:nvSpPr>
@@ -12670,14 +11179,14 @@
                 </a:solidFill>
                 <a:latin typeface="Calibri"/>
               </a:rPr>
-              <a:t>Range  SAR 27 — 38</a:t>
-            </a:r>
-          </a:p>
-        </p:txBody>
-      </p:sp>
-      <p:sp>
-        <p:nvSpPr>
-          <p:cNvPr id="74" name="TextBox 73"/>
+              <a:t>Range  SAR 26.8 — 35.0</a:t>
+            </a:r>
+          </a:p>
+        </p:txBody>
+      </p:sp>
+      <p:sp>
+        <p:nvSpPr>
+          <p:cNvPr id="46" name="TextBox 45"/>
           <p:cNvSpPr txBox="1"/>
           <p:nvPr/>
         </p:nvSpPr>
@@ -12705,14 +11214,14 @@
                 </a:solidFill>
                 <a:latin typeface="Calibri"/>
               </a:rPr>
-              <a:t>Implied +16.8% vs last close</a:t>
-            </a:r>
-          </a:p>
-        </p:txBody>
-      </p:sp>
-      <p:sp>
-        <p:nvSpPr>
-          <p:cNvPr id="75" name="Rectangle 74"/>
+              <a:t>Implied +8.5% vs last close</a:t>
+            </a:r>
+          </a:p>
+        </p:txBody>
+      </p:sp>
+      <p:sp>
+        <p:nvSpPr>
+          <p:cNvPr id="47" name="Rectangle 46"/>
           <p:cNvSpPr/>
           <p:nvPr/>
         </p:nvSpPr>
@@ -12758,7 +11267,7 @@
       </p:sp>
       <p:sp>
         <p:nvSpPr>
-          <p:cNvPr id="76" name="Rectangle 75"/>
+          <p:cNvPr id="48" name="Rectangle 47"/>
           <p:cNvSpPr/>
           <p:nvPr/>
         </p:nvSpPr>
@@ -12802,7 +11311,7 @@
       </p:sp>
       <p:sp>
         <p:nvSpPr>
-          <p:cNvPr id="77" name="TextBox 76"/>
+          <p:cNvPr id="49" name="TextBox 48"/>
           <p:cNvSpPr txBox="1"/>
           <p:nvPr/>
         </p:nvSpPr>
@@ -12837,7 +11346,7 @@
       </p:sp>
       <p:sp>
         <p:nvSpPr>
-          <p:cNvPr id="78" name="TextBox 77"/>
+          <p:cNvPr id="50" name="TextBox 49"/>
           <p:cNvSpPr txBox="1"/>
           <p:nvPr/>
         </p:nvSpPr>
@@ -12865,14 +11374,14 @@
                 </a:solidFill>
                 <a:latin typeface="Calibri"/>
               </a:rPr>
-              <a:t>May. 12</a:t>
-            </a:r>
-          </a:p>
-        </p:txBody>
-      </p:sp>
-      <p:sp>
-        <p:nvSpPr>
-          <p:cNvPr id="79" name="TextBox 78"/>
+              <a:t>14 May 2026</a:t>
+            </a:r>
+          </a:p>
+        </p:txBody>
+      </p:sp>
+      <p:sp>
+        <p:nvSpPr>
+          <p:cNvPr id="51" name="TextBox 50"/>
           <p:cNvSpPr txBox="1"/>
           <p:nvPr/>
         </p:nvSpPr>
@@ -12900,14 +11409,14 @@
                 </a:solidFill>
                 <a:latin typeface="Calibri"/>
               </a:rPr>
-              <a:t>Kepler Cheuvreux Raises Saudi Aramco's PT, Affirms Hold Rating</a:t>
-            </a:r>
-          </a:p>
-        </p:txBody>
-      </p:sp>
-      <p:sp>
-        <p:nvSpPr>
-          <p:cNvPr id="80" name="TextBox 79"/>
+              <a:t>BNP Paribas Lifts Saudi Aramco's PT, Affirms Neutral Rating</a:t>
+            </a:r>
+          </a:p>
+        </p:txBody>
+      </p:sp>
+      <p:sp>
+        <p:nvSpPr>
+          <p:cNvPr id="52" name="TextBox 51"/>
           <p:cNvSpPr txBox="1"/>
           <p:nvPr/>
         </p:nvSpPr>
@@ -12935,14 +11444,14 @@
                 </a:solidFill>
                 <a:latin typeface="Calibri"/>
               </a:rPr>
-              <a:t>May. 12</a:t>
-            </a:r>
-          </a:p>
-        </p:txBody>
-      </p:sp>
-      <p:sp>
-        <p:nvSpPr>
-          <p:cNvPr id="81" name="TextBox 80"/>
+              <a:t>12 May 2026</a:t>
+            </a:r>
+          </a:p>
+        </p:txBody>
+      </p:sp>
+      <p:sp>
+        <p:nvSpPr>
+          <p:cNvPr id="53" name="TextBox 52"/>
           <p:cNvSpPr txBox="1"/>
           <p:nvPr/>
         </p:nvSpPr>
@@ -12970,14 +11479,14 @@
                 </a:solidFill>
                 <a:latin typeface="Calibri"/>
               </a:rPr>
-              <a:t>HSBC Lifts Saudi Aramco's PT, Affirms Hold Rating</a:t>
-            </a:r>
-          </a:p>
-        </p:txBody>
-      </p:sp>
-      <p:sp>
-        <p:nvSpPr>
-          <p:cNvPr id="82" name="TextBox 81"/>
+              <a:t>Kepler Cheuvreux Raises Saudi Aramco's PT, Affirms Hold Rating</a:t>
+            </a:r>
+          </a:p>
+        </p:txBody>
+      </p:sp>
+      <p:sp>
+        <p:nvSpPr>
+          <p:cNvPr id="54" name="TextBox 53"/>
           <p:cNvSpPr txBox="1"/>
           <p:nvPr/>
         </p:nvSpPr>
@@ -13005,14 +11514,14 @@
                 </a:solidFill>
                 <a:latin typeface="Calibri"/>
               </a:rPr>
-              <a:t>May. 12</a:t>
-            </a:r>
-          </a:p>
-        </p:txBody>
-      </p:sp>
-      <p:sp>
-        <p:nvSpPr>
-          <p:cNvPr id="83" name="TextBox 82"/>
+              <a:t>12 May 2026</a:t>
+            </a:r>
+          </a:p>
+        </p:txBody>
+      </p:sp>
+      <p:sp>
+        <p:nvSpPr>
+          <p:cNvPr id="55" name="TextBox 54"/>
           <p:cNvSpPr txBox="1"/>
           <p:nvPr/>
         </p:nvSpPr>
@@ -13040,14 +11549,14 @@
                 </a:solidFill>
                 <a:latin typeface="Calibri"/>
               </a:rPr>
-              <a:t>Goldman Sachs Boosts Saudi Aramco's PT, Retains at Buy</a:t>
-            </a:r>
-          </a:p>
-        </p:txBody>
-      </p:sp>
-      <p:sp>
-        <p:nvSpPr>
-          <p:cNvPr id="84" name="Rectangle 83"/>
+              <a:t>HSBC Lifts Saudi Aramco's PT, Affirms Hold Rating</a:t>
+            </a:r>
+          </a:p>
+        </p:txBody>
+      </p:sp>
+      <p:sp>
+        <p:nvSpPr>
+          <p:cNvPr id="56" name="Rectangle 55"/>
           <p:cNvSpPr/>
           <p:nvPr/>
         </p:nvSpPr>
@@ -13091,7 +11600,7 @@
       </p:sp>
       <p:sp>
         <p:nvSpPr>
-          <p:cNvPr id="85" name="TextBox 84"/>
+          <p:cNvPr id="57" name="TextBox 56"/>
           <p:cNvSpPr txBox="1"/>
           <p:nvPr/>
         </p:nvSpPr>
@@ -13119,14 +11628,14 @@
                 </a:solidFill>
                 <a:latin typeface="Calibri"/>
               </a:rPr>
-              <a:t>Source: bloomberg, investing, marketscreener, yahoo  |  Generated 15 May 2026  |  Analyst: Jabal Research</a:t>
-            </a:r>
-          </a:p>
-        </p:txBody>
-      </p:sp>
-      <p:sp>
-        <p:nvSpPr>
-          <p:cNvPr id="86" name="TextBox 85"/>
+              <a:t>Source: Investing.com, Yahoo Finance, MarketScreener, World Bank / IMF, iShares, World Bank / OPEC / EIA  |  Generated 17 May 2026  |  Analyst: Jabal Research</a:t>
+            </a:r>
+          </a:p>
+        </p:txBody>
+      </p:sp>
+      <p:sp>
+        <p:nvSpPr>
+          <p:cNvPr id="58" name="TextBox 57"/>
           <p:cNvSpPr txBox="1"/>
           <p:nvPr/>
         </p:nvSpPr>
@@ -13161,7 +11670,7 @@
       </p:sp>
       <p:sp>
         <p:nvSpPr>
-          <p:cNvPr id="87" name="TextBox 86"/>
+          <p:cNvPr id="59" name="TextBox 58"/>
           <p:cNvSpPr txBox="1"/>
           <p:nvPr/>
         </p:nvSpPr>
@@ -13196,7 +11705,7 @@
       </p:sp>
       <p:sp>
         <p:nvSpPr>
-          <p:cNvPr id="88" name="TextBox 87"/>
+          <p:cNvPr id="60" name="TextBox 59"/>
           <p:cNvSpPr txBox="1"/>
           <p:nvPr/>
         </p:nvSpPr>
